--- a/Mid-term presentation.pptx
+++ b/Mid-term presentation.pptx
@@ -6,10 +6,10 @@
     <p:sldMasterId id="2147483877" r:id="rId2"/>
   </p:sldMasterIdLst>
   <p:notesMasterIdLst>
-    <p:notesMasterId r:id="rId24"/>
+    <p:notesMasterId r:id="rId25"/>
   </p:notesMasterIdLst>
   <p:handoutMasterIdLst>
-    <p:handoutMasterId r:id="rId25"/>
+    <p:handoutMasterId r:id="rId26"/>
   </p:handoutMasterIdLst>
   <p:sldIdLst>
     <p:sldId id="285" r:id="rId3"/>
@@ -29,15 +29,16 @@
     <p:sldId id="337" r:id="rId17"/>
     <p:sldId id="316" r:id="rId18"/>
     <p:sldId id="333" r:id="rId19"/>
-    <p:sldId id="317" r:id="rId20"/>
-    <p:sldId id="338" r:id="rId21"/>
-    <p:sldId id="304" r:id="rId22"/>
-    <p:sldId id="310" r:id="rId23"/>
+    <p:sldId id="338" r:id="rId20"/>
+    <p:sldId id="317" r:id="rId21"/>
+    <p:sldId id="339" r:id="rId22"/>
+    <p:sldId id="304" r:id="rId23"/>
+    <p:sldId id="310" r:id="rId24"/>
   </p:sldIdLst>
   <p:sldSz cx="12190413" cy="6858000"/>
   <p:notesSz cx="6797675" cy="9926638"/>
   <p:custDataLst>
-    <p:tags r:id="rId26"/>
+    <p:tags r:id="rId27"/>
   </p:custDataLst>
   <p:defaultTextStyle>
     <a:defPPr>
@@ -338,7 +339,7 @@
               <a:pPr>
                 <a:defRPr/>
               </a:pPr>
-              <a:t>01.07.2026</a:t>
+              <a:t>03.07.2026</a:t>
             </a:fld>
             <a:endParaRPr lang="de-DE" dirty="0"/>
           </a:p>
@@ -558,7 +559,7 @@
               <a:pPr>
                 <a:defRPr/>
               </a:pPr>
-              <a:t>01.07.2026</a:t>
+              <a:t>03.07.2026</a:t>
             </a:fld>
             <a:endParaRPr lang="de-DE" dirty="0"/>
           </a:p>
@@ -1418,7 +1419,7 @@
           <a:p>
             <a:r>
               <a:rPr lang="zh-CN" altLang="zh-CN" dirty="0"/>
-              <a:t>The second figure shows R-one, which represents the fast polarization resistance in the 2RC model.</a:t>
+              <a:t>This figure shows R-one, which represents the fast polarization resistance in the 2RC model.</a:t>
             </a:r>
             <a:endParaRPr lang="en-US" altLang="zh-CN" dirty="0"/>
           </a:p>
@@ -1428,7 +1429,7 @@
           <a:p>
             <a:r>
               <a:rPr lang="zh-CN" altLang="zh-CN" dirty="0"/>
-              <a:t>Compared with R-zero, R-one shows stronger dependence on SOC and pulse direction. At 10% SOC, the discharge pulse at 3.0 A gives consistently higher R-one values than the charge pulses. At 50% SOC, the overall R-one values are lower, but the discharge case still shows more fluctuation.</a:t>
+              <a:t>Compared with R-zero, R-one is more sensitive to SOC and pulse direction. At 10% SOC, the 3.0 A discharge pulses give consistently higher R-one values than the charge pulses. At 50% SOC, the values are generally lower, but the discharge case still shows larger fluctuations.</a:t>
             </a:r>
             <a:endParaRPr lang="en-US" altLang="zh-CN" dirty="0"/>
           </a:p>
@@ -1438,19 +1439,8 @@
           <a:p>
             <a:r>
               <a:rPr lang="zh-CN" altLang="zh-CN" dirty="0"/>
-              <a:t>At 90% SOC, R-one increases significantly as SOH decreases, especially after around 86% SOH. This suggests that the fast polarization process becomes more pronounced in aged cells, particularly under high-SOC conditions.</a:t>
-            </a:r>
-            <a:endParaRPr lang="en-US" altLang="zh-CN" dirty="0"/>
-          </a:p>
-          <a:p>
-            <a:endParaRPr lang="zh-CN" altLang="zh-CN" dirty="0"/>
-          </a:p>
-          <a:p>
-            <a:r>
-              <a:rPr lang="zh-CN" altLang="zh-CN" dirty="0"/>
-              <a:t>Therefore, R-one is more sensitive to operating conditions than R-zero, but it still provides useful information about aging-related polarization changes.</a:t>
-            </a:r>
-            <a:endParaRPr lang="en-US" altLang="zh-CN" dirty="0"/>
+              <a:t>At 90% SOC, R-one increases clearly as SOH decreases, especially below about 86% SOH. This suggests stronger fast polarization effects in aged cells under high-SOC conditions.</a:t>
+            </a:r>
           </a:p>
           <a:p>
             <a:endParaRPr lang="zh-CN" altLang="zh-CN" dirty="0"/>
@@ -1536,37 +1526,29 @@
           <a:lstStyle/>
           <a:p>
             <a:r>
-              <a:rPr lang="en-US" altLang="zh-CN" dirty="0"/>
-              <a:t>The third figure presents R-two, which represents the slow polarization resistance.</a:t>
-            </a:r>
-          </a:p>
-          <a:p>
+              <a:rPr lang="zh-CN" altLang="zh-CN" dirty="0"/>
+              <a:t>This figure shows R-two, which represents the slow polarization resistance in the 2RC model.</a:t>
+            </a:r>
             <a:endParaRPr lang="en-US" altLang="zh-CN" dirty="0"/>
           </a:p>
           <a:p>
-            <a:r>
-              <a:rPr lang="en-US" altLang="zh-CN" dirty="0"/>
-              <a:t>Among the three resistance parameters, R-two shows the largest variation. At 10% SOC, the discharge pulse at 3.0 A gives much higher R-two values than the other cases. This large difference may indicate that the slow polarization branch is highly sensitive under low-SOC discharge conditions, or that the parameter fitting becomes less robust in this case.</a:t>
-            </a:r>
-          </a:p>
-          <a:p>
+            <a:endParaRPr lang="zh-CN" altLang="zh-CN" dirty="0"/>
+          </a:p>
+          <a:p>
+            <a:r>
+              <a:rPr lang="zh-CN" altLang="zh-CN" dirty="0"/>
+              <a:t>R-two shows stronger condition dependence than R-one. At 10% SOC, the 3.0 A discharge case gives exceptionally high values, while the charge cases remain much lower. At 50% SOC, R-two generally increases with aging, but the discharge results are still higher and more variable.</a:t>
+            </a:r>
             <a:endParaRPr lang="en-US" altLang="zh-CN" dirty="0"/>
           </a:p>
           <a:p>
-            <a:r>
-              <a:rPr lang="en-US" altLang="zh-CN" dirty="0"/>
-              <a:t>At 50% SOC, the discharge case also gives higher R-two values than the charge cases, while at 90% SOC, R-two generally increases with decreasing SOH.</a:t>
-            </a:r>
-          </a:p>
-          <a:p>
-            <a:endParaRPr lang="en-US" altLang="zh-CN" dirty="0"/>
-          </a:p>
-          <a:p>
-            <a:r>
-              <a:rPr lang="en-US" altLang="zh-CN" dirty="0"/>
-              <a:t>Overall, R-two is the most sensitive parameter among the three. It can reflect slow voltage relaxation behavior, but it is also more affected by pulse condition, relaxation time, and fitting uncertainty. </a:t>
-            </a:r>
-            <a:endParaRPr lang="zh-CN" altLang="en-US" dirty="0"/>
+            <a:endParaRPr lang="zh-CN" altLang="zh-CN" dirty="0"/>
+          </a:p>
+          <a:p>
+            <a:r>
+              <a:rPr lang="zh-CN" altLang="zh-CN" dirty="0"/>
+              <a:t>At 90% SOC, the curves show a clearer increasing trend as SOH decreases. Overall, R-two contains useful slow-polarization information, but it is more sensitive to pulse conditions and fitting robustness.</a:t>
+            </a:r>
           </a:p>
         </p:txBody>
       </p:sp>
@@ -1647,7 +1629,7 @@
           <a:p>
             <a:r>
               <a:rPr lang="en-US" altLang="zh-CN" dirty="0"/>
-              <a:t>I found that the abnormal R-two values are related to the fitted tau-two. In several cases, tau-two is very close to the predefined bounds, either the lower bound or the upper bound.</a:t>
+              <a:t>On this slide, I would like summarize the main issues observed in the current fitting results. First, the estimated R₀ may still include part of the polarization response, because it is calculated from the voltage jump over a finite time difference. Therefore, R₀ should be interpreted as an apparent ohmic resistance rather than a purely instantaneous resistance.</a:t>
             </a:r>
           </a:p>
           <a:p>
@@ -1656,7 +1638,7 @@
           <a:p>
             <a:r>
               <a:rPr lang="en-US" altLang="zh-CN" dirty="0"/>
-              <a:t>So I think the issue is that the slow RC branch is not always well identifiable from the available pulse-pause data. The model can still fit the voltage response well, but R-two and tau-two may compensate each other.</a:t>
+              <a:t>Second, SOC-dependent bounds were applied to τ₂ in the second-order RC model. The purpose was to stabilize the nonlinear fitting and maintain a clear separation between the fast and slow relaxation branches.</a:t>
             </a:r>
           </a:p>
           <a:p>
@@ -1665,10 +1647,8 @@
           <a:p>
             <a:r>
               <a:rPr lang="en-US" altLang="zh-CN" dirty="0"/>
-              <a:t>My question is: should I treat these boundary-active results as unreliable and exclude them from the trend analysis, or should I keep them but clearly mark them as a limitation of the fitting method?</a:t>
-            </a:r>
-          </a:p>
-          <a:p>
+              <a:t>However, one important observation is that, during discharge at 10% SOC, τ₂ frequently reaches the 600-second upper bound. This does not necessarily mean that the real time constant is exactly 600 seconds. Instead, it suggests that the slow relaxation process is not fully identifiable within the available PAUO window.</a:t>
+            </a:r>
             <a:endParaRPr lang="zh-CN" altLang="en-US" dirty="0"/>
           </a:p>
         </p:txBody>
@@ -1773,7 +1753,7 @@
         <p:cNvPr id="1" name="">
           <a:extLst>
             <a:ext uri="{FF2B5EF4-FFF2-40B4-BE49-F238E27FC236}">
-              <a16:creationId xmlns:a16="http://schemas.microsoft.com/office/drawing/2014/main" id="{F5BE4B8E-7D36-529C-C697-66306A3F3C8C}"/>
+              <a16:creationId xmlns:a16="http://schemas.microsoft.com/office/drawing/2014/main" id="{F041F5BD-7FB3-8F69-958F-3DAD04931B52}"/>
             </a:ext>
           </a:extLst>
         </p:cNvPr>
@@ -1793,7 +1773,7 @@
           <p:cNvPr id="2" name="幻灯片图像占位符 1">
             <a:extLst>
               <a:ext uri="{FF2B5EF4-FFF2-40B4-BE49-F238E27FC236}">
-                <a16:creationId xmlns:a16="http://schemas.microsoft.com/office/drawing/2014/main" id="{760F3B3C-A3C0-4849-8531-76EED5C0A021}"/>
+                <a16:creationId xmlns:a16="http://schemas.microsoft.com/office/drawing/2014/main" id="{FB7976DE-3327-E8AE-1535-C8D6E5F3F2E5}"/>
               </a:ext>
             </a:extLst>
           </p:cNvPr>
@@ -1811,7 +1791,7 @@
           <p:cNvPr id="3" name="备注占位符 2">
             <a:extLst>
               <a:ext uri="{FF2B5EF4-FFF2-40B4-BE49-F238E27FC236}">
-                <a16:creationId xmlns:a16="http://schemas.microsoft.com/office/drawing/2014/main" id="{9B2BC36E-9FE9-23EE-0364-DE5778326DF8}"/>
+                <a16:creationId xmlns:a16="http://schemas.microsoft.com/office/drawing/2014/main" id="{DE100CB0-8E38-7DE8-9676-968D067F07C6}"/>
               </a:ext>
             </a:extLst>
           </p:cNvPr>
@@ -1834,7 +1814,7 @@
     </p:spTree>
     <p:extLst>
       <p:ext uri="{BB962C8B-B14F-4D97-AF65-F5344CB8AC3E}">
-        <p14:creationId xmlns:p14="http://schemas.microsoft.com/office/powerpoint/2010/main" val="1724753802"/>
+        <p14:creationId xmlns:p14="http://schemas.microsoft.com/office/powerpoint/2010/main" val="426518035"/>
       </p:ext>
     </p:extLst>
   </p:cSld>
@@ -1852,7 +1832,7 @@
         <p:cNvPr id="1" name="">
           <a:extLst>
             <a:ext uri="{FF2B5EF4-FFF2-40B4-BE49-F238E27FC236}">
-              <a16:creationId xmlns:a16="http://schemas.microsoft.com/office/drawing/2014/main" id="{F041F5BD-7FB3-8F69-958F-3DAD04931B52}"/>
+              <a16:creationId xmlns:a16="http://schemas.microsoft.com/office/drawing/2014/main" id="{F5BE4B8E-7D36-529C-C697-66306A3F3C8C}"/>
             </a:ext>
           </a:extLst>
         </p:cNvPr>
@@ -1872,7 +1852,7 @@
           <p:cNvPr id="2" name="幻灯片图像占位符 1">
             <a:extLst>
               <a:ext uri="{FF2B5EF4-FFF2-40B4-BE49-F238E27FC236}">
-                <a16:creationId xmlns:a16="http://schemas.microsoft.com/office/drawing/2014/main" id="{FB7976DE-3327-E8AE-1535-C8D6E5F3F2E5}"/>
+                <a16:creationId xmlns:a16="http://schemas.microsoft.com/office/drawing/2014/main" id="{760F3B3C-A3C0-4849-8531-76EED5C0A021}"/>
               </a:ext>
             </a:extLst>
           </p:cNvPr>
@@ -1890,7 +1870,7 @@
           <p:cNvPr id="3" name="备注占位符 2">
             <a:extLst>
               <a:ext uri="{FF2B5EF4-FFF2-40B4-BE49-F238E27FC236}">
-                <a16:creationId xmlns:a16="http://schemas.microsoft.com/office/drawing/2014/main" id="{DE100CB0-8E38-7DE8-9676-968D067F07C6}"/>
+                <a16:creationId xmlns:a16="http://schemas.microsoft.com/office/drawing/2014/main" id="{9B2BC36E-9FE9-23EE-0364-DE5778326DF8}"/>
               </a:ext>
             </a:extLst>
           </p:cNvPr>
@@ -1906,6 +1886,45 @@
           <a:bodyPr/>
           <a:lstStyle/>
           <a:p>
+            <a:r>
+              <a:rPr lang="en-US" altLang="zh-CN" dirty="0"/>
+              <a:t>This slide introduces two conventional multi-task learning formulations.</a:t>
+            </a:r>
+          </a:p>
+          <a:p>
+            <a:endParaRPr lang="en-US" altLang="zh-CN" dirty="0"/>
+          </a:p>
+          <a:p>
+            <a:r>
+              <a:rPr lang="en-US" altLang="zh-CN" dirty="0"/>
+              <a:t>In shared-bottom MTL, all tasks use one common encoder and separate output heads. It is a simple and efficient baseline, but it assumes that the relationships among SOH, R-zero, R-one, and R-two are consistent across all operating conditions.</a:t>
+            </a:r>
+          </a:p>
+          <a:p>
+            <a:endParaRPr lang="en-US" altLang="zh-CN" dirty="0"/>
+          </a:p>
+          <a:p>
+            <a:r>
+              <a:rPr lang="en-US" altLang="zh-CN" dirty="0"/>
+              <a:t>Auxiliary MTL assigns unequal roles to the tasks: SOH is the primary prediction target, while the resistance parameters provide additional degradation-related supervision.</a:t>
+            </a:r>
+          </a:p>
+          <a:p>
+            <a:endParaRPr lang="en-US" altLang="zh-CN" dirty="0"/>
+          </a:p>
+          <a:p>
+            <a:r>
+              <a:rPr lang="en-US" altLang="zh-CN" dirty="0"/>
+              <a:t>However, neither approach can adapt the sharing pattern to different SOC or pulse conditions. This motivates the </a:t>
+            </a:r>
+            <a:r>
+              <a:rPr lang="en-US" altLang="zh-CN" dirty="0" err="1"/>
+              <a:t>MMoE</a:t>
+            </a:r>
+            <a:r>
+              <a:rPr lang="en-US" altLang="zh-CN" dirty="0"/>
+              <a:t> method introduced next.</a:t>
+            </a:r>
             <a:endParaRPr lang="zh-CN" altLang="en-US" dirty="0"/>
           </a:p>
         </p:txBody>
@@ -1913,7 +1932,7 @@
     </p:spTree>
     <p:extLst>
       <p:ext uri="{BB962C8B-B14F-4D97-AF65-F5344CB8AC3E}">
-        <p14:creationId xmlns:p14="http://schemas.microsoft.com/office/powerpoint/2010/main" val="426518035"/>
+        <p14:creationId xmlns:p14="http://schemas.microsoft.com/office/powerpoint/2010/main" val="1724753802"/>
       </p:ext>
     </p:extLst>
   </p:cSld>
@@ -2003,6 +2022,120 @@
 </file>
 
 <file path=ppt/notesSlides/notesSlide20.xml><?xml version="1.0" encoding="utf-8"?>
+<p:notes xmlns:a="http://schemas.openxmlformats.org/drawingml/2006/main" xmlns:r="http://schemas.openxmlformats.org/officeDocument/2006/relationships" xmlns:p="http://schemas.openxmlformats.org/presentationml/2006/main">
+  <p:cSld>
+    <p:spTree>
+      <p:nvGrpSpPr>
+        <p:cNvPr id="1" name="">
+          <a:extLst>
+            <a:ext uri="{FF2B5EF4-FFF2-40B4-BE49-F238E27FC236}">
+              <a16:creationId xmlns:a16="http://schemas.microsoft.com/office/drawing/2014/main" id="{A9A3DDFC-E580-D0A5-12B9-815F7ED001CE}"/>
+            </a:ext>
+          </a:extLst>
+        </p:cNvPr>
+        <p:cNvGrpSpPr/>
+        <p:nvPr/>
+      </p:nvGrpSpPr>
+      <p:grpSpPr>
+        <a:xfrm>
+          <a:off x="0" y="0"/>
+          <a:ext cx="0" cy="0"/>
+          <a:chOff x="0" y="0"/>
+          <a:chExt cx="0" cy="0"/>
+        </a:xfrm>
+      </p:grpSpPr>
+      <p:sp>
+        <p:nvSpPr>
+          <p:cNvPr id="2" name="幻灯片图像占位符 1">
+            <a:extLst>
+              <a:ext uri="{FF2B5EF4-FFF2-40B4-BE49-F238E27FC236}">
+                <a16:creationId xmlns:a16="http://schemas.microsoft.com/office/drawing/2014/main" id="{0C0F36F5-1408-652C-07C1-4307350BBD91}"/>
+              </a:ext>
+            </a:extLst>
+          </p:cNvPr>
+          <p:cNvSpPr>
+            <a:spLocks noGrp="1" noRot="1" noChangeAspect="1"/>
+          </p:cNvSpPr>
+          <p:nvPr>
+            <p:ph type="sldImg"/>
+          </p:nvPr>
+        </p:nvSpPr>
+        <p:spPr/>
+      </p:sp>
+      <p:sp>
+        <p:nvSpPr>
+          <p:cNvPr id="3" name="备注占位符 2">
+            <a:extLst>
+              <a:ext uri="{FF2B5EF4-FFF2-40B4-BE49-F238E27FC236}">
+                <a16:creationId xmlns:a16="http://schemas.microsoft.com/office/drawing/2014/main" id="{9D2054AD-94CF-7925-B821-0E59AB04EE51}"/>
+              </a:ext>
+            </a:extLst>
+          </p:cNvPr>
+          <p:cNvSpPr>
+            <a:spLocks noGrp="1"/>
+          </p:cNvSpPr>
+          <p:nvPr>
+            <p:ph type="body" idx="1"/>
+          </p:nvPr>
+        </p:nvSpPr>
+        <p:spPr/>
+        <p:txBody>
+          <a:bodyPr/>
+          <a:lstStyle/>
+          <a:p>
+            <a:r>
+              <a:rPr lang="en-US" altLang="zh-CN" dirty="0"/>
+              <a:t>The previous two approaches use either fixed feature sharing or a fixed primary–auxiliary task structure. However, in this study, the relationship between SOH and the resistance parameters may change with SOC and pulse conditions.</a:t>
+            </a:r>
+          </a:p>
+          <a:p>
+            <a:endParaRPr lang="en-US" altLang="zh-CN" dirty="0"/>
+          </a:p>
+          <a:p>
+            <a:r>
+              <a:rPr lang="en-US" altLang="zh-CN" dirty="0" err="1"/>
+              <a:t>MMoE</a:t>
+            </a:r>
+            <a:r>
+              <a:rPr lang="en-US" altLang="zh-CN" dirty="0"/>
+              <a:t> addresses this issue through multiple shared experts and task-specific gates. Each expert can learn a different representation from the pulse-pause response, while each task dynamically assigns different weights to these experts.</a:t>
+            </a:r>
+          </a:p>
+          <a:p>
+            <a:endParaRPr lang="en-US" altLang="zh-CN" dirty="0"/>
+          </a:p>
+          <a:p>
+            <a:r>
+              <a:rPr lang="en-US" altLang="zh-CN" dirty="0"/>
+              <a:t>Therefore, the model can adapt the sharing pattern across SOC, current magnitude, and charge or discharge conditions. </a:t>
+            </a:r>
+          </a:p>
+          <a:p>
+            <a:endParaRPr lang="en-US" altLang="zh-CN" dirty="0"/>
+          </a:p>
+          <a:p>
+            <a:r>
+              <a:rPr lang="en-US" altLang="zh-CN" dirty="0"/>
+              <a:t>This is my preliminary concept for the model to be adopted in the next stage.</a:t>
+            </a:r>
+            <a:endParaRPr lang="zh-CN" altLang="en-US" dirty="0"/>
+          </a:p>
+        </p:txBody>
+      </p:sp>
+    </p:spTree>
+    <p:extLst>
+      <p:ext uri="{BB962C8B-B14F-4D97-AF65-F5344CB8AC3E}">
+        <p14:creationId xmlns:p14="http://schemas.microsoft.com/office/powerpoint/2010/main" val="1953767845"/>
+      </p:ext>
+    </p:extLst>
+  </p:cSld>
+  <p:clrMapOvr>
+    <a:masterClrMapping/>
+  </p:clrMapOvr>
+</p:notes>
+</file>
+
+<file path=ppt/notesSlides/notesSlide21.xml><?xml version="1.0" encoding="utf-8"?>
 <p:notes xmlns:a="http://schemas.openxmlformats.org/drawingml/2006/main" xmlns:r="http://schemas.openxmlformats.org/officeDocument/2006/relationships" xmlns:p="http://schemas.openxmlformats.org/presentationml/2006/main">
   <p:cSld>
     <p:spTree>
@@ -3278,7 +3411,7 @@
             <a:pPr algn="l"/>
             <a:fld id="{D7F12259-4066-44C3-AC08-F5ADAE7E0447}" type="datetime1">
               <a:rPr lang="de-DE" smtClean="0"/>
-              <a:t>01.07.2026</a:t>
+              <a:t>03.07.2026</a:t>
             </a:fld>
             <a:endParaRPr lang="de-DE" dirty="0"/>
           </a:p>
@@ -5568,7 +5701,7 @@
             <a:pPr algn="l"/>
             <a:fld id="{74486B41-BCE2-48B7-876C-2B3490450D97}" type="datetime1">
               <a:rPr lang="de-DE" smtClean="0"/>
-              <a:t>01.07.2026</a:t>
+              <a:t>03.07.2026</a:t>
             </a:fld>
             <a:endParaRPr lang="de-DE" dirty="0"/>
           </a:p>
@@ -5944,7 +6077,7 @@
             <a:pPr algn="l"/>
             <a:fld id="{85D6FCC3-EE37-4749-9624-859AF44EE717}" type="datetime1">
               <a:rPr lang="de-DE" smtClean="0"/>
-              <a:t>01.07.2026</a:t>
+              <a:t>03.07.2026</a:t>
             </a:fld>
             <a:endParaRPr lang="de-DE" dirty="0"/>
           </a:p>
@@ -6088,7 +6221,7 @@
             <a:pPr algn="l"/>
             <a:fld id="{E47FF345-F1B3-44B8-9B74-D6676F7F0EE5}" type="datetime1">
               <a:rPr lang="de-DE" smtClean="0"/>
-              <a:t>01.07.2026</a:t>
+              <a:t>03.07.2026</a:t>
             </a:fld>
             <a:endParaRPr lang="de-DE" dirty="0"/>
           </a:p>
@@ -6456,7 +6589,7 @@
             <a:pPr algn="l"/>
             <a:fld id="{6D3069C6-0311-4A39-8CC1-DA405FE38D0C}" type="datetime1">
               <a:rPr lang="de-DE" smtClean="0"/>
-              <a:t>01.07.2026</a:t>
+              <a:t>03.07.2026</a:t>
             </a:fld>
             <a:endParaRPr lang="de-DE" dirty="0"/>
           </a:p>
@@ -8812,7 +8945,7 @@
             <a:pPr algn="l"/>
             <a:fld id="{F887C18F-21B2-48B8-9586-9343C0AE58EE}" type="datetime1">
               <a:rPr lang="de-DE" smtClean="0"/>
-              <a:t>01.07.2026</a:t>
+              <a:t>03.07.2026</a:t>
             </a:fld>
             <a:endParaRPr lang="de-DE" dirty="0"/>
           </a:p>
@@ -9184,7 +9317,7 @@
             <a:pPr algn="l"/>
             <a:fld id="{E5AF013B-EAD8-4321-9A97-347E14C68B05}" type="datetime1">
               <a:rPr lang="de-DE" smtClean="0"/>
-              <a:t>01.07.2026</a:t>
+              <a:t>03.07.2026</a:t>
             </a:fld>
             <a:endParaRPr lang="de-DE" dirty="0"/>
           </a:p>
@@ -9324,7 +9457,7 @@
             <a:pPr algn="l"/>
             <a:fld id="{D3F884E6-7726-4AAA-A0CE-C180A27151DE}" type="datetime1">
               <a:rPr lang="de-DE" smtClean="0"/>
-              <a:t>01.07.2026</a:t>
+              <a:t>03.07.2026</a:t>
             </a:fld>
             <a:endParaRPr lang="de-DE" dirty="0"/>
           </a:p>
@@ -9955,7 +10088,7 @@
             <a:pPr algn="l"/>
             <a:fld id="{11769DE8-88E0-424A-87BD-6924D1146258}" type="datetime1">
               <a:rPr lang="de-DE" smtClean="0"/>
-              <a:t>01.07.2026</a:t>
+              <a:t>03.07.2026</a:t>
             </a:fld>
             <a:endParaRPr lang="de-DE" dirty="0"/>
           </a:p>
@@ -10763,7 +10896,7 @@
             <a:pPr algn="l"/>
             <a:fld id="{11769DE8-88E0-424A-87BD-6924D1146258}" type="datetime1">
               <a:rPr lang="de-DE" smtClean="0"/>
-              <a:t>01.07.2026</a:t>
+              <a:t>03.07.2026</a:t>
             </a:fld>
             <a:endParaRPr lang="de-DE" dirty="0"/>
           </a:p>
@@ -11392,7 +11525,7 @@
             <a:pPr algn="l"/>
             <a:fld id="{6D3069C6-0311-4A39-8CC1-DA405FE38D0C}" type="datetime1">
               <a:rPr lang="de-DE" smtClean="0"/>
-              <a:t>01.07.2026</a:t>
+              <a:t>03.07.2026</a:t>
             </a:fld>
             <a:endParaRPr lang="de-DE" dirty="0"/>
           </a:p>
@@ -11657,7 +11790,7 @@
           <a:p>
             <a:fld id="{D35072EC-9367-4D7B-8652-6A082F0A7E89}" type="datetime1">
               <a:rPr lang="de-DE" smtClean="0"/>
-              <a:t>01.07.2026</a:t>
+              <a:t>03.07.2026</a:t>
             </a:fld>
             <a:endParaRPr lang="de-DE" dirty="0"/>
           </a:p>
@@ -12583,7 +12716,7 @@
           <a:p>
             <a:fld id="{C2CC8288-72D4-44E2-951D-741F8F954282}" type="datetime1">
               <a:rPr lang="de-DE" smtClean="0"/>
-              <a:t>01.07.2026</a:t>
+              <a:t>03.07.2026</a:t>
             </a:fld>
             <a:endParaRPr lang="de-DE" dirty="0"/>
           </a:p>
@@ -15540,10 +15673,10 @@
       </p:sp>
       <p:pic>
         <p:nvPicPr>
-          <p:cNvPr id="7" name="图片 6">
+          <p:cNvPr id="8" name="图片 7">
             <a:extLst>
               <a:ext uri="{FF2B5EF4-FFF2-40B4-BE49-F238E27FC236}">
-                <a16:creationId xmlns:a16="http://schemas.microsoft.com/office/drawing/2014/main" id="{278B68D3-F736-1828-74E6-EB8E472F4299}"/>
+                <a16:creationId xmlns:a16="http://schemas.microsoft.com/office/drawing/2014/main" id="{E82FF1B6-96D2-5181-154D-4526FFD36BF0}"/>
               </a:ext>
             </a:extLst>
           </p:cNvPr>
@@ -15560,8 +15693,8 @@
         </p:blipFill>
         <p:spPr>
           <a:xfrm>
-            <a:off x="378345" y="1551482"/>
-            <a:ext cx="10646921" cy="4258768"/>
+            <a:off x="383950" y="1570610"/>
+            <a:ext cx="10781662" cy="4312665"/>
           </a:xfrm>
           <a:prstGeom prst="rect">
             <a:avLst/>
@@ -15764,10 +15897,10 @@
       </p:sp>
       <p:pic>
         <p:nvPicPr>
-          <p:cNvPr id="7" name="图片 6">
+          <p:cNvPr id="8" name="图片 7">
             <a:extLst>
               <a:ext uri="{FF2B5EF4-FFF2-40B4-BE49-F238E27FC236}">
-                <a16:creationId xmlns:a16="http://schemas.microsoft.com/office/drawing/2014/main" id="{2A447DBB-6A6B-F9FA-5FB9-F67AC5AF2570}"/>
+                <a16:creationId xmlns:a16="http://schemas.microsoft.com/office/drawing/2014/main" id="{C44DFE00-2C78-316E-E751-89CF2987D739}"/>
               </a:ext>
             </a:extLst>
           </p:cNvPr>
@@ -15784,8 +15917,8 @@
         </p:blipFill>
         <p:spPr>
           <a:xfrm>
-            <a:off x="383950" y="1542414"/>
-            <a:ext cx="10708771" cy="4283508"/>
+            <a:off x="383949" y="1538734"/>
+            <a:ext cx="10678791" cy="4271516"/>
           </a:xfrm>
           <a:prstGeom prst="rect">
             <a:avLst/>
@@ -15995,10 +16128,24 @@
               <a:buNone/>
             </a:pPr>
             <a:r>
-              <a:rPr lang="zh-CN" altLang="zh-CN" dirty="0"/>
+              <a:rPr lang="zh-CN" altLang="zh-CN" dirty="0">
+                <a:solidFill>
+                  <a:schemeClr val="accent1">
+                    <a:lumMod val="60000"/>
+                    <a:lumOff val="40000"/>
+                  </a:schemeClr>
+                </a:solidFill>
+              </a:rPr>
               <a:t>This may lead to an overestimation of the pure ohmic resistance.</a:t>
             </a:r>
-            <a:endParaRPr lang="en-US" altLang="zh-CN" dirty="0"/>
+            <a:endParaRPr lang="en-US" altLang="zh-CN" dirty="0">
+              <a:solidFill>
+                <a:schemeClr val="accent1">
+                  <a:lumMod val="60000"/>
+                  <a:lumOff val="40000"/>
+                </a:schemeClr>
+              </a:solidFill>
+            </a:endParaRPr>
           </a:p>
           <a:p>
             <a:pPr marL="0" indent="0">
@@ -16014,7 +16161,26 @@
             </a:pPr>
             <a:r>
               <a:rPr lang="en-US" altLang="zh-CN" dirty="0"/>
-              <a:t>Different τ₂ bounds were set for different SOC levels; for example:</a:t>
+              <a:t>SOC-dependent τ₂ bounds were applied to stabilize the RC fitting and separate fast/slow relaxation dynamics.</a:t>
+            </a:r>
+          </a:p>
+          <a:p>
+            <a:pPr>
+              <a:lnSpc>
+                <a:spcPct val="150000"/>
+              </a:lnSpc>
+            </a:pPr>
+            <a:endParaRPr lang="en-US" altLang="zh-CN" dirty="0"/>
+          </a:p>
+          <a:p>
+            <a:pPr>
+              <a:lnSpc>
+                <a:spcPct val="150000"/>
+              </a:lnSpc>
+            </a:pPr>
+            <a:r>
+              <a:rPr lang="en-US" altLang="zh-CN" dirty="0"/>
+              <a:t>For 10% SOC discharge, τ₂ frequently reaches the 600 s upper bound.</a:t>
             </a:r>
           </a:p>
           <a:p>
@@ -16025,49 +16191,22 @@
               <a:buNone/>
             </a:pPr>
             <a:r>
-              <a:rPr lang="en-US" altLang="zh-CN" dirty="0"/>
-              <a:t>10% SOC: The lower bound for τ₂ is approximately 80 s, with an upper bound reaching up to 600 s;</a:t>
-            </a:r>
-          </a:p>
-          <a:p>
-            <a:pPr marL="0" indent="0">
-              <a:lnSpc>
-                <a:spcPct val="150000"/>
-              </a:lnSpc>
-              <a:buNone/>
-            </a:pPr>
-            <a:r>
-              <a:rPr lang="en-US" altLang="zh-CN" dirty="0"/>
-              <a:t>50% SOC: The lower bound for τ₂ is approximately 60 s;</a:t>
-            </a:r>
-          </a:p>
-          <a:p>
-            <a:pPr marL="0" indent="0">
-              <a:lnSpc>
-                <a:spcPct val="150000"/>
-              </a:lnSpc>
-              <a:buNone/>
-            </a:pPr>
-            <a:r>
-              <a:rPr lang="en-US" altLang="zh-CN" dirty="0"/>
-              <a:t>90% SOC: The lower bound for τ₂ is approximately 40 s;</a:t>
-            </a:r>
-          </a:p>
-          <a:p>
-            <a:endParaRPr lang="en-US" altLang="zh-CN" dirty="0"/>
-          </a:p>
-          <a:p>
-            <a:r>
               <a:rPr lang="en-US" altLang="zh-CN" dirty="0">
                 <a:solidFill>
-                  <a:srgbClr val="FF0000"/>
+                  <a:schemeClr val="accent1">
+                    <a:lumMod val="60000"/>
+                    <a:lumOff val="40000"/>
+                  </a:schemeClr>
                 </a:solidFill>
               </a:rPr>
-              <a:t>During discharge (DCH) at 10% SOC, τ₂ frequently approaches the 600 s upper bound.</a:t>
+              <a:t>This suggests limited identifiability of the slow RC branch rather than a precise τ₂ estimate.</a:t>
             </a:r>
             <a:endParaRPr lang="zh-CN" altLang="en-US" dirty="0">
               <a:solidFill>
-                <a:srgbClr val="FF0000"/>
+                <a:schemeClr val="accent1">
+                  <a:lumMod val="60000"/>
+                  <a:lumOff val="40000"/>
+                </a:schemeClr>
               </a:solidFill>
             </a:endParaRPr>
           </a:p>
@@ -16339,7 +16478,7 @@
         <p:cNvPr id="1" name="">
           <a:extLst>
             <a:ext uri="{FF2B5EF4-FFF2-40B4-BE49-F238E27FC236}">
-              <a16:creationId xmlns:a16="http://schemas.microsoft.com/office/drawing/2014/main" id="{73340073-13A5-E636-67D8-AE1E4A62F078}"/>
+              <a16:creationId xmlns:a16="http://schemas.microsoft.com/office/drawing/2014/main" id="{276CC516-3DDB-1CC0-A971-D024686829B1}"/>
             </a:ext>
           </a:extLst>
         </p:cNvPr>
@@ -16359,7 +16498,7 @@
           <p:cNvPr id="2" name="Titel 1">
             <a:extLst>
               <a:ext uri="{FF2B5EF4-FFF2-40B4-BE49-F238E27FC236}">
-                <a16:creationId xmlns:a16="http://schemas.microsoft.com/office/drawing/2014/main" id="{CB59A045-0D74-9165-3F8F-872A101F9343}"/>
+                <a16:creationId xmlns:a16="http://schemas.microsoft.com/office/drawing/2014/main" id="{68EB0485-44F5-01CF-657A-B3D56D766EF3}"/>
               </a:ext>
             </a:extLst>
           </p:cNvPr>
@@ -16377,7 +16516,7 @@
           <a:p>
             <a:r>
               <a:rPr lang="zh-CN" altLang="zh-CN" dirty="0"/>
-              <a:t>Multi-task Learning for Battery Health Prediction</a:t>
+              <a:t>Next-stage Research Plan</a:t>
             </a:r>
           </a:p>
         </p:txBody>
@@ -16387,7 +16526,7 @@
           <p:cNvPr id="4" name="Datumsplatzhalter 3">
             <a:extLst>
               <a:ext uri="{FF2B5EF4-FFF2-40B4-BE49-F238E27FC236}">
-                <a16:creationId xmlns:a16="http://schemas.microsoft.com/office/drawing/2014/main" id="{7A4126F8-F689-D357-2765-C9C5358E1DA1}"/>
+                <a16:creationId xmlns:a16="http://schemas.microsoft.com/office/drawing/2014/main" id="{48D38B8B-34CC-EA52-4E41-A67D4F409C70}"/>
               </a:ext>
             </a:extLst>
           </p:cNvPr>
@@ -16416,7 +16555,7 @@
           <p:cNvPr id="5" name="Fußzeilenplatzhalter 4">
             <a:extLst>
               <a:ext uri="{FF2B5EF4-FFF2-40B4-BE49-F238E27FC236}">
-                <a16:creationId xmlns:a16="http://schemas.microsoft.com/office/drawing/2014/main" id="{009A0481-1D27-2D80-AC94-0E33261C44C1}"/>
+                <a16:creationId xmlns:a16="http://schemas.microsoft.com/office/drawing/2014/main" id="{F0FE6549-61F4-EBCD-39B2-35356DCCABF0}"/>
               </a:ext>
             </a:extLst>
           </p:cNvPr>
@@ -16449,7 +16588,7 @@
           <p:cNvPr id="6" name="Foliennummernplatzhalter 5">
             <a:extLst>
               <a:ext uri="{FF2B5EF4-FFF2-40B4-BE49-F238E27FC236}">
-                <a16:creationId xmlns:a16="http://schemas.microsoft.com/office/drawing/2014/main" id="{32323787-0025-E527-B450-CDF3498B73E2}"/>
+                <a16:creationId xmlns:a16="http://schemas.microsoft.com/office/drawing/2014/main" id="{2A7DF4AA-034E-4924-CEEB-8F729AA7D1C8}"/>
               </a:ext>
             </a:extLst>
           </p:cNvPr>
@@ -16479,7 +16618,7 @@
           <p:cNvPr id="7" name="文本框 6">
             <a:extLst>
               <a:ext uri="{FF2B5EF4-FFF2-40B4-BE49-F238E27FC236}">
-                <a16:creationId xmlns:a16="http://schemas.microsoft.com/office/drawing/2014/main" id="{A1651FCC-760E-7A79-5A6E-9747E1649B38}"/>
+                <a16:creationId xmlns:a16="http://schemas.microsoft.com/office/drawing/2014/main" id="{550F0326-97EC-07AD-6869-A00A87CAF062}"/>
               </a:ext>
             </a:extLst>
           </p:cNvPr>
@@ -16488,8 +16627,8 @@
         </p:nvSpPr>
         <p:spPr>
           <a:xfrm>
-            <a:off x="383950" y="1075306"/>
-            <a:ext cx="8075951" cy="1703030"/>
+            <a:off x="383950" y="998730"/>
+            <a:ext cx="8759712" cy="2222403"/>
           </a:xfrm>
           <a:prstGeom prst="rect">
             <a:avLst/>
@@ -16504,7 +16643,7 @@
           <a:p>
             <a:pPr marL="285750" indent="-285750">
               <a:lnSpc>
-                <a:spcPct val="150000"/>
+                <a:spcPct val="200000"/>
               </a:lnSpc>
               <a:buClr>
                 <a:srgbClr val="00549F"/>
@@ -16514,13 +16653,13 @@
             </a:pPr>
             <a:r>
               <a:rPr lang="zh-CN" altLang="zh-CN" dirty="0"/>
-              <a:t>Capacity, R₀, R₁, and R₂ are physically related through battery aging.</a:t>
+              <a:t>Build MTL dataset from extracted pulse-pause features and labels.</a:t>
             </a:r>
           </a:p>
           <a:p>
             <a:pPr marL="285750" indent="-285750">
               <a:lnSpc>
-                <a:spcPct val="150000"/>
+                <a:spcPct val="200000"/>
               </a:lnSpc>
               <a:buClr>
                 <a:srgbClr val="00549F"/>
@@ -16530,13 +16669,13 @@
             </a:pPr>
             <a:r>
               <a:rPr lang="zh-CN" altLang="zh-CN" dirty="0"/>
-              <a:t>Independent models may ignore shared degradation information.</a:t>
+              <a:t>Train and compare single-task vs multi-task models.</a:t>
             </a:r>
           </a:p>
           <a:p>
             <a:pPr marL="285750" indent="-285750">
               <a:lnSpc>
-                <a:spcPct val="150000"/>
+                <a:spcPct val="200000"/>
               </a:lnSpc>
               <a:buClr>
                 <a:srgbClr val="00549F"/>
@@ -16546,13 +16685,13 @@
             </a:pPr>
             <a:r>
               <a:rPr lang="zh-CN" altLang="zh-CN" dirty="0"/>
-              <a:t>MTL learns a shared aging-sensitive representation.</a:t>
+              <a:t>Evaluate generalization across SOC, current, and pulse direction.</a:t>
             </a:r>
           </a:p>
           <a:p>
             <a:pPr marL="285750" indent="-285750">
               <a:lnSpc>
-                <a:spcPct val="150000"/>
+                <a:spcPct val="200000"/>
               </a:lnSpc>
               <a:buClr>
                 <a:srgbClr val="00549F"/>
@@ -16562,7 +16701,7 @@
             </a:pPr>
             <a:r>
               <a:rPr lang="zh-CN" altLang="zh-CN" dirty="0"/>
-              <a:t>Task-specific heads predict capacity/SOH, R₀, R₁, and R₂.</a:t>
+              <a:t>Investigate how to handle uncertain R₂ labels caused by boundary-active τ₂.</a:t>
             </a:r>
           </a:p>
         </p:txBody>
@@ -16570,7 +16709,7 @@
     </p:spTree>
     <p:extLst>
       <p:ext uri="{BB962C8B-B14F-4D97-AF65-F5344CB8AC3E}">
-        <p14:creationId xmlns:p14="http://schemas.microsoft.com/office/powerpoint/2010/main" val="685495129"/>
+        <p14:creationId xmlns:p14="http://schemas.microsoft.com/office/powerpoint/2010/main" val="2560089319"/>
       </p:ext>
     </p:extLst>
   </p:cSld>
@@ -16588,7 +16727,7 @@
         <p:cNvPr id="1" name="">
           <a:extLst>
             <a:ext uri="{FF2B5EF4-FFF2-40B4-BE49-F238E27FC236}">
-              <a16:creationId xmlns:a16="http://schemas.microsoft.com/office/drawing/2014/main" id="{276CC516-3DDB-1CC0-A971-D024686829B1}"/>
+              <a16:creationId xmlns:a16="http://schemas.microsoft.com/office/drawing/2014/main" id="{73340073-13A5-E636-67D8-AE1E4A62F078}"/>
             </a:ext>
           </a:extLst>
         </p:cNvPr>
@@ -16608,7 +16747,7 @@
           <p:cNvPr id="2" name="Titel 1">
             <a:extLst>
               <a:ext uri="{FF2B5EF4-FFF2-40B4-BE49-F238E27FC236}">
-                <a16:creationId xmlns:a16="http://schemas.microsoft.com/office/drawing/2014/main" id="{68EB0485-44F5-01CF-657A-B3D56D766EF3}"/>
+                <a16:creationId xmlns:a16="http://schemas.microsoft.com/office/drawing/2014/main" id="{CB59A045-0D74-9165-3F8F-872A101F9343}"/>
               </a:ext>
             </a:extLst>
           </p:cNvPr>
@@ -16619,207 +16758,768 @@
             <p:ph type="title"/>
           </p:nvPr>
         </p:nvSpPr>
-        <p:spPr/>
-        <p:txBody>
-          <a:bodyPr/>
+        <p:spPr>
+          <a:xfrm>
+            <a:off x="383950" y="201600"/>
+            <a:ext cx="11422513" cy="543600"/>
+          </a:xfrm>
+        </p:spPr>
+        <p:txBody>
+          <a:bodyPr lIns="0" tIns="0" rIns="0" bIns="0" anchor="b" anchorCtr="0">
+            <a:normAutofit fontScale="90000"/>
+          </a:bodyPr>
           <a:lstStyle/>
           <a:p>
             <a:r>
               <a:rPr lang="zh-CN" altLang="zh-CN" dirty="0"/>
-              <a:t>Next-stage Research Plan</a:t>
-            </a:r>
-          </a:p>
-        </p:txBody>
-      </p:sp>
-      <p:sp>
-        <p:nvSpPr>
-          <p:cNvPr id="4" name="Datumsplatzhalter 3">
+              <a:t>Multi-Task Learning Baselines: Fixed Sharing and Health-Oriented Auxiliary Learning</a:t>
+            </a:r>
+          </a:p>
+        </p:txBody>
+      </p:sp>
+      <p:pic>
+        <p:nvPicPr>
+          <p:cNvPr id="10" name="图片 9">
             <a:extLst>
               <a:ext uri="{FF2B5EF4-FFF2-40B4-BE49-F238E27FC236}">
-                <a16:creationId xmlns:a16="http://schemas.microsoft.com/office/drawing/2014/main" id="{48D38B8B-34CC-EA52-4E41-A67D4F409C70}"/>
+                <a16:creationId xmlns:a16="http://schemas.microsoft.com/office/drawing/2014/main" id="{BDE433C3-4940-7837-E297-855B9C105EBE}"/>
               </a:ext>
             </a:extLst>
           </p:cNvPr>
-          <p:cNvSpPr>
-            <a:spLocks noGrp="1"/>
-          </p:cNvSpPr>
-          <p:nvPr>
-            <p:ph type="dt" sz="half" idx="10"/>
-          </p:nvPr>
-        </p:nvSpPr>
-        <p:spPr/>
-        <p:txBody>
-          <a:bodyPr/>
-          <a:lstStyle/>
-          <a:p>
-            <a:pPr algn="l"/>
-            <a:r>
-              <a:rPr lang="de-DE" dirty="0"/>
-              <a:t>09.07.2026</a:t>
-            </a:r>
-          </a:p>
-        </p:txBody>
-      </p:sp>
-      <p:sp>
-        <p:nvSpPr>
-          <p:cNvPr id="5" name="Fußzeilenplatzhalter 4">
-            <a:extLst>
-              <a:ext uri="{FF2B5EF4-FFF2-40B4-BE49-F238E27FC236}">
-                <a16:creationId xmlns:a16="http://schemas.microsoft.com/office/drawing/2014/main" id="{F0FE6549-61F4-EBCD-39B2-35356DCCABF0}"/>
-              </a:ext>
-            </a:extLst>
-          </p:cNvPr>
-          <p:cNvSpPr>
-            <a:spLocks noGrp="1"/>
-          </p:cNvSpPr>
-          <p:nvPr>
-            <p:ph type="ftr" sz="quarter" idx="11"/>
-          </p:nvPr>
-        </p:nvSpPr>
-        <p:spPr/>
-        <p:txBody>
-          <a:bodyPr/>
-          <a:lstStyle/>
-          <a:p>
-            <a:r>
-              <a:rPr lang="en-US"/>
-              <a:t>Y</a:t>
-            </a:r>
-            <a:r>
-              <a:rPr lang="en-US" altLang="zh-CN"/>
-              <a:t>ida Cheng</a:t>
-            </a:r>
-            <a:endParaRPr lang="en-US" dirty="0"/>
-          </a:p>
-        </p:txBody>
-      </p:sp>
-      <p:sp>
-        <p:nvSpPr>
-          <p:cNvPr id="6" name="Foliennummernplatzhalter 5">
-            <a:extLst>
-              <a:ext uri="{FF2B5EF4-FFF2-40B4-BE49-F238E27FC236}">
-                <a16:creationId xmlns:a16="http://schemas.microsoft.com/office/drawing/2014/main" id="{2A7DF4AA-034E-4924-CEEB-8F729AA7D1C8}"/>
-              </a:ext>
-            </a:extLst>
-          </p:cNvPr>
-          <p:cNvSpPr>
-            <a:spLocks noGrp="1"/>
-          </p:cNvSpPr>
-          <p:nvPr>
-            <p:ph type="sldNum" sz="quarter" idx="12"/>
-          </p:nvPr>
-        </p:nvSpPr>
-        <p:spPr/>
-        <p:txBody>
-          <a:bodyPr/>
-          <a:lstStyle/>
-          <a:p>
-            <a:fld id="{4D01E63C-D794-4429-8564-635E6253AC5C}" type="slidenum">
-              <a:rPr lang="en-US" smtClean="0"/>
-              <a:pPr/>
-              <a:t>19</a:t>
-            </a:fld>
-            <a:endParaRPr lang="en-US" dirty="0"/>
-          </a:p>
-        </p:txBody>
-      </p:sp>
-      <p:sp>
-        <p:nvSpPr>
-          <p:cNvPr id="7" name="文本框 6">
-            <a:extLst>
-              <a:ext uri="{FF2B5EF4-FFF2-40B4-BE49-F238E27FC236}">
-                <a16:creationId xmlns:a16="http://schemas.microsoft.com/office/drawing/2014/main" id="{550F0326-97EC-07AD-6869-A00A87CAF062}"/>
-              </a:ext>
-            </a:extLst>
-          </p:cNvPr>
-          <p:cNvSpPr txBox="1"/>
+          <p:cNvPicPr>
+            <a:picLocks noChangeAspect="1"/>
+          </p:cNvPicPr>
           <p:nvPr/>
-        </p:nvSpPr>
+        </p:nvPicPr>
+        <p:blipFill>
+          <a:blip r:embed="rId3"/>
+          <a:stretch>
+            <a:fillRect/>
+          </a:stretch>
+        </p:blipFill>
         <p:spPr>
           <a:xfrm>
-            <a:off x="383950" y="998730"/>
-            <a:ext cx="8759712" cy="1703030"/>
+            <a:off x="379151" y="1745184"/>
+            <a:ext cx="5620068" cy="2655481"/>
           </a:xfrm>
           <a:prstGeom prst="rect">
             <a:avLst/>
           </a:prstGeom>
           <a:noFill/>
         </p:spPr>
+      </p:pic>
+      <p:sp>
+        <p:nvSpPr>
+          <p:cNvPr id="7" name="文本框 6">
+            <a:extLst>
+              <a:ext uri="{FF2B5EF4-FFF2-40B4-BE49-F238E27FC236}">
+                <a16:creationId xmlns:a16="http://schemas.microsoft.com/office/drawing/2014/main" id="{A1651FCC-760E-7A79-5A6E-9747E1649B38}"/>
+              </a:ext>
+            </a:extLst>
+          </p:cNvPr>
+          <p:cNvSpPr txBox="1"/>
+          <p:nvPr/>
+        </p:nvSpPr>
+        <p:spPr>
+          <a:xfrm>
+            <a:off x="6191194" y="1151999"/>
+            <a:ext cx="5620068" cy="4731275"/>
+          </a:xfrm>
+          <a:prstGeom prst="rect">
+            <a:avLst/>
+          </a:prstGeom>
+        </p:spPr>
+        <p:txBody>
+          <a:bodyPr lIns="0" tIns="0" rIns="0" bIns="0">
+            <a:normAutofit fontScale="92500" lnSpcReduction="20000"/>
+          </a:bodyPr>
+          <a:lstStyle/>
+          <a:p>
+            <a:pPr marL="215900" indent="-215900" defTabSz="215900" eaLnBrk="1" hangingPunct="1">
+              <a:lnSpc>
+                <a:spcPct val="90000"/>
+              </a:lnSpc>
+              <a:spcBef>
+                <a:spcPts val="0"/>
+              </a:spcBef>
+              <a:spcAft>
+                <a:spcPts val="450"/>
+              </a:spcAft>
+              <a:buClr>
+                <a:schemeClr val="tx2"/>
+              </a:buClr>
+              <a:buFont typeface="Arial" panose="020B0604020202020204" pitchFamily="34" charset="0"/>
+              <a:buChar char="■"/>
+              <a:tabLst>
+                <a:tab pos="215900" algn="l"/>
+              </a:tabLst>
+            </a:pPr>
+            <a:r>
+              <a:rPr lang="en-US" altLang="zh-CN" dirty="0">
+                <a:latin typeface="Arial" panose="020B0604020202020204" pitchFamily="34" charset="0"/>
+                <a:cs typeface="Arial" panose="020B0604020202020204" pitchFamily="34" charset="0"/>
+              </a:rPr>
+              <a:t>Shared-bottom MTL:</a:t>
+            </a:r>
+          </a:p>
+          <a:p>
+            <a:pPr marL="285750" indent="-285750" defTabSz="215900" eaLnBrk="1" hangingPunct="1">
+              <a:lnSpc>
+                <a:spcPct val="150000"/>
+              </a:lnSpc>
+              <a:spcBef>
+                <a:spcPts val="0"/>
+              </a:spcBef>
+              <a:spcAft>
+                <a:spcPts val="450"/>
+              </a:spcAft>
+              <a:buClr>
+                <a:schemeClr val="tx2"/>
+              </a:buClr>
+              <a:buSzPct val="100000"/>
+              <a:buFont typeface="Arial" panose="020B0604020202020204" pitchFamily="34" charset="0"/>
+              <a:buChar char="□"/>
+              <a:tabLst>
+                <a:tab pos="215900" algn="l"/>
+              </a:tabLst>
+            </a:pPr>
+            <a:r>
+              <a:rPr lang="en-US" altLang="zh-CN" sz="1600" dirty="0">
+                <a:latin typeface="Arial" panose="020B0604020202020204" pitchFamily="34" charset="0"/>
+                <a:cs typeface="Arial" panose="020B0604020202020204" pitchFamily="34" charset="0"/>
+              </a:rPr>
+              <a:t>Shared encoder learns common degradation representation; task-specific heads predict SOH, R</a:t>
+            </a:r>
+            <a:r>
+              <a:rPr lang="en-US" altLang="zh-CN" sz="1600" baseline="-25000" dirty="0">
+                <a:latin typeface="Arial" panose="020B0604020202020204" pitchFamily="34" charset="0"/>
+                <a:cs typeface="Arial" panose="020B0604020202020204" pitchFamily="34" charset="0"/>
+              </a:rPr>
+              <a:t>0</a:t>
+            </a:r>
+            <a:r>
+              <a:rPr lang="en-US" altLang="zh-CN" sz="1600" dirty="0">
+                <a:latin typeface="Arial" panose="020B0604020202020204" pitchFamily="34" charset="0"/>
+                <a:cs typeface="Arial" panose="020B0604020202020204" pitchFamily="34" charset="0"/>
+              </a:rPr>
+              <a:t>, R</a:t>
+            </a:r>
+            <a:r>
+              <a:rPr lang="en-US" altLang="zh-CN" sz="1600" baseline="-25000" dirty="0">
+                <a:latin typeface="Arial" panose="020B0604020202020204" pitchFamily="34" charset="0"/>
+                <a:cs typeface="Arial" panose="020B0604020202020204" pitchFamily="34" charset="0"/>
+              </a:rPr>
+              <a:t>1</a:t>
+            </a:r>
+            <a:r>
+              <a:rPr lang="en-US" altLang="zh-CN" sz="1600" dirty="0">
+                <a:latin typeface="Arial" panose="020B0604020202020204" pitchFamily="34" charset="0"/>
+                <a:cs typeface="Arial" panose="020B0604020202020204" pitchFamily="34" charset="0"/>
+              </a:rPr>
+              <a:t>, R</a:t>
+            </a:r>
+            <a:r>
+              <a:rPr lang="en-US" altLang="zh-CN" sz="1600" baseline="-25000" dirty="0">
+                <a:latin typeface="Arial" panose="020B0604020202020204" pitchFamily="34" charset="0"/>
+                <a:cs typeface="Arial" panose="020B0604020202020204" pitchFamily="34" charset="0"/>
+              </a:rPr>
+              <a:t>2.</a:t>
+            </a:r>
+          </a:p>
+          <a:p>
+            <a:pPr marL="285750" indent="-285750" defTabSz="215900" eaLnBrk="1" hangingPunct="1">
+              <a:lnSpc>
+                <a:spcPct val="150000"/>
+              </a:lnSpc>
+              <a:spcBef>
+                <a:spcPts val="0"/>
+              </a:spcBef>
+              <a:spcAft>
+                <a:spcPts val="450"/>
+              </a:spcAft>
+              <a:buClr>
+                <a:schemeClr val="tx2"/>
+              </a:buClr>
+              <a:buSzPct val="100000"/>
+              <a:buFont typeface="Arial" panose="020B0604020202020204" pitchFamily="34" charset="0"/>
+              <a:buChar char="□"/>
+              <a:tabLst>
+                <a:tab pos="215900" algn="l"/>
+              </a:tabLst>
+            </a:pPr>
+            <a:r>
+              <a:rPr lang="zh-CN" altLang="zh-CN" sz="1600" dirty="0"/>
+              <a:t>Assumes that a fixed shared representation is useful for all tasks across SOC and pulse conditions.</a:t>
+            </a:r>
+            <a:endParaRPr lang="en-US" altLang="zh-CN" sz="1600" dirty="0"/>
+          </a:p>
+          <a:p>
+            <a:pPr marL="285750" indent="-285750" defTabSz="215900" eaLnBrk="1" hangingPunct="1">
+              <a:lnSpc>
+                <a:spcPct val="150000"/>
+              </a:lnSpc>
+              <a:spcBef>
+                <a:spcPts val="0"/>
+              </a:spcBef>
+              <a:spcAft>
+                <a:spcPts val="450"/>
+              </a:spcAft>
+              <a:buClr>
+                <a:schemeClr val="tx2"/>
+              </a:buClr>
+              <a:buSzPct val="100000"/>
+              <a:buFont typeface="Arial" panose="020B0604020202020204" pitchFamily="34" charset="0"/>
+              <a:buChar char="□"/>
+              <a:tabLst>
+                <a:tab pos="215900" algn="l"/>
+              </a:tabLst>
+            </a:pPr>
+            <a:r>
+              <a:rPr lang="en-US" altLang="zh-CN" sz="1600" dirty="0">
+                <a:latin typeface="Arial" panose="020B0604020202020204" pitchFamily="34" charset="0"/>
+                <a:cs typeface="Arial" panose="020B0604020202020204" pitchFamily="34" charset="0"/>
+              </a:rPr>
+              <a:t>Baseline architecture — simple, low parameter count, suited to limited sample size.</a:t>
+            </a:r>
+          </a:p>
+          <a:p>
+            <a:pPr marL="215900" indent="-215900" defTabSz="215900" eaLnBrk="1" hangingPunct="1">
+              <a:lnSpc>
+                <a:spcPct val="90000"/>
+              </a:lnSpc>
+              <a:spcBef>
+                <a:spcPts val="0"/>
+              </a:spcBef>
+              <a:spcAft>
+                <a:spcPts val="450"/>
+              </a:spcAft>
+              <a:buClr>
+                <a:schemeClr val="tx2"/>
+              </a:buClr>
+              <a:buFont typeface="Arial" panose="020B0604020202020204" pitchFamily="34" charset="0"/>
+              <a:buChar char="■"/>
+              <a:tabLst>
+                <a:tab pos="215900" algn="l"/>
+              </a:tabLst>
+            </a:pPr>
+            <a:endParaRPr lang="en-US" altLang="zh-CN" sz="1600" dirty="0">
+              <a:latin typeface="Arial" panose="020B0604020202020204" pitchFamily="34" charset="0"/>
+              <a:cs typeface="Arial" panose="020B0604020202020204" pitchFamily="34" charset="0"/>
+            </a:endParaRPr>
+          </a:p>
+          <a:p>
+            <a:pPr marL="215900" indent="-215900" defTabSz="215900" eaLnBrk="1" hangingPunct="1">
+              <a:lnSpc>
+                <a:spcPct val="90000"/>
+              </a:lnSpc>
+              <a:spcBef>
+                <a:spcPts val="0"/>
+              </a:spcBef>
+              <a:spcAft>
+                <a:spcPts val="450"/>
+              </a:spcAft>
+              <a:buClr>
+                <a:schemeClr val="tx2"/>
+              </a:buClr>
+              <a:buFont typeface="Arial" panose="020B0604020202020204" pitchFamily="34" charset="0"/>
+              <a:buChar char="■"/>
+              <a:tabLst>
+                <a:tab pos="215900" algn="l"/>
+              </a:tabLst>
+            </a:pPr>
+            <a:endParaRPr lang="en-US" altLang="zh-CN" sz="1600" dirty="0">
+              <a:latin typeface="Arial" panose="020B0604020202020204" pitchFamily="34" charset="0"/>
+              <a:cs typeface="Arial" panose="020B0604020202020204" pitchFamily="34" charset="0"/>
+            </a:endParaRPr>
+          </a:p>
+          <a:p>
+            <a:pPr defTabSz="215900" eaLnBrk="1" hangingPunct="1">
+              <a:lnSpc>
+                <a:spcPct val="90000"/>
+              </a:lnSpc>
+              <a:spcBef>
+                <a:spcPts val="0"/>
+              </a:spcBef>
+              <a:spcAft>
+                <a:spcPts val="450"/>
+              </a:spcAft>
+              <a:buClr>
+                <a:schemeClr val="tx2"/>
+              </a:buClr>
+              <a:tabLst>
+                <a:tab pos="215900" algn="l"/>
+              </a:tabLst>
+            </a:pPr>
+            <a:endParaRPr lang="en-US" altLang="zh-CN" sz="1600" dirty="0">
+              <a:latin typeface="Arial" panose="020B0604020202020204" pitchFamily="34" charset="0"/>
+              <a:cs typeface="Arial" panose="020B0604020202020204" pitchFamily="34" charset="0"/>
+            </a:endParaRPr>
+          </a:p>
+          <a:p>
+            <a:pPr marL="215900" indent="-215900" defTabSz="215900" eaLnBrk="1" hangingPunct="1">
+              <a:lnSpc>
+                <a:spcPct val="90000"/>
+              </a:lnSpc>
+              <a:spcBef>
+                <a:spcPts val="0"/>
+              </a:spcBef>
+              <a:spcAft>
+                <a:spcPts val="450"/>
+              </a:spcAft>
+              <a:buClr>
+                <a:schemeClr val="tx2"/>
+              </a:buClr>
+              <a:buFont typeface="Arial" panose="020B0604020202020204" pitchFamily="34" charset="0"/>
+              <a:buChar char="■"/>
+              <a:tabLst>
+                <a:tab pos="215900" algn="l"/>
+              </a:tabLst>
+            </a:pPr>
+            <a:r>
+              <a:rPr lang="en-US" altLang="zh-CN" dirty="0">
+                <a:latin typeface="Arial" panose="020B0604020202020204" pitchFamily="34" charset="0"/>
+                <a:cs typeface="Arial" panose="020B0604020202020204" pitchFamily="34" charset="0"/>
+              </a:rPr>
+              <a:t>Auxiliary MTL:</a:t>
+            </a:r>
+          </a:p>
+          <a:p>
+            <a:pPr marL="285750" indent="-285750" defTabSz="215900" eaLnBrk="1" hangingPunct="1">
+              <a:lnSpc>
+                <a:spcPct val="160000"/>
+              </a:lnSpc>
+              <a:spcBef>
+                <a:spcPts val="0"/>
+              </a:spcBef>
+              <a:spcAft>
+                <a:spcPts val="450"/>
+              </a:spcAft>
+              <a:buClr>
+                <a:schemeClr val="tx2"/>
+              </a:buClr>
+              <a:buFont typeface="Arial" panose="020B0604020202020204" pitchFamily="34" charset="0"/>
+              <a:buChar char="□"/>
+              <a:tabLst>
+                <a:tab pos="215900" algn="l"/>
+              </a:tabLst>
+            </a:pPr>
+            <a:r>
+              <a:rPr lang="en-US" altLang="zh-CN" sz="1600" dirty="0">
+                <a:latin typeface="Arial" panose="020B0604020202020204" pitchFamily="34" charset="0"/>
+                <a:cs typeface="Arial" panose="020B0604020202020204" pitchFamily="34" charset="0"/>
+              </a:rPr>
+              <a:t>Reframes the four tasks as unequal: SOH as primary task, R</a:t>
+            </a:r>
+            <a:r>
+              <a:rPr lang="en-US" altLang="zh-CN" sz="1600" baseline="-25000" dirty="0">
+                <a:latin typeface="Arial" panose="020B0604020202020204" pitchFamily="34" charset="0"/>
+                <a:cs typeface="Arial" panose="020B0604020202020204" pitchFamily="34" charset="0"/>
+              </a:rPr>
+              <a:t>0</a:t>
+            </a:r>
+            <a:r>
+              <a:rPr lang="en-US" altLang="zh-CN" sz="1600" dirty="0">
+                <a:latin typeface="Arial" panose="020B0604020202020204" pitchFamily="34" charset="0"/>
+                <a:cs typeface="Arial" panose="020B0604020202020204" pitchFamily="34" charset="0"/>
+              </a:rPr>
+              <a:t>, R</a:t>
+            </a:r>
+            <a:r>
+              <a:rPr lang="en-US" altLang="zh-CN" sz="1600" baseline="-25000" dirty="0">
+                <a:latin typeface="Arial" panose="020B0604020202020204" pitchFamily="34" charset="0"/>
+                <a:cs typeface="Arial" panose="020B0604020202020204" pitchFamily="34" charset="0"/>
+              </a:rPr>
+              <a:t>1</a:t>
+            </a:r>
+            <a:r>
+              <a:rPr lang="en-US" altLang="zh-CN" sz="1600" dirty="0">
+                <a:latin typeface="Arial" panose="020B0604020202020204" pitchFamily="34" charset="0"/>
+                <a:cs typeface="Arial" panose="020B0604020202020204" pitchFamily="34" charset="0"/>
+              </a:rPr>
+              <a:t>, R</a:t>
+            </a:r>
+            <a:r>
+              <a:rPr lang="en-US" altLang="zh-CN" sz="1600" baseline="-25000" dirty="0">
+                <a:latin typeface="Arial" panose="020B0604020202020204" pitchFamily="34" charset="0"/>
+                <a:cs typeface="Arial" panose="020B0604020202020204" pitchFamily="34" charset="0"/>
+              </a:rPr>
+              <a:t>2 </a:t>
+            </a:r>
+            <a:r>
+              <a:rPr lang="en-US" altLang="zh-CN" sz="1600" dirty="0">
+                <a:latin typeface="Arial" panose="020B0604020202020204" pitchFamily="34" charset="0"/>
+                <a:cs typeface="Arial" panose="020B0604020202020204" pitchFamily="34" charset="0"/>
+              </a:rPr>
+              <a:t>as auxiliary tasks.</a:t>
+            </a:r>
+          </a:p>
+          <a:p>
+            <a:pPr marL="285750" indent="-285750" defTabSz="215900" eaLnBrk="1" hangingPunct="1">
+              <a:lnSpc>
+                <a:spcPct val="160000"/>
+              </a:lnSpc>
+              <a:spcBef>
+                <a:spcPts val="0"/>
+              </a:spcBef>
+              <a:spcAft>
+                <a:spcPts val="450"/>
+              </a:spcAft>
+              <a:buClr>
+                <a:schemeClr val="tx2"/>
+              </a:buClr>
+              <a:buFont typeface="Arial" panose="020B0604020202020204" pitchFamily="34" charset="0"/>
+              <a:buChar char="□"/>
+              <a:tabLst>
+                <a:tab pos="215900" algn="l"/>
+              </a:tabLst>
+            </a:pPr>
+            <a:r>
+              <a:rPr lang="en-US" altLang="zh-CN" sz="1600" dirty="0">
+                <a:latin typeface="Arial" panose="020B0604020202020204" pitchFamily="34" charset="0"/>
+                <a:cs typeface="Arial" panose="020B0604020202020204" pitchFamily="34" charset="0"/>
+              </a:rPr>
+              <a:t>Auxiliary tasks (pulse-derived signals) regularize the shared representation used to predict the primary task (SOH).</a:t>
+            </a:r>
+          </a:p>
+          <a:p>
+            <a:pPr marL="215900" indent="-215900" defTabSz="215900" eaLnBrk="1" hangingPunct="1">
+              <a:lnSpc>
+                <a:spcPct val="90000"/>
+              </a:lnSpc>
+              <a:spcBef>
+                <a:spcPts val="0"/>
+              </a:spcBef>
+              <a:spcAft>
+                <a:spcPts val="450"/>
+              </a:spcAft>
+              <a:buClr>
+                <a:schemeClr val="tx2"/>
+              </a:buClr>
+              <a:buFont typeface="Arial" panose="020B0604020202020204" pitchFamily="34" charset="0"/>
+              <a:buChar char="■"/>
+              <a:tabLst>
+                <a:tab pos="215900" algn="l"/>
+              </a:tabLst>
+            </a:pPr>
+            <a:endParaRPr lang="en-US" altLang="zh-CN" sz="1600" dirty="0">
+              <a:latin typeface="Arial" panose="020B0604020202020204" pitchFamily="34" charset="0"/>
+              <a:cs typeface="Arial" panose="020B0604020202020204" pitchFamily="34" charset="0"/>
+            </a:endParaRPr>
+          </a:p>
+          <a:p>
+            <a:pPr marL="215900" indent="-215900" defTabSz="215900" eaLnBrk="1" hangingPunct="1">
+              <a:lnSpc>
+                <a:spcPct val="90000"/>
+              </a:lnSpc>
+              <a:spcBef>
+                <a:spcPts val="0"/>
+              </a:spcBef>
+              <a:spcAft>
+                <a:spcPts val="450"/>
+              </a:spcAft>
+              <a:buClr>
+                <a:schemeClr val="tx2"/>
+              </a:buClr>
+              <a:buFont typeface="Arial" panose="020B0604020202020204" pitchFamily="34" charset="0"/>
+              <a:buChar char="■"/>
+              <a:tabLst>
+                <a:tab pos="215900" algn="l"/>
+              </a:tabLst>
+            </a:pPr>
+            <a:endParaRPr lang="en-US" altLang="zh-CN" sz="1600" dirty="0">
+              <a:latin typeface="Arial" panose="020B0604020202020204" pitchFamily="34" charset="0"/>
+              <a:cs typeface="Arial" panose="020B0604020202020204" pitchFamily="34" charset="0"/>
+            </a:endParaRPr>
+          </a:p>
+          <a:p>
+            <a:pPr marL="215900" indent="-215900" defTabSz="215900" eaLnBrk="1" hangingPunct="1">
+              <a:lnSpc>
+                <a:spcPct val="90000"/>
+              </a:lnSpc>
+              <a:spcBef>
+                <a:spcPts val="0"/>
+              </a:spcBef>
+              <a:spcAft>
+                <a:spcPts val="450"/>
+              </a:spcAft>
+              <a:buClr>
+                <a:schemeClr val="tx2"/>
+              </a:buClr>
+              <a:buFont typeface="Arial" panose="020B0604020202020204" pitchFamily="34" charset="0"/>
+              <a:buChar char="■"/>
+              <a:tabLst>
+                <a:tab pos="215900" algn="l"/>
+              </a:tabLst>
+            </a:pPr>
+            <a:endParaRPr lang="en-US" altLang="zh-CN" sz="1600" dirty="0">
+              <a:latin typeface="Arial" panose="020B0604020202020204" pitchFamily="34" charset="0"/>
+              <a:cs typeface="Arial" panose="020B0604020202020204" pitchFamily="34" charset="0"/>
+            </a:endParaRPr>
+          </a:p>
+        </p:txBody>
+      </p:sp>
+      <p:sp>
+        <p:nvSpPr>
+          <p:cNvPr id="4" name="Datumsplatzhalter 3">
+            <a:extLst>
+              <a:ext uri="{FF2B5EF4-FFF2-40B4-BE49-F238E27FC236}">
+                <a16:creationId xmlns:a16="http://schemas.microsoft.com/office/drawing/2014/main" id="{7A4126F8-F689-D357-2765-C9C5358E1DA1}"/>
+              </a:ext>
+            </a:extLst>
+          </p:cNvPr>
+          <p:cNvSpPr>
+            <a:spLocks noGrp="1"/>
+          </p:cNvSpPr>
+          <p:nvPr>
+            <p:ph type="dt" sz="half" idx="14"/>
+          </p:nvPr>
+        </p:nvSpPr>
+        <p:spPr>
+          <a:xfrm>
+            <a:off x="935480" y="6361350"/>
+            <a:ext cx="5668062" cy="524824"/>
+          </a:xfrm>
+        </p:spPr>
+        <p:txBody>
+          <a:bodyPr vert="horz" lIns="0" tIns="0" rIns="0" bIns="0" rtlCol="0" anchor="t">
+            <a:normAutofit/>
+          </a:bodyPr>
+          <a:lstStyle/>
+          <a:p>
+            <a:pPr>
+              <a:spcAft>
+                <a:spcPts val="600"/>
+              </a:spcAft>
+            </a:pPr>
+            <a:r>
+              <a:rPr lang="de-DE"/>
+              <a:t>09.07.2026</a:t>
+            </a:r>
+          </a:p>
+        </p:txBody>
+      </p:sp>
+      <p:sp>
+        <p:nvSpPr>
+          <p:cNvPr id="5" name="Fußzeilenplatzhalter 4">
+            <a:extLst>
+              <a:ext uri="{FF2B5EF4-FFF2-40B4-BE49-F238E27FC236}">
+                <a16:creationId xmlns:a16="http://schemas.microsoft.com/office/drawing/2014/main" id="{009A0481-1D27-2D80-AC94-0E33261C44C1}"/>
+              </a:ext>
+            </a:extLst>
+          </p:cNvPr>
+          <p:cNvSpPr>
+            <a:spLocks noGrp="1"/>
+          </p:cNvSpPr>
+          <p:nvPr>
+            <p:ph type="ftr" sz="quarter" idx="15"/>
+          </p:nvPr>
+        </p:nvSpPr>
+        <p:spPr>
+          <a:xfrm>
+            <a:off x="1818425" y="6361350"/>
+            <a:ext cx="4391428" cy="524824"/>
+          </a:xfrm>
+        </p:spPr>
+        <p:txBody>
+          <a:bodyPr vert="horz" lIns="0" tIns="0" rIns="0" bIns="0" rtlCol="0" anchor="t">
+            <a:normAutofit/>
+          </a:bodyPr>
+          <a:lstStyle/>
+          <a:p>
+            <a:pPr>
+              <a:spcAft>
+                <a:spcPts val="600"/>
+              </a:spcAft>
+            </a:pPr>
+            <a:r>
+              <a:rPr lang="en-US" b="0" kern="1200">
+                <a:latin typeface="Arial" charset="0"/>
+                <a:ea typeface="+mn-ea"/>
+                <a:cs typeface="+mn-cs"/>
+              </a:rPr>
+              <a:t>Y</a:t>
+            </a:r>
+            <a:r>
+              <a:rPr lang="en-US" altLang="zh-CN" b="0" kern="1200">
+                <a:latin typeface="Arial" charset="0"/>
+                <a:ea typeface="+mn-ea"/>
+                <a:cs typeface="+mn-cs"/>
+              </a:rPr>
+              <a:t>ida Cheng</a:t>
+            </a:r>
+            <a:endParaRPr lang="en-US" b="0" kern="1200">
+              <a:latin typeface="Arial" charset="0"/>
+              <a:ea typeface="+mn-ea"/>
+              <a:cs typeface="+mn-cs"/>
+            </a:endParaRPr>
+          </a:p>
+        </p:txBody>
+      </p:sp>
+      <p:sp>
+        <p:nvSpPr>
+          <p:cNvPr id="6" name="Foliennummernplatzhalter 5">
+            <a:extLst>
+              <a:ext uri="{FF2B5EF4-FFF2-40B4-BE49-F238E27FC236}">
+                <a16:creationId xmlns:a16="http://schemas.microsoft.com/office/drawing/2014/main" id="{32323787-0025-E527-B450-CDF3498B73E2}"/>
+              </a:ext>
+            </a:extLst>
+          </p:cNvPr>
+          <p:cNvSpPr>
+            <a:spLocks noGrp="1"/>
+          </p:cNvSpPr>
+          <p:nvPr>
+            <p:ph type="sldNum" sz="quarter" idx="16"/>
+          </p:nvPr>
+        </p:nvSpPr>
+        <p:spPr>
+          <a:xfrm>
+            <a:off x="383950" y="6361350"/>
+            <a:ext cx="974273" cy="396000"/>
+          </a:xfrm>
+        </p:spPr>
+        <p:txBody>
+          <a:bodyPr vert="horz" lIns="0" tIns="0" rIns="0" bIns="0" rtlCol="0" anchor="t">
+            <a:normAutofit/>
+          </a:bodyPr>
+          <a:lstStyle/>
+          <a:p>
+            <a:pPr>
+              <a:spcAft>
+                <a:spcPts val="600"/>
+              </a:spcAft>
+            </a:pPr>
+            <a:fld id="{4D01E63C-D794-4429-8564-635E6253AC5C}" type="slidenum">
+              <a:rPr lang="en-US" smtClean="0"/>
+              <a:pPr>
+                <a:spcAft>
+                  <a:spcPts val="600"/>
+                </a:spcAft>
+              </a:pPr>
+              <a:t>19</a:t>
+            </a:fld>
+            <a:endParaRPr lang="en-US"/>
+          </a:p>
+        </p:txBody>
+      </p:sp>
+      <p:sp>
+        <p:nvSpPr>
+          <p:cNvPr id="12" name="文本框 11">
+            <a:extLst>
+              <a:ext uri="{FF2B5EF4-FFF2-40B4-BE49-F238E27FC236}">
+                <a16:creationId xmlns:a16="http://schemas.microsoft.com/office/drawing/2014/main" id="{9B170229-0E73-068C-0E89-D7BDDF338C83}"/>
+              </a:ext>
+            </a:extLst>
+          </p:cNvPr>
+          <p:cNvSpPr txBox="1"/>
+          <p:nvPr/>
+        </p:nvSpPr>
+        <p:spPr>
+          <a:xfrm>
+            <a:off x="691160" y="4718067"/>
+            <a:ext cx="4173147" cy="646331"/>
+          </a:xfrm>
+          <a:prstGeom prst="rect">
+            <a:avLst/>
+          </a:prstGeom>
+          <a:noFill/>
+        </p:spPr>
         <p:txBody>
           <a:bodyPr wrap="square">
             <a:spAutoFit/>
           </a:bodyPr>
           <a:lstStyle/>
           <a:p>
-            <a:pPr marL="285750" indent="-285750">
-              <a:lnSpc>
-                <a:spcPct val="150000"/>
-              </a:lnSpc>
-              <a:buClr>
-                <a:srgbClr val="00549F"/>
-              </a:buClr>
-              <a:buFont typeface="Wingdings" panose="05000000000000000000" pitchFamily="2" charset="2"/>
-              <a:buChar char="n"/>
+            <a:pPr marL="342900" indent="-342900">
+              <a:buAutoNum type="alphaLcParenBoth"/>
             </a:pPr>
             <a:r>
-              <a:rPr lang="zh-CN" altLang="zh-CN" dirty="0"/>
-              <a:t>Build MTL dataset from extracted pulse-pause features and labels.</a:t>
-            </a:r>
-          </a:p>
-          <a:p>
-            <a:pPr marL="285750" indent="-285750">
-              <a:lnSpc>
-                <a:spcPct val="150000"/>
-              </a:lnSpc>
-              <a:buClr>
-                <a:srgbClr val="00549F"/>
-              </a:buClr>
-              <a:buFont typeface="Wingdings" panose="05000000000000000000" pitchFamily="2" charset="2"/>
-              <a:buChar char="n"/>
+              <a:rPr lang="zh-CN" altLang="zh-CN" sz="1200" dirty="0"/>
+              <a:t>Hard parameter sharing</a:t>
+            </a:r>
+            <a:r>
+              <a:rPr lang="en-US" altLang="zh-CN" sz="1200" dirty="0">
+                <a:latin typeface="Arial" panose="020B0604020202020204" pitchFamily="34" charset="0"/>
+                <a:cs typeface="Arial" panose="020B0604020202020204" pitchFamily="34" charset="0"/>
+              </a:rPr>
+              <a:t>(Shared-bottom MTL)</a:t>
+            </a:r>
+            <a:endParaRPr lang="en-US" altLang="zh-CN" sz="1200" dirty="0"/>
+          </a:p>
+          <a:p>
+            <a:pPr marL="342900" indent="-342900">
+              <a:buAutoNum type="alphaLcParenBoth"/>
             </a:pPr>
             <a:r>
-              <a:rPr lang="zh-CN" altLang="zh-CN" dirty="0"/>
-              <a:t>Train and compare single-task vs multi-task models.</a:t>
-            </a:r>
-          </a:p>
-          <a:p>
-            <a:pPr marL="285750" indent="-285750">
-              <a:lnSpc>
-                <a:spcPct val="150000"/>
-              </a:lnSpc>
-              <a:buClr>
-                <a:srgbClr val="00549F"/>
-              </a:buClr>
-              <a:buFont typeface="Wingdings" panose="05000000000000000000" pitchFamily="2" charset="2"/>
-              <a:buChar char="n"/>
+              <a:rPr lang="zh-CN" altLang="zh-CN" sz="1200" dirty="0"/>
+              <a:t>Auxiliary learning</a:t>
+            </a:r>
+            <a:endParaRPr lang="en-US" altLang="zh-CN" sz="1200" dirty="0"/>
+          </a:p>
+          <a:p>
+            <a:pPr marL="342900" indent="-342900">
+              <a:buAutoNum type="alphaLcParenBoth"/>
             </a:pPr>
             <a:r>
-              <a:rPr lang="zh-CN" altLang="zh-CN" dirty="0"/>
-              <a:t>Evaluate generalization across SOC, current, and pulse direction.</a:t>
-            </a:r>
-          </a:p>
-          <a:p>
-            <a:pPr marL="285750" indent="-285750">
-              <a:lnSpc>
-                <a:spcPct val="150000"/>
-              </a:lnSpc>
-              <a:buClr>
-                <a:srgbClr val="00549F"/>
-              </a:buClr>
-              <a:buFont typeface="Wingdings" panose="05000000000000000000" pitchFamily="2" charset="2"/>
-              <a:buChar char="n"/>
-            </a:pPr>
-            <a:r>
-              <a:rPr lang="zh-CN" altLang="zh-CN" dirty="0"/>
-              <a:t>Investigate how to handle uncertain R₂ labels caused by boundary-active τ₂.</a:t>
-            </a:r>
+              <a:rPr lang="zh-CN" altLang="zh-CN" sz="1200" dirty="0"/>
+              <a:t>Soft parameter sharing</a:t>
+            </a:r>
+            <a:endParaRPr lang="en-US" altLang="zh-CN" sz="1200" dirty="0"/>
+          </a:p>
+        </p:txBody>
+      </p:sp>
+      <p:sp>
+        <p:nvSpPr>
+          <p:cNvPr id="14" name="文本框 13">
+            <a:extLst>
+              <a:ext uri="{FF2B5EF4-FFF2-40B4-BE49-F238E27FC236}">
+                <a16:creationId xmlns:a16="http://schemas.microsoft.com/office/drawing/2014/main" id="{CBBC0743-A2A2-0EC2-87C5-158DA662A219}"/>
+              </a:ext>
+            </a:extLst>
+          </p:cNvPr>
+          <p:cNvSpPr txBox="1"/>
+          <p:nvPr/>
+        </p:nvSpPr>
+        <p:spPr>
+          <a:xfrm>
+            <a:off x="4158328" y="5999201"/>
+            <a:ext cx="7648135" cy="246221"/>
+          </a:xfrm>
+          <a:prstGeom prst="rect">
+            <a:avLst/>
+          </a:prstGeom>
+          <a:noFill/>
+        </p:spPr>
+        <p:txBody>
+          <a:bodyPr wrap="square">
+            <a:spAutoFit/>
+          </a:bodyPr>
+          <a:lstStyle/>
+          <a:p>
+            <a:pPr algn="r"/>
+            <a:r>
+              <a:rPr lang="zh-CN" altLang="zh-CN" sz="1000" dirty="0"/>
+              <a:t>Auxiliary Learning for Deep Multi-task Learning</a:t>
+            </a:r>
+            <a:r>
+              <a:rPr lang="en-US" altLang="zh-CN" sz="1000" dirty="0"/>
+              <a:t>,</a:t>
+            </a:r>
+            <a:r>
+              <a:rPr lang="zh-CN" altLang="zh-CN" sz="1000" dirty="0"/>
+              <a:t> Liu, Y.</a:t>
+            </a:r>
+            <a:r>
+              <a:rPr lang="en-US" altLang="zh-CN" sz="1000" dirty="0"/>
+              <a:t> et al., 2019</a:t>
+            </a:r>
+            <a:endParaRPr lang="zh-CN" altLang="en-US" sz="1000" dirty="0"/>
           </a:p>
         </p:txBody>
       </p:sp>
     </p:spTree>
     <p:extLst>
       <p:ext uri="{BB962C8B-B14F-4D97-AF65-F5344CB8AC3E}">
-        <p14:creationId xmlns:p14="http://schemas.microsoft.com/office/powerpoint/2010/main" val="2560089319"/>
+        <p14:creationId xmlns:p14="http://schemas.microsoft.com/office/powerpoint/2010/main" val="685495129"/>
       </p:ext>
     </p:extLst>
   </p:cSld>
@@ -17075,6 +17775,491 @@
 </file>
 
 <file path=ppt/slides/slide20.xml><?xml version="1.0" encoding="utf-8"?>
+<p:sld xmlns:a="http://schemas.openxmlformats.org/drawingml/2006/main" xmlns:r="http://schemas.openxmlformats.org/officeDocument/2006/relationships" xmlns:p="http://schemas.openxmlformats.org/presentationml/2006/main">
+  <p:cSld>
+    <p:spTree>
+      <p:nvGrpSpPr>
+        <p:cNvPr id="1" name="">
+          <a:extLst>
+            <a:ext uri="{FF2B5EF4-FFF2-40B4-BE49-F238E27FC236}">
+              <a16:creationId xmlns:a16="http://schemas.microsoft.com/office/drawing/2014/main" id="{DD30F588-462F-8044-C266-6B0E9BA28838}"/>
+            </a:ext>
+          </a:extLst>
+        </p:cNvPr>
+        <p:cNvGrpSpPr/>
+        <p:nvPr/>
+      </p:nvGrpSpPr>
+      <p:grpSpPr>
+        <a:xfrm>
+          <a:off x="0" y="0"/>
+          <a:ext cx="0" cy="0"/>
+          <a:chOff x="0" y="0"/>
+          <a:chExt cx="0" cy="0"/>
+        </a:xfrm>
+      </p:grpSpPr>
+      <p:sp>
+        <p:nvSpPr>
+          <p:cNvPr id="2" name="Titel 1">
+            <a:extLst>
+              <a:ext uri="{FF2B5EF4-FFF2-40B4-BE49-F238E27FC236}">
+                <a16:creationId xmlns:a16="http://schemas.microsoft.com/office/drawing/2014/main" id="{7179B95E-C5E6-BDAA-D932-E8F86C273D1B}"/>
+              </a:ext>
+            </a:extLst>
+          </p:cNvPr>
+          <p:cNvSpPr>
+            <a:spLocks noGrp="1"/>
+          </p:cNvSpPr>
+          <p:nvPr>
+            <p:ph type="title"/>
+          </p:nvPr>
+        </p:nvSpPr>
+        <p:spPr>
+          <a:xfrm>
+            <a:off x="383950" y="201600"/>
+            <a:ext cx="11422513" cy="543600"/>
+          </a:xfrm>
+        </p:spPr>
+        <p:txBody>
+          <a:bodyPr lIns="0" tIns="0" rIns="0" bIns="0" anchor="b" anchorCtr="0">
+            <a:normAutofit/>
+          </a:bodyPr>
+          <a:lstStyle/>
+          <a:p>
+            <a:r>
+              <a:rPr lang="zh-CN" altLang="zh-CN" dirty="0"/>
+              <a:t>Multi-task Learning for Battery Health Prediction</a:t>
+            </a:r>
+          </a:p>
+        </p:txBody>
+      </p:sp>
+      <p:pic>
+        <p:nvPicPr>
+          <p:cNvPr id="8" name="图片 7">
+            <a:extLst>
+              <a:ext uri="{FF2B5EF4-FFF2-40B4-BE49-F238E27FC236}">
+                <a16:creationId xmlns:a16="http://schemas.microsoft.com/office/drawing/2014/main" id="{0B5C1476-0250-C8E1-7110-05A87CAF810F}"/>
+              </a:ext>
+            </a:extLst>
+          </p:cNvPr>
+          <p:cNvPicPr>
+            <a:picLocks noChangeAspect="1"/>
+          </p:cNvPicPr>
+          <p:nvPr/>
+        </p:nvPicPr>
+        <p:blipFill>
+          <a:blip r:embed="rId3"/>
+          <a:stretch>
+            <a:fillRect/>
+          </a:stretch>
+        </p:blipFill>
+        <p:spPr>
+          <a:xfrm>
+            <a:off x="383950" y="1452262"/>
+            <a:ext cx="5620068" cy="4130749"/>
+          </a:xfrm>
+          <a:prstGeom prst="rect">
+            <a:avLst/>
+          </a:prstGeom>
+          <a:noFill/>
+        </p:spPr>
+      </p:pic>
+      <p:sp>
+        <p:nvSpPr>
+          <p:cNvPr id="7" name="文本框 6">
+            <a:extLst>
+              <a:ext uri="{FF2B5EF4-FFF2-40B4-BE49-F238E27FC236}">
+                <a16:creationId xmlns:a16="http://schemas.microsoft.com/office/drawing/2014/main" id="{F3180E43-3BAC-7A64-D300-7112FE94B555}"/>
+              </a:ext>
+            </a:extLst>
+          </p:cNvPr>
+          <p:cNvSpPr txBox="1"/>
+          <p:nvPr/>
+        </p:nvSpPr>
+        <p:spPr>
+          <a:xfrm>
+            <a:off x="6191194" y="2053652"/>
+            <a:ext cx="5620068" cy="3829622"/>
+          </a:xfrm>
+          <a:prstGeom prst="rect">
+            <a:avLst/>
+          </a:prstGeom>
+        </p:spPr>
+        <p:txBody>
+          <a:bodyPr lIns="0" tIns="0" rIns="0" bIns="0">
+            <a:normAutofit/>
+          </a:bodyPr>
+          <a:lstStyle/>
+          <a:p>
+            <a:pPr marL="215900" indent="-215900" defTabSz="215900" eaLnBrk="1" hangingPunct="1">
+              <a:spcBef>
+                <a:spcPts val="0"/>
+              </a:spcBef>
+              <a:spcAft>
+                <a:spcPts val="450"/>
+              </a:spcAft>
+              <a:buClr>
+                <a:schemeClr val="tx2"/>
+              </a:buClr>
+              <a:buFont typeface="Arial" panose="020B0604020202020204" pitchFamily="34" charset="0"/>
+              <a:buChar char="■"/>
+              <a:tabLst>
+                <a:tab pos="215900" algn="l"/>
+              </a:tabLst>
+            </a:pPr>
+            <a:r>
+              <a:rPr lang="en-US" altLang="zh-CN" dirty="0" err="1">
+                <a:latin typeface="Arial" panose="020B0604020202020204" pitchFamily="34" charset="0"/>
+                <a:cs typeface="Arial" panose="020B0604020202020204" pitchFamily="34" charset="0"/>
+              </a:rPr>
+              <a:t>MMoE</a:t>
+            </a:r>
+            <a:r>
+              <a:rPr lang="en-US" altLang="zh-CN" dirty="0">
+                <a:latin typeface="Arial" panose="020B0604020202020204" pitchFamily="34" charset="0"/>
+                <a:cs typeface="Arial" panose="020B0604020202020204" pitchFamily="34" charset="0"/>
+              </a:rPr>
+              <a:t>(Multi-gate Mixture-of-Experts):</a:t>
+            </a:r>
+          </a:p>
+          <a:p>
+            <a:pPr marL="285750" indent="-285750" defTabSz="215900" eaLnBrk="1" hangingPunct="1">
+              <a:lnSpc>
+                <a:spcPct val="150000"/>
+              </a:lnSpc>
+              <a:spcBef>
+                <a:spcPts val="0"/>
+              </a:spcBef>
+              <a:spcAft>
+                <a:spcPts val="450"/>
+              </a:spcAft>
+              <a:buClr>
+                <a:schemeClr val="tx2"/>
+              </a:buClr>
+              <a:buFont typeface="Arial" panose="020B0604020202020204" pitchFamily="34" charset="0"/>
+              <a:buChar char="□"/>
+              <a:tabLst>
+                <a:tab pos="215900" algn="l"/>
+              </a:tabLst>
+            </a:pPr>
+            <a:r>
+              <a:rPr lang="en-US" altLang="zh-CN" sz="1600" dirty="0">
+                <a:latin typeface="Arial" panose="020B0604020202020204" pitchFamily="34" charset="0"/>
+                <a:cs typeface="Arial" panose="020B0604020202020204" pitchFamily="34" charset="0"/>
+              </a:rPr>
+              <a:t>Multiple-experts model different aging and operating-condition patterns.</a:t>
+            </a:r>
+          </a:p>
+          <a:p>
+            <a:pPr marL="285750" indent="-285750" defTabSz="215900" eaLnBrk="1" hangingPunct="1">
+              <a:lnSpc>
+                <a:spcPct val="150000"/>
+              </a:lnSpc>
+              <a:spcBef>
+                <a:spcPts val="0"/>
+              </a:spcBef>
+              <a:spcAft>
+                <a:spcPts val="450"/>
+              </a:spcAft>
+              <a:buClr>
+                <a:schemeClr val="tx2"/>
+              </a:buClr>
+              <a:buFont typeface="Arial" panose="020B0604020202020204" pitchFamily="34" charset="0"/>
+              <a:buChar char="□"/>
+              <a:tabLst>
+                <a:tab pos="215900" algn="l"/>
+              </a:tabLst>
+            </a:pPr>
+            <a:r>
+              <a:rPr lang="en-US" altLang="zh-CN" sz="1600" dirty="0">
+                <a:latin typeface="Arial" panose="020B0604020202020204" pitchFamily="34" charset="0"/>
+                <a:cs typeface="Arial" panose="020B0604020202020204" pitchFamily="34" charset="0"/>
+              </a:rPr>
+              <a:t>Task-specific gates adaptively select experts according to SOC and excitation conditions, reducing negative transfer.</a:t>
+            </a:r>
+          </a:p>
+          <a:p>
+            <a:pPr marL="285750" indent="-285750" defTabSz="215900" eaLnBrk="1" hangingPunct="1">
+              <a:lnSpc>
+                <a:spcPct val="150000"/>
+              </a:lnSpc>
+              <a:spcBef>
+                <a:spcPts val="0"/>
+              </a:spcBef>
+              <a:spcAft>
+                <a:spcPts val="450"/>
+              </a:spcAft>
+              <a:buClr>
+                <a:schemeClr val="tx2"/>
+              </a:buClr>
+              <a:buFont typeface="Arial" panose="020B0604020202020204" pitchFamily="34" charset="0"/>
+              <a:buChar char="□"/>
+              <a:tabLst>
+                <a:tab pos="215900" algn="l"/>
+              </a:tabLst>
+            </a:pPr>
+            <a:r>
+              <a:rPr lang="en-US" altLang="zh-CN" sz="1600" dirty="0">
+                <a:latin typeface="Arial" panose="020B0604020202020204" pitchFamily="34" charset="0"/>
+                <a:cs typeface="Arial" panose="020B0604020202020204" pitchFamily="34" charset="0"/>
+              </a:rPr>
+              <a:t>Therefore, the degree of feature sharing can vary with SOC, current magnitude, and charge/discharge direction.</a:t>
+            </a:r>
+          </a:p>
+          <a:p>
+            <a:pPr marL="285750" indent="-285750" defTabSz="215900" eaLnBrk="1" hangingPunct="1">
+              <a:lnSpc>
+                <a:spcPct val="150000"/>
+              </a:lnSpc>
+              <a:spcBef>
+                <a:spcPts val="0"/>
+              </a:spcBef>
+              <a:spcAft>
+                <a:spcPts val="450"/>
+              </a:spcAft>
+              <a:buClr>
+                <a:schemeClr val="tx2"/>
+              </a:buClr>
+              <a:buFont typeface="Arial" panose="020B0604020202020204" pitchFamily="34" charset="0"/>
+              <a:buChar char="□"/>
+              <a:tabLst>
+                <a:tab pos="215900" algn="l"/>
+              </a:tabLst>
+            </a:pPr>
+            <a:endParaRPr lang="en-US" altLang="zh-CN" sz="1600" dirty="0">
+              <a:latin typeface="Arial" panose="020B0604020202020204" pitchFamily="34" charset="0"/>
+              <a:cs typeface="Arial" panose="020B0604020202020204" pitchFamily="34" charset="0"/>
+            </a:endParaRPr>
+          </a:p>
+          <a:p>
+            <a:pPr marL="215900" indent="-215900" defTabSz="215900" eaLnBrk="1" hangingPunct="1">
+              <a:spcBef>
+                <a:spcPts val="0"/>
+              </a:spcBef>
+              <a:spcAft>
+                <a:spcPts val="450"/>
+              </a:spcAft>
+              <a:buClr>
+                <a:schemeClr val="tx2"/>
+              </a:buClr>
+              <a:buFont typeface="Arial" panose="020B0604020202020204" pitchFamily="34" charset="0"/>
+              <a:buChar char="■"/>
+              <a:tabLst>
+                <a:tab pos="215900" algn="l"/>
+              </a:tabLst>
+            </a:pPr>
+            <a:endParaRPr lang="en-US" altLang="zh-CN" sz="2000" dirty="0">
+              <a:latin typeface="Arial" panose="020B0604020202020204" pitchFamily="34" charset="0"/>
+              <a:cs typeface="Arial" panose="020B0604020202020204" pitchFamily="34" charset="0"/>
+            </a:endParaRPr>
+          </a:p>
+        </p:txBody>
+      </p:sp>
+      <p:sp>
+        <p:nvSpPr>
+          <p:cNvPr id="4" name="Datumsplatzhalter 3">
+            <a:extLst>
+              <a:ext uri="{FF2B5EF4-FFF2-40B4-BE49-F238E27FC236}">
+                <a16:creationId xmlns:a16="http://schemas.microsoft.com/office/drawing/2014/main" id="{8AE215F5-7F45-F029-55F0-1775ECA0C2F7}"/>
+              </a:ext>
+            </a:extLst>
+          </p:cNvPr>
+          <p:cNvSpPr>
+            <a:spLocks noGrp="1"/>
+          </p:cNvSpPr>
+          <p:nvPr>
+            <p:ph type="dt" sz="half" idx="14"/>
+          </p:nvPr>
+        </p:nvSpPr>
+        <p:spPr>
+          <a:xfrm>
+            <a:off x="935480" y="6361350"/>
+            <a:ext cx="5668062" cy="524824"/>
+          </a:xfrm>
+        </p:spPr>
+        <p:txBody>
+          <a:bodyPr vert="horz" lIns="0" tIns="0" rIns="0" bIns="0" rtlCol="0" anchor="t">
+            <a:normAutofit/>
+          </a:bodyPr>
+          <a:lstStyle/>
+          <a:p>
+            <a:pPr>
+              <a:spcAft>
+                <a:spcPts val="600"/>
+              </a:spcAft>
+            </a:pPr>
+            <a:r>
+              <a:rPr lang="de-DE" dirty="0"/>
+              <a:t>09.07.2026</a:t>
+            </a:r>
+            <a:endParaRPr lang="de-DE"/>
+          </a:p>
+        </p:txBody>
+      </p:sp>
+      <p:sp>
+        <p:nvSpPr>
+          <p:cNvPr id="5" name="Fußzeilenplatzhalter 4">
+            <a:extLst>
+              <a:ext uri="{FF2B5EF4-FFF2-40B4-BE49-F238E27FC236}">
+                <a16:creationId xmlns:a16="http://schemas.microsoft.com/office/drawing/2014/main" id="{7E95D7C4-AE4A-E63D-F571-A4C5A4D55E28}"/>
+              </a:ext>
+            </a:extLst>
+          </p:cNvPr>
+          <p:cNvSpPr>
+            <a:spLocks noGrp="1"/>
+          </p:cNvSpPr>
+          <p:nvPr>
+            <p:ph type="ftr" sz="quarter" idx="15"/>
+          </p:nvPr>
+        </p:nvSpPr>
+        <p:spPr>
+          <a:xfrm>
+            <a:off x="1818425" y="6361350"/>
+            <a:ext cx="4391428" cy="524824"/>
+          </a:xfrm>
+        </p:spPr>
+        <p:txBody>
+          <a:bodyPr vert="horz" lIns="0" tIns="0" rIns="0" bIns="0" rtlCol="0" anchor="t">
+            <a:normAutofit/>
+          </a:bodyPr>
+          <a:lstStyle/>
+          <a:p>
+            <a:pPr>
+              <a:spcAft>
+                <a:spcPts val="600"/>
+              </a:spcAft>
+            </a:pPr>
+            <a:r>
+              <a:rPr lang="en-US" b="0" kern="1200">
+                <a:latin typeface="Arial" charset="0"/>
+                <a:ea typeface="+mn-ea"/>
+                <a:cs typeface="+mn-cs"/>
+              </a:rPr>
+              <a:t>Y</a:t>
+            </a:r>
+            <a:r>
+              <a:rPr lang="en-US" altLang="zh-CN" b="0" kern="1200">
+                <a:latin typeface="Arial" charset="0"/>
+                <a:ea typeface="+mn-ea"/>
+                <a:cs typeface="+mn-cs"/>
+              </a:rPr>
+              <a:t>ida Cheng</a:t>
+            </a:r>
+            <a:endParaRPr lang="en-US" b="0" kern="1200">
+              <a:latin typeface="Arial" charset="0"/>
+              <a:ea typeface="+mn-ea"/>
+              <a:cs typeface="+mn-cs"/>
+            </a:endParaRPr>
+          </a:p>
+        </p:txBody>
+      </p:sp>
+      <p:sp>
+        <p:nvSpPr>
+          <p:cNvPr id="6" name="Foliennummernplatzhalter 5">
+            <a:extLst>
+              <a:ext uri="{FF2B5EF4-FFF2-40B4-BE49-F238E27FC236}">
+                <a16:creationId xmlns:a16="http://schemas.microsoft.com/office/drawing/2014/main" id="{82F10B22-3478-F680-7115-9805E0190CE3}"/>
+              </a:ext>
+            </a:extLst>
+          </p:cNvPr>
+          <p:cNvSpPr>
+            <a:spLocks noGrp="1"/>
+          </p:cNvSpPr>
+          <p:nvPr>
+            <p:ph type="sldNum" sz="quarter" idx="16"/>
+          </p:nvPr>
+        </p:nvSpPr>
+        <p:spPr>
+          <a:xfrm>
+            <a:off x="383950" y="6361350"/>
+            <a:ext cx="974273" cy="396000"/>
+          </a:xfrm>
+        </p:spPr>
+        <p:txBody>
+          <a:bodyPr vert="horz" lIns="0" tIns="0" rIns="0" bIns="0" rtlCol="0" anchor="t">
+            <a:normAutofit/>
+          </a:bodyPr>
+          <a:lstStyle/>
+          <a:p>
+            <a:pPr>
+              <a:spcAft>
+                <a:spcPts val="600"/>
+              </a:spcAft>
+            </a:pPr>
+            <a:fld id="{4D01E63C-D794-4429-8564-635E6253AC5C}" type="slidenum">
+              <a:rPr lang="en-US" smtClean="0"/>
+              <a:pPr>
+                <a:spcAft>
+                  <a:spcPts val="600"/>
+                </a:spcAft>
+              </a:pPr>
+              <a:t>20</a:t>
+            </a:fld>
+            <a:endParaRPr lang="en-US"/>
+          </a:p>
+        </p:txBody>
+      </p:sp>
+      <p:sp>
+        <p:nvSpPr>
+          <p:cNvPr id="10" name="文本框 9">
+            <a:extLst>
+              <a:ext uri="{FF2B5EF4-FFF2-40B4-BE49-F238E27FC236}">
+                <a16:creationId xmlns:a16="http://schemas.microsoft.com/office/drawing/2014/main" id="{4DE877AB-DFEE-B642-9A09-A1571BF4878E}"/>
+              </a:ext>
+            </a:extLst>
+          </p:cNvPr>
+          <p:cNvSpPr txBox="1"/>
+          <p:nvPr/>
+        </p:nvSpPr>
+        <p:spPr>
+          <a:xfrm>
+            <a:off x="5712963" y="5849070"/>
+            <a:ext cx="6093500" cy="246221"/>
+          </a:xfrm>
+          <a:prstGeom prst="rect">
+            <a:avLst/>
+          </a:prstGeom>
+          <a:noFill/>
+        </p:spPr>
+        <p:txBody>
+          <a:bodyPr wrap="square">
+            <a:spAutoFit/>
+          </a:bodyPr>
+          <a:lstStyle/>
+          <a:p>
+            <a:r>
+              <a:rPr lang="zh-CN" altLang="zh-CN" sz="1000" dirty="0">
+                <a:latin typeface="+mn-lt"/>
+              </a:rPr>
+              <a:t>Modeling Task Relationships in Multi-task Learning with Multi-gate Mixture-of-Experts.</a:t>
+            </a:r>
+            <a:r>
+              <a:rPr lang="zh-CN" altLang="zh-CN" sz="1000" dirty="0"/>
+              <a:t> Ma, J.</a:t>
+            </a:r>
+            <a:r>
+              <a:rPr lang="en-US" altLang="zh-CN" sz="1000" dirty="0"/>
+              <a:t> et al.,2018 </a:t>
+            </a:r>
+            <a:endParaRPr lang="zh-CN" altLang="en-US" sz="1000" dirty="0">
+              <a:latin typeface="+mn-lt"/>
+            </a:endParaRPr>
+          </a:p>
+        </p:txBody>
+      </p:sp>
+    </p:spTree>
+    <p:extLst>
+      <p:ext uri="{BB962C8B-B14F-4D97-AF65-F5344CB8AC3E}">
+        <p14:creationId xmlns:p14="http://schemas.microsoft.com/office/powerpoint/2010/main" val="5906160"/>
+      </p:ext>
+    </p:extLst>
+  </p:cSld>
+  <p:clrMapOvr>
+    <a:masterClrMapping/>
+  </p:clrMapOvr>
+</p:sld>
+</file>
+
+<file path=ppt/slides/slide21.xml><?xml version="1.0" encoding="utf-8"?>
 <p:sld xmlns:a="http://schemas.openxmlformats.org/drawingml/2006/main" xmlns:r="http://schemas.openxmlformats.org/officeDocument/2006/relationships" xmlns:p="http://schemas.openxmlformats.org/presentationml/2006/main">
   <p:cSld>
     <p:spTree>
@@ -17162,7 +18347,7 @@
 </p:sld>
 </file>
 
-<file path=ppt/slides/slide21.xml><?xml version="1.0" encoding="utf-8"?>
+<file path=ppt/slides/slide22.xml><?xml version="1.0" encoding="utf-8"?>
 <p:sld xmlns:a="http://schemas.openxmlformats.org/drawingml/2006/main" xmlns:r="http://schemas.openxmlformats.org/officeDocument/2006/relationships" xmlns:p="http://schemas.openxmlformats.org/presentationml/2006/main">
   <p:cSld>
     <p:spTree>
@@ -19592,7 +20777,15 @@
             <a:pPr algn="r"/>
             <a:r>
               <a:rPr lang="en-US" altLang="zh-CN" sz="1000" dirty="0"/>
-              <a:t>Birkl et al., Journal of Power Sources, 2017</a:t>
+              <a:t>Journal of Power Sources,</a:t>
+            </a:r>
+            <a:r>
+              <a:rPr lang="zh-CN" altLang="en-US" sz="1000" dirty="0"/>
+              <a:t> </a:t>
+            </a:r>
+            <a:r>
+              <a:rPr lang="en-US" altLang="zh-CN" sz="1000" dirty="0"/>
+              <a:t>Birkl et al., 2017</a:t>
             </a:r>
           </a:p>
           <a:p>
@@ -20259,7 +21452,15 @@
             </a:r>
             <a:r>
               <a:rPr lang="zh-CN" altLang="zh-CN" dirty="0"/>
-              <a:t>Previous PAUO–pulse matching</a:t>
+              <a:t>Previous PAUO</a:t>
+            </a:r>
+            <a:r>
+              <a:rPr lang="en-US" altLang="zh-CN" dirty="0"/>
+              <a:t>(pause)</a:t>
+            </a:r>
+            <a:r>
+              <a:rPr lang="zh-CN" altLang="zh-CN" dirty="0"/>
+              <a:t>–pulse matching</a:t>
             </a:r>
             <a:endParaRPr lang="en-US" altLang="zh-CN" dirty="0"/>
           </a:p>

--- a/Mid-term presentation.pptx
+++ b/Mid-term presentation.pptx
@@ -339,7 +339,7 @@
               <a:pPr>
                 <a:defRPr/>
               </a:pPr>
-              <a:t>03.07.2026</a:t>
+              <a:t>07.07.2026</a:t>
             </a:fld>
             <a:endParaRPr lang="de-DE" dirty="0"/>
           </a:p>
@@ -559,7 +559,7 @@
               <a:pPr>
                 <a:defRPr/>
               </a:pPr>
-              <a:t>03.07.2026</a:t>
+              <a:t>07.07.2026</a:t>
             </a:fld>
             <a:endParaRPr lang="de-DE" dirty="0"/>
           </a:p>
@@ -927,6 +927,115 @@
           <a:bodyPr/>
           <a:lstStyle/>
           <a:p>
+            <a:pPr marL="0" marR="0" lvl="0" indent="0" algn="l" defTabSz="914400" rtl="0" eaLnBrk="0" fontAlgn="base" latinLnBrk="0" hangingPunct="0">
+              <a:lnSpc>
+                <a:spcPct val="100000"/>
+              </a:lnSpc>
+              <a:spcBef>
+                <a:spcPct val="30000"/>
+              </a:spcBef>
+              <a:spcAft>
+                <a:spcPct val="0"/>
+              </a:spcAft>
+              <a:buClrTx/>
+              <a:buSzTx/>
+              <a:buFontTx/>
+              <a:buNone/>
+              <a:tabLst/>
+              <a:defRPr/>
+            </a:pPr>
+            <a:r>
+              <a:rPr lang="en-US" altLang="zh-CN" dirty="0"/>
+              <a:t>Good morning Professor Sauer, My name is Yida Cheng.</a:t>
+            </a:r>
+          </a:p>
+          <a:p>
+            <a:pPr marL="0" marR="0" lvl="0" indent="0" algn="l" defTabSz="914400" rtl="0" eaLnBrk="0" fontAlgn="base" latinLnBrk="0" hangingPunct="0">
+              <a:lnSpc>
+                <a:spcPct val="100000"/>
+              </a:lnSpc>
+              <a:spcBef>
+                <a:spcPct val="30000"/>
+              </a:spcBef>
+              <a:spcAft>
+                <a:spcPct val="0"/>
+              </a:spcAft>
+              <a:buClrTx/>
+              <a:buSzTx/>
+              <a:buFontTx/>
+              <a:buNone/>
+              <a:tabLst/>
+              <a:defRPr/>
+            </a:pPr>
+            <a:endParaRPr lang="en-US" altLang="zh-CN" dirty="0"/>
+          </a:p>
+          <a:p>
+            <a:pPr marL="0" marR="0" lvl="0" indent="0" algn="l" defTabSz="914400" rtl="0" eaLnBrk="0" fontAlgn="base" latinLnBrk="0" hangingPunct="0">
+              <a:lnSpc>
+                <a:spcPct val="100000"/>
+              </a:lnSpc>
+              <a:spcBef>
+                <a:spcPct val="30000"/>
+              </a:spcBef>
+              <a:spcAft>
+                <a:spcPct val="0"/>
+              </a:spcAft>
+              <a:buClrTx/>
+              <a:buSzTx/>
+              <a:buFontTx/>
+              <a:buNone/>
+              <a:tabLst/>
+              <a:defRPr/>
+            </a:pPr>
+            <a:r>
+              <a:rPr lang="en-US" altLang="zh-CN" dirty="0"/>
+              <a:t>Now I would like to begin my mid-term presentation.</a:t>
+            </a:r>
+          </a:p>
+          <a:p>
+            <a:pPr marL="0" marR="0" lvl="0" indent="0" algn="l" defTabSz="914400" rtl="0" eaLnBrk="0" fontAlgn="base" latinLnBrk="0" hangingPunct="0">
+              <a:lnSpc>
+                <a:spcPct val="100000"/>
+              </a:lnSpc>
+              <a:spcBef>
+                <a:spcPct val="30000"/>
+              </a:spcBef>
+              <a:spcAft>
+                <a:spcPct val="0"/>
+              </a:spcAft>
+              <a:buClrTx/>
+              <a:buSzTx/>
+              <a:buFontTx/>
+              <a:buNone/>
+              <a:tabLst/>
+              <a:defRPr/>
+            </a:pPr>
+            <a:endParaRPr lang="en-US" altLang="zh-CN" dirty="0"/>
+          </a:p>
+          <a:p>
+            <a:pPr marL="0" marR="0" lvl="0" indent="0" algn="l" defTabSz="914400" rtl="0" eaLnBrk="0" fontAlgn="base" latinLnBrk="0" hangingPunct="0">
+              <a:lnSpc>
+                <a:spcPct val="100000"/>
+              </a:lnSpc>
+              <a:spcBef>
+                <a:spcPct val="30000"/>
+              </a:spcBef>
+              <a:spcAft>
+                <a:spcPct val="0"/>
+              </a:spcAft>
+              <a:buClrTx/>
+              <a:buSzTx/>
+              <a:buFontTx/>
+              <a:buNone/>
+              <a:tabLst/>
+              <a:defRPr/>
+            </a:pPr>
+            <a:r>
+              <a:rPr lang="en-US" altLang="zh-CN" dirty="0"/>
+              <a:t>My thesis focuses on state-of-charge-resolved degradation analysis of lithium-ion batteries.</a:t>
+            </a:r>
+          </a:p>
+          <a:p>
             <a:endParaRPr lang="zh-CN" altLang="en-US" dirty="0"/>
           </a:p>
         </p:txBody>
@@ -1419,7 +1528,15 @@
           <a:p>
             <a:r>
               <a:rPr lang="zh-CN" altLang="zh-CN" dirty="0"/>
-              <a:t>This figure shows R-one, which represents the fast polarization resistance in the 2RC model.</a:t>
+              <a:t>This figure shows R-one, which represents the fast polarization resistance in the </a:t>
+            </a:r>
+            <a:r>
+              <a:rPr lang="en-US" altLang="zh-CN" dirty="0"/>
+              <a:t>second order </a:t>
+            </a:r>
+            <a:r>
+              <a:rPr lang="zh-CN" altLang="zh-CN" dirty="0"/>
+              <a:t>RC model.</a:t>
             </a:r>
             <a:endParaRPr lang="en-US" altLang="zh-CN" dirty="0"/>
           </a:p>
@@ -1629,7 +1746,16 @@
           <a:p>
             <a:r>
               <a:rPr lang="en-US" altLang="zh-CN" dirty="0"/>
-              <a:t>On this slide, I would like summarize the main issues observed in the current fitting results. First, the estimated R₀ may still include part of the polarization response, because it is calculated from the voltage jump over a finite time difference. Therefore, R₀ should be interpreted as an apparent ohmic resistance rather than a purely instantaneous resistance.</a:t>
+              <a:t>On this slide, I would like summarize the main issues observed in the current fitting results. </a:t>
+            </a:r>
+          </a:p>
+          <a:p>
+            <a:endParaRPr lang="en-US" altLang="zh-CN" dirty="0"/>
+          </a:p>
+          <a:p>
+            <a:r>
+              <a:rPr lang="en-US" altLang="zh-CN" dirty="0"/>
+              <a:t>First, the estimated R₀ may still include part of the polarization response, because it is calculated from the voltage jump over a finite time difference. Therefore, R₀ should be interpreted as an apparent ohmic resistance rather than a purely instantaneous resistance.</a:t>
             </a:r>
           </a:p>
           <a:p>
@@ -1807,6 +1933,10 @@
           <a:bodyPr/>
           <a:lstStyle/>
           <a:p>
+            <a:r>
+              <a:rPr lang="en-US" altLang="zh-CN" dirty="0"/>
+              <a:t>This page outlines my plans for the next stage.</a:t>
+            </a:r>
             <a:endParaRPr lang="zh-CN" altLang="en-US" dirty="0"/>
           </a:p>
         </p:txBody>
@@ -1906,7 +2036,13 @@
           <a:p>
             <a:r>
               <a:rPr lang="en-US" altLang="zh-CN" dirty="0"/>
-              <a:t>Auxiliary MTL assigns unequal roles to the tasks: SOH is the primary prediction target, while the resistance parameters provide additional degradation-related supervision.</a:t>
+              <a:t>Auxiliary MTL assigns unequal roles to the tasks: </a:t>
+            </a:r>
+          </a:p>
+          <a:p>
+            <a:r>
+              <a:rPr lang="en-US" altLang="zh-CN" dirty="0"/>
+              <a:t>SOH is the primary prediction target, while the resistance parameters provide additional degradation-related supervision.</a:t>
             </a:r>
           </a:p>
           <a:p>
@@ -2004,6 +2140,46 @@
           <a:bodyPr/>
           <a:lstStyle/>
           <a:p>
+            <a:r>
+              <a:rPr lang="en-US" altLang="zh-CN" dirty="0"/>
+              <a:t>Here are the main parts of my research.</a:t>
+            </a:r>
+          </a:p>
+          <a:p>
+            <a:endParaRPr lang="en-US" altLang="zh-CN" dirty="0"/>
+          </a:p>
+          <a:p>
+            <a:pPr marL="0" marR="0" lvl="0" indent="0" algn="l" defTabSz="914400" rtl="0" eaLnBrk="0" fontAlgn="base" latinLnBrk="0" hangingPunct="0">
+              <a:lnSpc>
+                <a:spcPct val="100000"/>
+              </a:lnSpc>
+              <a:spcBef>
+                <a:spcPct val="30000"/>
+              </a:spcBef>
+              <a:spcAft>
+                <a:spcPct val="0"/>
+              </a:spcAft>
+              <a:buClrTx/>
+              <a:buSzTx/>
+              <a:buFontTx/>
+              <a:buNone/>
+              <a:tabLst/>
+              <a:defRPr/>
+            </a:pPr>
+            <a:r>
+              <a:rPr lang="en-US" altLang="zh-CN" dirty="0"/>
+              <a:t>The first part is </a:t>
+            </a:r>
+            <a:r>
+              <a:rPr lang="en-US" altLang="zh-CN" b="1" dirty="0">
+                <a:solidFill>
+                  <a:schemeClr val="accent4"/>
+                </a:solidFill>
+              </a:rPr>
+              <a:t>Research Background &amp; Objectives.</a:t>
+            </a:r>
+          </a:p>
+          <a:p>
             <a:endParaRPr lang="zh-CN" altLang="en-US" dirty="0"/>
           </a:p>
         </p:txBody>
@@ -2140,6 +2316,67 @@
   <p:cSld>
     <p:spTree>
       <p:nvGrpSpPr>
+        <p:cNvPr id="1" name=""/>
+        <p:cNvGrpSpPr/>
+        <p:nvPr/>
+      </p:nvGrpSpPr>
+      <p:grpSpPr>
+        <a:xfrm>
+          <a:off x="0" y="0"/>
+          <a:ext cx="0" cy="0"/>
+          <a:chOff x="0" y="0"/>
+          <a:chExt cx="0" cy="0"/>
+        </a:xfrm>
+      </p:grpSpPr>
+      <p:sp>
+        <p:nvSpPr>
+          <p:cNvPr id="2" name="幻灯片图像占位符 1"/>
+          <p:cNvSpPr>
+            <a:spLocks noGrp="1" noRot="1" noChangeAspect="1"/>
+          </p:cNvSpPr>
+          <p:nvPr>
+            <p:ph type="sldImg"/>
+          </p:nvPr>
+        </p:nvSpPr>
+        <p:spPr/>
+      </p:sp>
+      <p:sp>
+        <p:nvSpPr>
+          <p:cNvPr id="3" name="备注占位符 2"/>
+          <p:cNvSpPr>
+            <a:spLocks noGrp="1"/>
+          </p:cNvSpPr>
+          <p:nvPr>
+            <p:ph type="body" idx="1"/>
+          </p:nvPr>
+        </p:nvSpPr>
+        <p:spPr/>
+        <p:txBody>
+          <a:bodyPr/>
+          <a:lstStyle/>
+          <a:p>
+            <a:endParaRPr lang="zh-CN" altLang="en-US" dirty="0"/>
+          </a:p>
+        </p:txBody>
+      </p:sp>
+    </p:spTree>
+    <p:extLst>
+      <p:ext uri="{BB962C8B-B14F-4D97-AF65-F5344CB8AC3E}">
+        <p14:creationId xmlns:p14="http://schemas.microsoft.com/office/powerpoint/2010/main" val="566959586"/>
+      </p:ext>
+    </p:extLst>
+  </p:cSld>
+  <p:clrMapOvr>
+    <a:masterClrMapping/>
+  </p:clrMapOvr>
+</p:notes>
+</file>
+
+<file path=ppt/notesSlides/notesSlide22.xml><?xml version="1.0" encoding="utf-8"?>
+<p:notes xmlns:a="http://schemas.openxmlformats.org/drawingml/2006/main" xmlns:r="http://schemas.openxmlformats.org/officeDocument/2006/relationships" xmlns:p="http://schemas.openxmlformats.org/presentationml/2006/main">
+  <p:cSld>
+    <p:spTree>
+      <p:nvGrpSpPr>
         <p:cNvPr id="1" name="">
           <a:extLst>
             <a:ext uri="{FF2B5EF4-FFF2-40B4-BE49-F238E27FC236}">
@@ -2278,7 +2515,7 @@
           <a:p>
             <a:r>
               <a:rPr lang="en-US" altLang="zh-CN" dirty="0"/>
-              <a:t>My thesis focuses on state-of-charge-resolved degradation analysis of lithium-ion batteries.</a:t>
+              <a:t>Here, I use one example of a discharge pulse to show what information can be extracted from the voltage response.</a:t>
             </a:r>
           </a:p>
           <a:p>
@@ -2286,47 +2523,43 @@
           </a:p>
           <a:p>
             <a:r>
+              <a:rPr lang="zh-CN" altLang="zh-CN" b="1" dirty="0"/>
+              <a:t>First, I focus on the pulse itself.</a:t>
+            </a:r>
+            <a:br>
+              <a:rPr lang="zh-CN" altLang="zh-CN" dirty="0"/>
+            </a:br>
+            <a:r>
+              <a:rPr lang="zh-CN" altLang="zh-CN" dirty="0"/>
+              <a:t>The sharp voltage drop at the beginning of the discharge pulse is mainly related to the ohmic resistance </a:t>
+            </a:r>
+            <a:r>
+              <a:rPr lang="zh-CN" altLang="zh-CN" b="1" dirty="0"/>
+              <a:t>R₀</a:t>
+            </a:r>
+            <a:r>
+              <a:rPr lang="en-US" altLang="zh-CN" b="1" dirty="0"/>
+              <a:t>. </a:t>
+            </a:r>
+            <a:r>
+              <a:rPr lang="zh-CN" altLang="zh-CN" dirty="0"/>
+              <a:t>The slower voltage change during the pulse reflects polarization effects.</a:t>
+            </a:r>
+            <a:endParaRPr lang="en-US" altLang="zh-CN" dirty="0"/>
+          </a:p>
+          <a:p>
+            <a:endParaRPr lang="en-US" altLang="zh-CN" b="1" dirty="0"/>
+          </a:p>
+          <a:p>
+            <a:r>
+              <a:rPr lang="en-US" altLang="zh-CN" b="1" dirty="0"/>
+              <a:t>Then, after the pulse, I focus on the post-pulse relaxation window.</a:t>
+            </a:r>
+          </a:p>
+          <a:p>
+            <a:r>
               <a:rPr lang="en-US" altLang="zh-CN" dirty="0"/>
-              <a:t>In battery aging, the degradation is not only reflected by capacity fade, but also by resistance growth. </a:t>
-            </a:r>
-          </a:p>
-          <a:p>
-            <a:r>
-              <a:rPr lang="en-US" altLang="zh-CN" dirty="0"/>
-              <a:t>Therefore, only using capacity or SOH may not be sufficient to describe the internal degradation behavior of the cell.</a:t>
-            </a:r>
-          </a:p>
-          <a:p>
-            <a:endParaRPr lang="en-US" altLang="zh-CN" dirty="0"/>
-          </a:p>
-          <a:p>
-            <a:r>
-              <a:rPr lang="en-US" altLang="zh-CN" dirty="0"/>
-              <a:t>The figure on the right shows a typical pulse-relaxation voltage response. </a:t>
-            </a:r>
-          </a:p>
-          <a:p>
-            <a:r>
-              <a:rPr lang="en-US" altLang="zh-CN" dirty="0"/>
-              <a:t>From this curve, the instantaneous voltage drop can be used to estimate the ohmic resistance R0, while the following relaxation behavior can be further described by R1 and R2 in a second-order RC model.</a:t>
-            </a:r>
-          </a:p>
-          <a:p>
-            <a:endParaRPr lang="en-US" altLang="zh-CN" dirty="0"/>
-          </a:p>
-          <a:p>
-            <a:r>
-              <a:rPr lang="en-US" altLang="zh-CN" dirty="0"/>
-              <a:t>The motivation of this work is to extract these resistance-related parameters at 10%, 50% and 90% SOC levels, and analyze how they evolve with aging.</a:t>
-            </a:r>
-          </a:p>
-          <a:p>
-            <a:endParaRPr lang="en-US" altLang="zh-CN" dirty="0"/>
-          </a:p>
-          <a:p>
-            <a:r>
-              <a:rPr lang="en-US" altLang="zh-CN" dirty="0"/>
-              <a:t>In the next step, these extracted parameters will be used as input features for multi-task learning models, in order to predict battery health and compare degradation patterns across different battery chemistries.</a:t>
+              <a:t>This marked region is the main fitting window for the second-order RC model. By fitting the voltage recovery in this pause period, I can separate the fast and slow relaxation behavior and estimate R₁ and R₂.</a:t>
             </a:r>
             <a:endParaRPr lang="zh-CN" altLang="en-US" dirty="0"/>
           </a:p>
@@ -2389,6 +2622,10 @@
           <a:bodyPr/>
           <a:lstStyle/>
           <a:p>
+            <a:r>
+              <a:rPr lang="en-US" altLang="zh-CN" dirty="0"/>
+              <a:t>In this slides shows six parts of the objectives.</a:t>
+            </a:r>
             <a:endParaRPr lang="zh-CN" altLang="en-US" dirty="0"/>
           </a:p>
         </p:txBody>
@@ -2435,25 +2672,324 @@
         </p:nvSpPr>
         <p:spPr/>
       </p:sp>
-      <p:sp>
-        <p:nvSpPr>
-          <p:cNvPr id="3" name="备注占位符 2"/>
-          <p:cNvSpPr>
-            <a:spLocks noGrp="1"/>
-          </p:cNvSpPr>
-          <p:nvPr>
-            <p:ph type="body" idx="1"/>
-          </p:nvPr>
-        </p:nvSpPr>
-        <p:spPr/>
-        <p:txBody>
-          <a:bodyPr/>
-          <a:lstStyle/>
-          <a:p>
-            <a:endParaRPr lang="zh-CN" altLang="en-US" dirty="0"/>
-          </a:p>
-        </p:txBody>
-      </p:sp>
+      <mc:AlternateContent xmlns:mc="http://schemas.openxmlformats.org/markup-compatibility/2006" xmlns:a14="http://schemas.microsoft.com/office/drawing/2010/main">
+        <mc:Choice Requires="a14">
+          <p:sp>
+            <p:nvSpPr>
+              <p:cNvPr id="3" name="备注占位符 2"/>
+              <p:cNvSpPr>
+                <a:spLocks noGrp="1"/>
+              </p:cNvSpPr>
+              <p:nvPr>
+                <p:ph type="body" idx="1"/>
+              </p:nvPr>
+            </p:nvSpPr>
+            <p:spPr/>
+            <p:txBody>
+              <a:bodyPr/>
+              <a:lstStyle/>
+              <a:p>
+                <a:r>
+                  <a:rPr lang="zh-CN" altLang="zh-CN" dirty="0"/>
+                  <a:t>This slide shows my current research timeline and overall progress.</a:t>
+                </a:r>
+                <a:endParaRPr lang="en-US" altLang="zh-CN" dirty="0"/>
+              </a:p>
+              <a:p>
+                <a:br>
+                  <a:rPr lang="zh-CN" altLang="zh-CN" dirty="0"/>
+                </a:br>
+                <a:r>
+                  <a:rPr lang="zh-CN" altLang="zh-CN" dirty="0"/>
+                  <a:t>So far, I have completed most of the literature review on battery degradation mechanisms, resistance growth, and time-domain 2RC parameter extraction. </a:t>
+                </a:r>
+                <a:endParaRPr lang="en-US" altLang="zh-CN" dirty="0"/>
+              </a:p>
+              <a:p>
+                <a:endParaRPr lang="en-US" altLang="zh-CN" dirty="0"/>
+              </a:p>
+              <a:p>
+                <a:r>
+                  <a:rPr lang="zh-CN" altLang="zh-CN" dirty="0"/>
+                  <a:t>In terms of implementation, I have finished the resistance extraction pipeline, including data preprocessing, ohmic resistance calculation, and second-order RC model fitting to obtain </a:t>
+                </a:r>
+                <a14:m>
+                  <m:oMath xmlns:m="http://schemas.openxmlformats.org/officeDocument/2006/math">
+                    <m:sSub>
+                      <m:sSubPr>
+                        <m:ctrlPr>
+                          <a:rPr lang="zh-CN" altLang="en-US" sz="1000" i="1" kern="1200">
+                            <a:solidFill>
+                              <a:schemeClr val="tx1"/>
+                            </a:solidFill>
+                            <a:latin typeface="Cambria Math" panose="02040503050406030204" pitchFamily="18" charset="0"/>
+                            <a:ea typeface="+mn-ea"/>
+                            <a:cs typeface="Arial" pitchFamily="34" charset="0"/>
+                          </a:rPr>
+                        </m:ctrlPr>
+                      </m:sSubPr>
+                      <m:e>
+                        <m:r>
+                          <a:rPr lang="zh-CN" altLang="en-US" sz="1000" i="1" kern="1200">
+                            <a:solidFill>
+                              <a:schemeClr val="tx1"/>
+                            </a:solidFill>
+                            <a:latin typeface="Cambria Math" panose="02040503050406030204" pitchFamily="18" charset="0"/>
+                            <a:ea typeface="+mn-ea"/>
+                            <a:cs typeface="Arial" pitchFamily="34" charset="0"/>
+                          </a:rPr>
+                          <m:t>𝑅</m:t>
+                        </m:r>
+                      </m:e>
+                      <m:sub>
+                        <m:r>
+                          <a:rPr lang="en-US" altLang="zh-CN" sz="1000" i="0" kern="1200">
+                            <a:solidFill>
+                              <a:schemeClr val="tx1"/>
+                            </a:solidFill>
+                            <a:latin typeface="Cambria Math" panose="02040503050406030204" pitchFamily="18" charset="0"/>
+                            <a:ea typeface="+mn-ea"/>
+                            <a:cs typeface="Arial" pitchFamily="34" charset="0"/>
+                          </a:rPr>
+                          <m:t>0</m:t>
+                        </m:r>
+                      </m:sub>
+                    </m:sSub>
+                  </m:oMath>
+                </a14:m>
+                <a:r>
+                  <a:rPr lang="zh-CN" altLang="zh-CN" dirty="0"/>
+                  <a:t>, </a:t>
+                </a:r>
+                <a14:m>
+                  <m:oMath xmlns:m="http://schemas.openxmlformats.org/officeDocument/2006/math">
+                    <m:sSub>
+                      <m:sSubPr>
+                        <m:ctrlPr>
+                          <a:rPr lang="zh-CN" altLang="en-US" sz="1000" i="1" kern="1200">
+                            <a:solidFill>
+                              <a:schemeClr val="tx1"/>
+                            </a:solidFill>
+                            <a:latin typeface="Cambria Math" panose="02040503050406030204" pitchFamily="18" charset="0"/>
+                            <a:ea typeface="+mn-ea"/>
+                            <a:cs typeface="Arial" pitchFamily="34" charset="0"/>
+                          </a:rPr>
+                        </m:ctrlPr>
+                      </m:sSubPr>
+                      <m:e>
+                        <m:r>
+                          <a:rPr lang="zh-CN" altLang="en-US" sz="1000" i="1" kern="1200">
+                            <a:solidFill>
+                              <a:schemeClr val="tx1"/>
+                            </a:solidFill>
+                            <a:latin typeface="Cambria Math" panose="02040503050406030204" pitchFamily="18" charset="0"/>
+                            <a:ea typeface="+mn-ea"/>
+                            <a:cs typeface="Arial" pitchFamily="34" charset="0"/>
+                          </a:rPr>
+                          <m:t>𝑅</m:t>
+                        </m:r>
+                      </m:e>
+                      <m:sub>
+                        <m:r>
+                          <a:rPr lang="en-US" altLang="zh-CN" sz="1000" i="0" kern="1200">
+                            <a:solidFill>
+                              <a:schemeClr val="tx1"/>
+                            </a:solidFill>
+                            <a:latin typeface="Cambria Math" panose="02040503050406030204" pitchFamily="18" charset="0"/>
+                            <a:ea typeface="+mn-ea"/>
+                            <a:cs typeface="Arial" pitchFamily="34" charset="0"/>
+                          </a:rPr>
+                          <m:t>1</m:t>
+                        </m:r>
+                      </m:sub>
+                    </m:sSub>
+                  </m:oMath>
+                </a14:m>
+                <a:r>
+                  <a:rPr lang="zh-CN" altLang="zh-CN" dirty="0"/>
+                  <a:t>, and </a:t>
+                </a:r>
+                <a14:m>
+                  <m:oMath xmlns:m="http://schemas.openxmlformats.org/officeDocument/2006/math">
+                    <m:sSub>
+                      <m:sSubPr>
+                        <m:ctrlPr>
+                          <a:rPr lang="zh-CN" altLang="en-US" sz="1000" i="1" kern="1200">
+                            <a:solidFill>
+                              <a:schemeClr val="tx1"/>
+                            </a:solidFill>
+                            <a:latin typeface="Cambria Math" panose="02040503050406030204" pitchFamily="18" charset="0"/>
+                            <a:ea typeface="+mn-ea"/>
+                            <a:cs typeface="Arial" pitchFamily="34" charset="0"/>
+                          </a:rPr>
+                        </m:ctrlPr>
+                      </m:sSubPr>
+                      <m:e>
+                        <m:r>
+                          <a:rPr lang="zh-CN" altLang="en-US" sz="1000" i="1" kern="1200">
+                            <a:solidFill>
+                              <a:schemeClr val="tx1"/>
+                            </a:solidFill>
+                            <a:latin typeface="Cambria Math" panose="02040503050406030204" pitchFamily="18" charset="0"/>
+                            <a:ea typeface="+mn-ea"/>
+                            <a:cs typeface="Arial" pitchFamily="34" charset="0"/>
+                          </a:rPr>
+                          <m:t>𝑅</m:t>
+                        </m:r>
+                      </m:e>
+                      <m:sub>
+                        <m:r>
+                          <a:rPr lang="en-US" altLang="zh-CN" sz="1000" i="0" kern="1200">
+                            <a:solidFill>
+                              <a:schemeClr val="tx1"/>
+                            </a:solidFill>
+                            <a:latin typeface="Cambria Math" panose="02040503050406030204" pitchFamily="18" charset="0"/>
+                            <a:ea typeface="+mn-ea"/>
+                            <a:cs typeface="Arial" pitchFamily="34" charset="0"/>
+                          </a:rPr>
+                          <m:t>2</m:t>
+                        </m:r>
+                      </m:sub>
+                    </m:sSub>
+                  </m:oMath>
+                </a14:m>
+                <a:r>
+                  <a:rPr lang="zh-CN" altLang="zh-CN" dirty="0"/>
+                  <a:t>.</a:t>
+                </a:r>
+              </a:p>
+              <a:p>
+                <a:endParaRPr lang="zh-CN" altLang="en-US" dirty="0"/>
+              </a:p>
+            </p:txBody>
+          </p:sp>
+        </mc:Choice>
+        <mc:Fallback xmlns="">
+          <p:sp>
+            <p:nvSpPr>
+              <p:cNvPr id="3" name="备注占位符 2"/>
+              <p:cNvSpPr>
+                <a:spLocks noGrp="1"/>
+              </p:cNvSpPr>
+              <p:nvPr>
+                <p:ph type="body" idx="1"/>
+              </p:nvPr>
+            </p:nvSpPr>
+            <p:spPr/>
+            <p:txBody>
+              <a:bodyPr/>
+              <a:lstStyle/>
+              <a:p>
+                <a:r>
+                  <a:rPr lang="zh-CN" altLang="zh-CN" dirty="0"/>
+                  <a:t>This slide shows my current research timeline and overall progress.</a:t>
+                </a:r>
+                <a:endParaRPr lang="en-US" altLang="zh-CN" dirty="0"/>
+              </a:p>
+              <a:p>
+                <a:br>
+                  <a:rPr lang="zh-CN" altLang="zh-CN" dirty="0"/>
+                </a:br>
+                <a:r>
+                  <a:rPr lang="zh-CN" altLang="zh-CN" dirty="0"/>
+                  <a:t>So far, I have completed most of the literature review on battery degradation mechanisms, resistance growth, and time-domain 2RC parameter extraction. </a:t>
+                </a:r>
+                <a:endParaRPr lang="en-US" altLang="zh-CN" dirty="0"/>
+              </a:p>
+              <a:p>
+                <a:endParaRPr lang="en-US" altLang="zh-CN" dirty="0"/>
+              </a:p>
+              <a:p>
+                <a:r>
+                  <a:rPr lang="zh-CN" altLang="zh-CN" dirty="0"/>
+                  <a:t>In terms of implementation, I have finished the resistance extraction pipeline, including data preprocessing, ohmic resistance calculation, and second-order RC model fitting to obtain </a:t>
+                </a:r>
+                <a:r>
+                  <a:rPr lang="zh-CN" altLang="en-US" sz="1000" i="0" kern="1200">
+                    <a:solidFill>
+                      <a:schemeClr val="tx1"/>
+                    </a:solidFill>
+                    <a:latin typeface="Arial" pitchFamily="34" charset="0"/>
+                    <a:ea typeface="+mn-ea"/>
+                    <a:cs typeface="Arial" pitchFamily="34" charset="0"/>
+                  </a:rPr>
+                  <a:t>𝑅_</a:t>
+                </a:r>
+                <a:r>
+                  <a:rPr lang="en-US" altLang="zh-CN" sz="1000" i="0" kern="1200">
+                    <a:solidFill>
+                      <a:schemeClr val="tx1"/>
+                    </a:solidFill>
+                    <a:latin typeface="Arial" pitchFamily="34" charset="0"/>
+                    <a:ea typeface="+mn-ea"/>
+                    <a:cs typeface="Arial" pitchFamily="34" charset="0"/>
+                  </a:rPr>
+                  <a:t>0</a:t>
+                </a:r>
+                <a:r>
+                  <a:rPr lang="zh-CN" altLang="zh-CN" dirty="0"/>
+                  <a:t>, </a:t>
+                </a:r>
+                <a:r>
+                  <a:rPr lang="zh-CN" altLang="en-US" sz="1000" i="0" kern="1200">
+                    <a:solidFill>
+                      <a:schemeClr val="tx1"/>
+                    </a:solidFill>
+                    <a:latin typeface="Arial" pitchFamily="34" charset="0"/>
+                    <a:ea typeface="+mn-ea"/>
+                    <a:cs typeface="Arial" pitchFamily="34" charset="0"/>
+                  </a:rPr>
+                  <a:t>𝑅_</a:t>
+                </a:r>
+                <a:r>
+                  <a:rPr lang="en-US" altLang="zh-CN" sz="1000" i="0" kern="1200">
+                    <a:solidFill>
+                      <a:schemeClr val="tx1"/>
+                    </a:solidFill>
+                    <a:latin typeface="Arial" pitchFamily="34" charset="0"/>
+                    <a:ea typeface="+mn-ea"/>
+                    <a:cs typeface="Arial" pitchFamily="34" charset="0"/>
+                  </a:rPr>
+                  <a:t>1</a:t>
+                </a:r>
+                <a:r>
+                  <a:rPr lang="zh-CN" altLang="zh-CN" dirty="0"/>
+                  <a:t>, and </a:t>
+                </a:r>
+                <a:r>
+                  <a:rPr lang="zh-CN" altLang="en-US" sz="1000" i="0" kern="1200">
+                    <a:solidFill>
+                      <a:schemeClr val="tx1"/>
+                    </a:solidFill>
+                    <a:latin typeface="Arial" pitchFamily="34" charset="0"/>
+                    <a:ea typeface="+mn-ea"/>
+                    <a:cs typeface="Arial" pitchFamily="34" charset="0"/>
+                  </a:rPr>
+                  <a:t>𝑅_</a:t>
+                </a:r>
+                <a:r>
+                  <a:rPr lang="en-US" altLang="zh-CN" sz="1000" i="0" kern="1200">
+                    <a:solidFill>
+                      <a:schemeClr val="tx1"/>
+                    </a:solidFill>
+                    <a:latin typeface="Arial" pitchFamily="34" charset="0"/>
+                    <a:ea typeface="+mn-ea"/>
+                    <a:cs typeface="Arial" pitchFamily="34" charset="0"/>
+                  </a:rPr>
+                  <a:t>2</a:t>
+                </a:r>
+                <a:r>
+                  <a:rPr lang="zh-CN" altLang="zh-CN" dirty="0"/>
+                  <a:t>.</a:t>
+                </a:r>
+              </a:p>
+              <a:p>
+                <a:endParaRPr lang="zh-CN" altLang="en-US" dirty="0"/>
+              </a:p>
+            </p:txBody>
+          </p:sp>
+        </mc:Fallback>
+      </mc:AlternateContent>
     </p:spTree>
     <p:extLst>
       <p:ext uri="{BB962C8B-B14F-4D97-AF65-F5344CB8AC3E}">
@@ -2610,7 +3146,7 @@
           <a:p>
             <a:r>
               <a:rPr lang="en-US" altLang="zh-CN" dirty="0"/>
-              <a:t>This slide explains the connection between battery aging and 2RC model parameter extraction.</a:t>
+              <a:t>This slide explains the connection between battery aging and second-RC model parameter extraction.</a:t>
             </a:r>
           </a:p>
           <a:p>
@@ -2833,7 +3369,7 @@
             </a:r>
             <a:r>
               <a:rPr lang="en-US" altLang="zh-CN" dirty="0"/>
-              <a:t>.</a:t>
+              <a:t>. (standard deviation)</a:t>
             </a:r>
           </a:p>
           <a:p>
@@ -3411,7 +3947,7 @@
             <a:pPr algn="l"/>
             <a:fld id="{D7F12259-4066-44C3-AC08-F5ADAE7E0447}" type="datetime1">
               <a:rPr lang="de-DE" smtClean="0"/>
-              <a:t>03.07.2026</a:t>
+              <a:t>07.07.2026</a:t>
             </a:fld>
             <a:endParaRPr lang="de-DE" dirty="0"/>
           </a:p>
@@ -5701,7 +6237,7 @@
             <a:pPr algn="l"/>
             <a:fld id="{74486B41-BCE2-48B7-876C-2B3490450D97}" type="datetime1">
               <a:rPr lang="de-DE" smtClean="0"/>
-              <a:t>03.07.2026</a:t>
+              <a:t>07.07.2026</a:t>
             </a:fld>
             <a:endParaRPr lang="de-DE" dirty="0"/>
           </a:p>
@@ -6077,7 +6613,7 @@
             <a:pPr algn="l"/>
             <a:fld id="{85D6FCC3-EE37-4749-9624-859AF44EE717}" type="datetime1">
               <a:rPr lang="de-DE" smtClean="0"/>
-              <a:t>03.07.2026</a:t>
+              <a:t>07.07.2026</a:t>
             </a:fld>
             <a:endParaRPr lang="de-DE" dirty="0"/>
           </a:p>
@@ -6221,7 +6757,7 @@
             <a:pPr algn="l"/>
             <a:fld id="{E47FF345-F1B3-44B8-9B74-D6676F7F0EE5}" type="datetime1">
               <a:rPr lang="de-DE" smtClean="0"/>
-              <a:t>03.07.2026</a:t>
+              <a:t>07.07.2026</a:t>
             </a:fld>
             <a:endParaRPr lang="de-DE" dirty="0"/>
           </a:p>
@@ -6589,7 +7125,7 @@
             <a:pPr algn="l"/>
             <a:fld id="{6D3069C6-0311-4A39-8CC1-DA405FE38D0C}" type="datetime1">
               <a:rPr lang="de-DE" smtClean="0"/>
-              <a:t>03.07.2026</a:t>
+              <a:t>07.07.2026</a:t>
             </a:fld>
             <a:endParaRPr lang="de-DE" dirty="0"/>
           </a:p>
@@ -8945,7 +9481,7 @@
             <a:pPr algn="l"/>
             <a:fld id="{F887C18F-21B2-48B8-9586-9343C0AE58EE}" type="datetime1">
               <a:rPr lang="de-DE" smtClean="0"/>
-              <a:t>03.07.2026</a:t>
+              <a:t>07.07.2026</a:t>
             </a:fld>
             <a:endParaRPr lang="de-DE" dirty="0"/>
           </a:p>
@@ -9317,7 +9853,7 @@
             <a:pPr algn="l"/>
             <a:fld id="{E5AF013B-EAD8-4321-9A97-347E14C68B05}" type="datetime1">
               <a:rPr lang="de-DE" smtClean="0"/>
-              <a:t>03.07.2026</a:t>
+              <a:t>07.07.2026</a:t>
             </a:fld>
             <a:endParaRPr lang="de-DE" dirty="0"/>
           </a:p>
@@ -9457,7 +9993,7 @@
             <a:pPr algn="l"/>
             <a:fld id="{D3F884E6-7726-4AAA-A0CE-C180A27151DE}" type="datetime1">
               <a:rPr lang="de-DE" smtClean="0"/>
-              <a:t>03.07.2026</a:t>
+              <a:t>07.07.2026</a:t>
             </a:fld>
             <a:endParaRPr lang="de-DE" dirty="0"/>
           </a:p>
@@ -10088,7 +10624,7 @@
             <a:pPr algn="l"/>
             <a:fld id="{11769DE8-88E0-424A-87BD-6924D1146258}" type="datetime1">
               <a:rPr lang="de-DE" smtClean="0"/>
-              <a:t>03.07.2026</a:t>
+              <a:t>07.07.2026</a:t>
             </a:fld>
             <a:endParaRPr lang="de-DE" dirty="0"/>
           </a:p>
@@ -10896,7 +11432,7 @@
             <a:pPr algn="l"/>
             <a:fld id="{11769DE8-88E0-424A-87BD-6924D1146258}" type="datetime1">
               <a:rPr lang="de-DE" smtClean="0"/>
-              <a:t>03.07.2026</a:t>
+              <a:t>07.07.2026</a:t>
             </a:fld>
             <a:endParaRPr lang="de-DE" dirty="0"/>
           </a:p>
@@ -11525,7 +12061,7 @@
             <a:pPr algn="l"/>
             <a:fld id="{6D3069C6-0311-4A39-8CC1-DA405FE38D0C}" type="datetime1">
               <a:rPr lang="de-DE" smtClean="0"/>
-              <a:t>03.07.2026</a:t>
+              <a:t>07.07.2026</a:t>
             </a:fld>
             <a:endParaRPr lang="de-DE" dirty="0"/>
           </a:p>
@@ -11790,7 +12326,7 @@
           <a:p>
             <a:fld id="{D35072EC-9367-4D7B-8652-6A082F0A7E89}" type="datetime1">
               <a:rPr lang="de-DE" smtClean="0"/>
-              <a:t>03.07.2026</a:t>
+              <a:t>07.07.2026</a:t>
             </a:fld>
             <a:endParaRPr lang="de-DE" dirty="0"/>
           </a:p>
@@ -12716,7 +13252,7 @@
           <a:p>
             <a:fld id="{C2CC8288-72D4-44E2-951D-741F8F954282}" type="datetime1">
               <a:rPr lang="de-DE" smtClean="0"/>
-              <a:t>03.07.2026</a:t>
+              <a:t>07.07.2026</a:t>
             </a:fld>
             <a:endParaRPr lang="de-DE" dirty="0"/>
           </a:p>
@@ -13540,7 +14076,7 @@
           <a:p>
             <a:r>
               <a:rPr lang="de-DE" dirty="0"/>
-              <a:t>09.07.2026</a:t>
+              <a:t>08.07.2026</a:t>
             </a:r>
           </a:p>
         </p:txBody>
@@ -13742,7 +14278,7 @@
         </p:nvSpPr>
         <p:spPr>
           <a:xfrm>
-            <a:off x="7861734" y="1357100"/>
+            <a:off x="7801774" y="2068501"/>
             <a:ext cx="4328679" cy="2720997"/>
           </a:xfrm>
         </p:spPr>
@@ -13768,6 +14304,18 @@
               <a:t>Last PAUO point → first valid pulse point</a:t>
             </a:r>
             <a:endParaRPr lang="en-US" altLang="zh-CN" sz="1600" dirty="0"/>
+          </a:p>
+          <a:p>
+            <a:pPr marL="0" indent="0">
+              <a:buNone/>
+            </a:pPr>
+            <a:endParaRPr lang="en-US" altLang="zh-CN" dirty="0"/>
+          </a:p>
+          <a:p>
+            <a:pPr marL="0" indent="0">
+              <a:buNone/>
+            </a:pPr>
+            <a:endParaRPr lang="en-US" altLang="zh-CN" dirty="0"/>
           </a:p>
           <a:p>
             <a:pPr marL="0" indent="0">
@@ -13868,9 +14416,8 @@
             </a:pPr>
             <a:r>
               <a:rPr lang="de-DE" altLang="zh-CN" dirty="0"/>
-              <a:t>09.07.2026</a:t>
-            </a:r>
-            <a:endParaRPr lang="de-DE" altLang="zh-CN"/>
+              <a:t>08.07.2026</a:t>
+            </a:r>
           </a:p>
           <a:p>
             <a:pPr>
@@ -13878,7 +14425,7 @@
                 <a:spcPts val="600"/>
               </a:spcAft>
             </a:pPr>
-            <a:endParaRPr lang="de-DE"/>
+            <a:endParaRPr lang="de-DE" dirty="0"/>
           </a:p>
         </p:txBody>
       </p:sp>
@@ -14259,9 +14806,8 @@
             </a:pPr>
             <a:r>
               <a:rPr lang="de-DE" altLang="zh-CN" dirty="0"/>
-              <a:t>09.07.2026</a:t>
-            </a:r>
-            <a:endParaRPr lang="de-DE" altLang="zh-CN"/>
+              <a:t>08.07.2026</a:t>
+            </a:r>
           </a:p>
           <a:p>
             <a:pPr>
@@ -14269,7 +14815,7 @@
                 <a:spcPts val="600"/>
               </a:spcAft>
             </a:pPr>
-            <a:endParaRPr lang="de-DE"/>
+            <a:endParaRPr lang="de-DE" dirty="0"/>
           </a:p>
         </p:txBody>
       </p:sp>
@@ -15181,7 +15727,7 @@
           <a:p>
             <a:r>
               <a:rPr lang="de-DE" altLang="zh-CN" dirty="0"/>
-              <a:t>09.07.2026</a:t>
+              <a:t>08.07.2026</a:t>
             </a:r>
           </a:p>
           <a:p>
@@ -15336,10 +15882,9 @@
           <a:p>
             <a:pPr algn="l"/>
             <a:r>
-              <a:rPr lang="de-DE"/>
-              <a:t>09.07.2026</a:t>
-            </a:r>
-            <a:endParaRPr lang="de-DE" dirty="0"/>
+              <a:rPr lang="de-DE" dirty="0"/>
+              <a:t>08.07.2026</a:t>
+            </a:r>
           </a:p>
         </p:txBody>
       </p:sp>
@@ -15566,7 +16111,7 @@
             <a:pPr algn="l"/>
             <a:r>
               <a:rPr lang="de-DE" dirty="0"/>
-              <a:t>09.07.2026</a:t>
+              <a:t>08.07.2026</a:t>
             </a:r>
           </a:p>
         </p:txBody>
@@ -15790,7 +16335,7 @@
             <a:pPr algn="l"/>
             <a:r>
               <a:rPr lang="de-DE" dirty="0"/>
-              <a:t>09.07.2026</a:t>
+              <a:t>08.07.2026</a:t>
             </a:r>
           </a:p>
         </p:txBody>
@@ -16013,7 +16558,7 @@
             <a:pPr algn="l"/>
             <a:r>
               <a:rPr lang="de-DE" dirty="0"/>
-              <a:t>09.07.2026</a:t>
+              <a:t>08.07.2026</a:t>
             </a:r>
           </a:p>
         </p:txBody>
@@ -16390,7 +16935,7 @@
           <a:p>
             <a:r>
               <a:rPr lang="de-DE" altLang="zh-CN" dirty="0"/>
-              <a:t>09.07.2026</a:t>
+              <a:t>08.07.2026</a:t>
             </a:r>
           </a:p>
           <a:p>
@@ -16545,7 +17090,7 @@
             <a:pPr algn="l"/>
             <a:r>
               <a:rPr lang="de-DE" dirty="0"/>
-              <a:t>09.07.2026</a:t>
+              <a:t>08.07.2026</a:t>
             </a:r>
           </a:p>
         </p:txBody>
@@ -17292,8 +17837,8 @@
               </a:spcAft>
             </a:pPr>
             <a:r>
-              <a:rPr lang="de-DE"/>
-              <a:t>09.07.2026</a:t>
+              <a:rPr lang="de-DE" dirty="0"/>
+              <a:t>08.07.2026</a:t>
             </a:r>
           </a:p>
         </p:txBody>
@@ -17526,6 +18071,289 @@
   <p:clrMapOvr>
     <a:masterClrMapping/>
   </p:clrMapOvr>
+  <p:timing>
+    <p:tnLst>
+      <p:par>
+        <p:cTn id="1" dur="indefinite" restart="never" nodeType="tmRoot">
+          <p:childTnLst>
+            <p:seq concurrent="1" nextAc="seek">
+              <p:cTn id="2" dur="indefinite" nodeType="mainSeq">
+                <p:childTnLst>
+                  <p:par>
+                    <p:cTn id="3" fill="hold">
+                      <p:stCondLst>
+                        <p:cond delay="indefinite"/>
+                      </p:stCondLst>
+                      <p:childTnLst>
+                        <p:par>
+                          <p:cTn id="4" fill="hold">
+                            <p:stCondLst>
+                              <p:cond delay="0"/>
+                            </p:stCondLst>
+                            <p:childTnLst>
+                              <p:par>
+                                <p:cTn id="5" presetID="1" presetClass="entr" presetSubtype="0" fill="hold" nodeType="clickEffect">
+                                  <p:stCondLst>
+                                    <p:cond delay="0"/>
+                                  </p:stCondLst>
+                                  <p:childTnLst>
+                                    <p:set>
+                                      <p:cBhvr>
+                                        <p:cTn id="6" dur="1" fill="hold">
+                                          <p:stCondLst>
+                                            <p:cond delay="0"/>
+                                          </p:stCondLst>
+                                        </p:cTn>
+                                        <p:tgtEl>
+                                          <p:spTgt spid="7">
+                                            <p:txEl>
+                                              <p:pRg st="0" end="0"/>
+                                            </p:txEl>
+                                          </p:spTgt>
+                                        </p:tgtEl>
+                                        <p:attrNameLst>
+                                          <p:attrName>style.visibility</p:attrName>
+                                        </p:attrNameLst>
+                                      </p:cBhvr>
+                                      <p:to>
+                                        <p:strVal val="visible"/>
+                                      </p:to>
+                                    </p:set>
+                                  </p:childTnLst>
+                                </p:cTn>
+                              </p:par>
+                              <p:par>
+                                <p:cTn id="7" presetID="1" presetClass="entr" presetSubtype="0" fill="hold" nodeType="withEffect">
+                                  <p:stCondLst>
+                                    <p:cond delay="0"/>
+                                  </p:stCondLst>
+                                  <p:childTnLst>
+                                    <p:set>
+                                      <p:cBhvr>
+                                        <p:cTn id="8" dur="1" fill="hold">
+                                          <p:stCondLst>
+                                            <p:cond delay="0"/>
+                                          </p:stCondLst>
+                                        </p:cTn>
+                                        <p:tgtEl>
+                                          <p:spTgt spid="7">
+                                            <p:txEl>
+                                              <p:pRg st="1" end="1"/>
+                                            </p:txEl>
+                                          </p:spTgt>
+                                        </p:tgtEl>
+                                        <p:attrNameLst>
+                                          <p:attrName>style.visibility</p:attrName>
+                                        </p:attrNameLst>
+                                      </p:cBhvr>
+                                      <p:to>
+                                        <p:strVal val="visible"/>
+                                      </p:to>
+                                    </p:set>
+                                  </p:childTnLst>
+                                </p:cTn>
+                              </p:par>
+                              <p:par>
+                                <p:cTn id="9" presetID="1" presetClass="entr" presetSubtype="0" fill="hold" nodeType="withEffect">
+                                  <p:stCondLst>
+                                    <p:cond delay="0"/>
+                                  </p:stCondLst>
+                                  <p:childTnLst>
+                                    <p:set>
+                                      <p:cBhvr>
+                                        <p:cTn id="10" dur="1" fill="hold">
+                                          <p:stCondLst>
+                                            <p:cond delay="0"/>
+                                          </p:stCondLst>
+                                        </p:cTn>
+                                        <p:tgtEl>
+                                          <p:spTgt spid="7">
+                                            <p:txEl>
+                                              <p:pRg st="2" end="2"/>
+                                            </p:txEl>
+                                          </p:spTgt>
+                                        </p:tgtEl>
+                                        <p:attrNameLst>
+                                          <p:attrName>style.visibility</p:attrName>
+                                        </p:attrNameLst>
+                                      </p:cBhvr>
+                                      <p:to>
+                                        <p:strVal val="visible"/>
+                                      </p:to>
+                                    </p:set>
+                                  </p:childTnLst>
+                                </p:cTn>
+                              </p:par>
+                              <p:par>
+                                <p:cTn id="11" presetID="1" presetClass="entr" presetSubtype="0" fill="hold" nodeType="withEffect">
+                                  <p:stCondLst>
+                                    <p:cond delay="0"/>
+                                  </p:stCondLst>
+                                  <p:childTnLst>
+                                    <p:set>
+                                      <p:cBhvr>
+                                        <p:cTn id="12" dur="1" fill="hold">
+                                          <p:stCondLst>
+                                            <p:cond delay="0"/>
+                                          </p:stCondLst>
+                                        </p:cTn>
+                                        <p:tgtEl>
+                                          <p:spTgt spid="7">
+                                            <p:txEl>
+                                              <p:pRg st="3" end="3"/>
+                                            </p:txEl>
+                                          </p:spTgt>
+                                        </p:tgtEl>
+                                        <p:attrNameLst>
+                                          <p:attrName>style.visibility</p:attrName>
+                                        </p:attrNameLst>
+                                      </p:cBhvr>
+                                      <p:to>
+                                        <p:strVal val="visible"/>
+                                      </p:to>
+                                    </p:set>
+                                  </p:childTnLst>
+                                </p:cTn>
+                              </p:par>
+                            </p:childTnLst>
+                          </p:cTn>
+                        </p:par>
+                      </p:childTnLst>
+                    </p:cTn>
+                  </p:par>
+                  <p:par>
+                    <p:cTn id="13" fill="hold">
+                      <p:stCondLst>
+                        <p:cond delay="indefinite"/>
+                      </p:stCondLst>
+                      <p:childTnLst>
+                        <p:par>
+                          <p:cTn id="14" fill="hold">
+                            <p:stCondLst>
+                              <p:cond delay="0"/>
+                            </p:stCondLst>
+                            <p:childTnLst>
+                              <p:par>
+                                <p:cTn id="15" presetID="1" presetClass="entr" presetSubtype="0" fill="hold" nodeType="clickEffect">
+                                  <p:stCondLst>
+                                    <p:cond delay="0"/>
+                                  </p:stCondLst>
+                                  <p:childTnLst>
+                                    <p:set>
+                                      <p:cBhvr>
+                                        <p:cTn id="16" dur="1" fill="hold">
+                                          <p:stCondLst>
+                                            <p:cond delay="0"/>
+                                          </p:stCondLst>
+                                        </p:cTn>
+                                        <p:tgtEl>
+                                          <p:spTgt spid="7">
+                                            <p:txEl>
+                                              <p:pRg st="7" end="7"/>
+                                            </p:txEl>
+                                          </p:spTgt>
+                                        </p:tgtEl>
+                                        <p:attrNameLst>
+                                          <p:attrName>style.visibility</p:attrName>
+                                        </p:attrNameLst>
+                                      </p:cBhvr>
+                                      <p:to>
+                                        <p:strVal val="visible"/>
+                                      </p:to>
+                                    </p:set>
+                                  </p:childTnLst>
+                                </p:cTn>
+                              </p:par>
+                              <p:par>
+                                <p:cTn id="17" presetID="1" presetClass="entr" presetSubtype="0" fill="hold" nodeType="withEffect">
+                                  <p:stCondLst>
+                                    <p:cond delay="0"/>
+                                  </p:stCondLst>
+                                  <p:childTnLst>
+                                    <p:set>
+                                      <p:cBhvr>
+                                        <p:cTn id="18" dur="1" fill="hold">
+                                          <p:stCondLst>
+                                            <p:cond delay="0"/>
+                                          </p:stCondLst>
+                                        </p:cTn>
+                                        <p:tgtEl>
+                                          <p:spTgt spid="7">
+                                            <p:txEl>
+                                              <p:pRg st="8" end="8"/>
+                                            </p:txEl>
+                                          </p:spTgt>
+                                        </p:tgtEl>
+                                        <p:attrNameLst>
+                                          <p:attrName>style.visibility</p:attrName>
+                                        </p:attrNameLst>
+                                      </p:cBhvr>
+                                      <p:to>
+                                        <p:strVal val="visible"/>
+                                      </p:to>
+                                    </p:set>
+                                  </p:childTnLst>
+                                </p:cTn>
+                              </p:par>
+                              <p:par>
+                                <p:cTn id="19" presetID="1" presetClass="entr" presetSubtype="0" fill="hold" nodeType="withEffect">
+                                  <p:stCondLst>
+                                    <p:cond delay="0"/>
+                                  </p:stCondLst>
+                                  <p:childTnLst>
+                                    <p:set>
+                                      <p:cBhvr>
+                                        <p:cTn id="20" dur="1" fill="hold">
+                                          <p:stCondLst>
+                                            <p:cond delay="0"/>
+                                          </p:stCondLst>
+                                        </p:cTn>
+                                        <p:tgtEl>
+                                          <p:spTgt spid="7">
+                                            <p:txEl>
+                                              <p:pRg st="9" end="9"/>
+                                            </p:txEl>
+                                          </p:spTgt>
+                                        </p:tgtEl>
+                                        <p:attrNameLst>
+                                          <p:attrName>style.visibility</p:attrName>
+                                        </p:attrNameLst>
+                                      </p:cBhvr>
+                                      <p:to>
+                                        <p:strVal val="visible"/>
+                                      </p:to>
+                                    </p:set>
+                                  </p:childTnLst>
+                                </p:cTn>
+                              </p:par>
+                            </p:childTnLst>
+                          </p:cTn>
+                        </p:par>
+                      </p:childTnLst>
+                    </p:cTn>
+                  </p:par>
+                </p:childTnLst>
+              </p:cTn>
+              <p:prevCondLst>
+                <p:cond evt="onPrev" delay="0">
+                  <p:tgtEl>
+                    <p:sldTgt/>
+                  </p:tgtEl>
+                </p:cond>
+              </p:prevCondLst>
+              <p:nextCondLst>
+                <p:cond evt="onNext" delay="0">
+                  <p:tgtEl>
+                    <p:sldTgt/>
+                  </p:tgtEl>
+                </p:cond>
+              </p:nextCondLst>
+            </p:seq>
+          </p:childTnLst>
+        </p:cTn>
+      </p:par>
+    </p:tnLst>
+  </p:timing>
 </p:sld>
 </file>
 
@@ -17694,7 +18522,7 @@
           <a:p>
             <a:r>
               <a:rPr lang="de-DE" altLang="zh-CN" dirty="0"/>
-              <a:t>09.07.2026</a:t>
+              <a:t>08.07.2026</a:t>
             </a:r>
           </a:p>
           <a:p>
@@ -18089,9 +18917,8 @@
             </a:pPr>
             <a:r>
               <a:rPr lang="de-DE" dirty="0"/>
-              <a:t>09.07.2026</a:t>
-            </a:r>
-            <a:endParaRPr lang="de-DE"/>
+              <a:t>08.07.2026</a:t>
+            </a:r>
           </a:p>
         </p:txBody>
       </p:sp>
@@ -18256,6 +19083,178 @@
   <p:clrMapOvr>
     <a:masterClrMapping/>
   </p:clrMapOvr>
+  <p:timing>
+    <p:tnLst>
+      <p:par>
+        <p:cTn id="1" dur="indefinite" restart="never" nodeType="tmRoot">
+          <p:childTnLst>
+            <p:seq concurrent="1" nextAc="seek">
+              <p:cTn id="2" dur="indefinite" nodeType="mainSeq">
+                <p:childTnLst>
+                  <p:par>
+                    <p:cTn id="3" fill="hold">
+                      <p:stCondLst>
+                        <p:cond delay="indefinite"/>
+                      </p:stCondLst>
+                      <p:childTnLst>
+                        <p:par>
+                          <p:cTn id="4" fill="hold">
+                            <p:stCondLst>
+                              <p:cond delay="0"/>
+                            </p:stCondLst>
+                            <p:childTnLst>
+                              <p:par>
+                                <p:cTn id="5" presetID="1" presetClass="entr" presetSubtype="0" fill="hold" nodeType="clickEffect">
+                                  <p:stCondLst>
+                                    <p:cond delay="0"/>
+                                  </p:stCondLst>
+                                  <p:childTnLst>
+                                    <p:set>
+                                      <p:cBhvr>
+                                        <p:cTn id="6" dur="1" fill="hold">
+                                          <p:stCondLst>
+                                            <p:cond delay="0"/>
+                                          </p:stCondLst>
+                                        </p:cTn>
+                                        <p:tgtEl>
+                                          <p:spTgt spid="7">
+                                            <p:txEl>
+                                              <p:pRg st="0" end="0"/>
+                                            </p:txEl>
+                                          </p:spTgt>
+                                        </p:tgtEl>
+                                        <p:attrNameLst>
+                                          <p:attrName>style.visibility</p:attrName>
+                                        </p:attrNameLst>
+                                      </p:cBhvr>
+                                      <p:to>
+                                        <p:strVal val="visible"/>
+                                      </p:to>
+                                    </p:set>
+                                  </p:childTnLst>
+                                </p:cTn>
+                              </p:par>
+                              <p:par>
+                                <p:cTn id="7" presetID="1" presetClass="entr" presetSubtype="0" fill="hold" nodeType="withEffect">
+                                  <p:stCondLst>
+                                    <p:cond delay="0"/>
+                                  </p:stCondLst>
+                                  <p:childTnLst>
+                                    <p:set>
+                                      <p:cBhvr>
+                                        <p:cTn id="8" dur="1" fill="hold">
+                                          <p:stCondLst>
+                                            <p:cond delay="0"/>
+                                          </p:stCondLst>
+                                        </p:cTn>
+                                        <p:tgtEl>
+                                          <p:spTgt spid="7">
+                                            <p:txEl>
+                                              <p:pRg st="1" end="1"/>
+                                            </p:txEl>
+                                          </p:spTgt>
+                                        </p:tgtEl>
+                                        <p:attrNameLst>
+                                          <p:attrName>style.visibility</p:attrName>
+                                        </p:attrNameLst>
+                                      </p:cBhvr>
+                                      <p:to>
+                                        <p:strVal val="visible"/>
+                                      </p:to>
+                                    </p:set>
+                                  </p:childTnLst>
+                                </p:cTn>
+                              </p:par>
+                              <p:par>
+                                <p:cTn id="9" presetID="1" presetClass="entr" presetSubtype="0" fill="hold" nodeType="withEffect">
+                                  <p:stCondLst>
+                                    <p:cond delay="0"/>
+                                  </p:stCondLst>
+                                  <p:childTnLst>
+                                    <p:set>
+                                      <p:cBhvr>
+                                        <p:cTn id="10" dur="1" fill="hold">
+                                          <p:stCondLst>
+                                            <p:cond delay="0"/>
+                                          </p:stCondLst>
+                                        </p:cTn>
+                                        <p:tgtEl>
+                                          <p:spTgt spid="7">
+                                            <p:txEl>
+                                              <p:pRg st="2" end="2"/>
+                                            </p:txEl>
+                                          </p:spTgt>
+                                        </p:tgtEl>
+                                        <p:attrNameLst>
+                                          <p:attrName>style.visibility</p:attrName>
+                                        </p:attrNameLst>
+                                      </p:cBhvr>
+                                      <p:to>
+                                        <p:strVal val="visible"/>
+                                      </p:to>
+                                    </p:set>
+                                  </p:childTnLst>
+                                </p:cTn>
+                              </p:par>
+                              <p:par>
+                                <p:cTn id="11" presetID="1" presetClass="entr" presetSubtype="0" fill="hold" nodeType="withEffect">
+                                  <p:stCondLst>
+                                    <p:cond delay="0"/>
+                                  </p:stCondLst>
+                                  <p:childTnLst>
+                                    <p:set>
+                                      <p:cBhvr>
+                                        <p:cTn id="12" dur="1" fill="hold">
+                                          <p:stCondLst>
+                                            <p:cond delay="0"/>
+                                          </p:stCondLst>
+                                        </p:cTn>
+                                        <p:tgtEl>
+                                          <p:spTgt spid="7">
+                                            <p:txEl>
+                                              <p:pRg st="3" end="3"/>
+                                            </p:txEl>
+                                          </p:spTgt>
+                                        </p:tgtEl>
+                                        <p:attrNameLst>
+                                          <p:attrName>style.visibility</p:attrName>
+                                        </p:attrNameLst>
+                                      </p:cBhvr>
+                                      <p:to>
+                                        <p:strVal val="visible"/>
+                                      </p:to>
+                                    </p:set>
+                                  </p:childTnLst>
+                                </p:cTn>
+                              </p:par>
+                            </p:childTnLst>
+                          </p:cTn>
+                        </p:par>
+                      </p:childTnLst>
+                    </p:cTn>
+                  </p:par>
+                </p:childTnLst>
+              </p:cTn>
+              <p:prevCondLst>
+                <p:cond evt="onPrev" delay="0">
+                  <p:tgtEl>
+                    <p:sldTgt/>
+                  </p:tgtEl>
+                </p:cond>
+              </p:prevCondLst>
+              <p:nextCondLst>
+                <p:cond evt="onNext" delay="0">
+                  <p:tgtEl>
+                    <p:sldTgt/>
+                  </p:tgtEl>
+                </p:cond>
+              </p:nextCondLst>
+            </p:seq>
+          </p:childTnLst>
+        </p:cTn>
+      </p:par>
+    </p:tnLst>
+  </p:timing>
 </p:sld>
 </file>
 
@@ -18535,7 +19534,7 @@
           <a:p>
             <a:r>
               <a:rPr lang="de-DE" dirty="0"/>
-              <a:t>09.07.2026</a:t>
+              <a:t>08.07.2026</a:t>
             </a:r>
           </a:p>
         </p:txBody>
@@ -18696,7 +19695,7 @@
             <a:pPr algn="l"/>
             <a:r>
               <a:rPr lang="de-DE" dirty="0"/>
-              <a:t>09.07.2026</a:t>
+              <a:t>08.07.2026</a:t>
             </a:r>
           </a:p>
         </p:txBody>
@@ -18764,38 +19763,6 @@
           </a:p>
         </p:txBody>
       </p:sp>
-      <p:pic>
-        <p:nvPicPr>
-          <p:cNvPr id="7" name="内容占位符 6">
-            <a:extLst>
-              <a:ext uri="{FF2B5EF4-FFF2-40B4-BE49-F238E27FC236}">
-                <a16:creationId xmlns:a16="http://schemas.microsoft.com/office/drawing/2014/main" id="{F4A5BAC6-4C4C-D7BA-A7A7-07B3D623CE74}"/>
-              </a:ext>
-            </a:extLst>
-          </p:cNvPr>
-          <p:cNvPicPr>
-            <a:picLocks noGrp="1" noChangeAspect="1"/>
-          </p:cNvPicPr>
-          <p:nvPr>
-            <p:ph idx="1"/>
-          </p:nvPr>
-        </p:nvPicPr>
-        <p:blipFill>
-          <a:blip r:embed="rId3"/>
-          <a:stretch>
-            <a:fillRect/>
-          </a:stretch>
-        </p:blipFill>
-        <p:spPr>
-          <a:xfrm>
-            <a:off x="6381277" y="1008529"/>
-            <a:ext cx="5640339" cy="2637988"/>
-          </a:xfrm>
-          <a:prstGeom prst="rect">
-            <a:avLst/>
-          </a:prstGeom>
-        </p:spPr>
-      </p:pic>
       <p:sp>
         <p:nvSpPr>
           <p:cNvPr id="13" name="Inhaltsplatzhalter 2">
@@ -19024,11 +19991,7 @@
             <a:pPr marL="0" indent="0">
               <a:buNone/>
             </a:pPr>
-            <a:r>
-              <a:rPr lang="zh-CN" altLang="en-US" dirty="0"/>
-              <a:t>Why this topic?</a:t>
-            </a:r>
-            <a:endParaRPr lang="en-US" altLang="zh-CN" dirty="0"/>
+            <a:endParaRPr lang="en-US" altLang="zh-CN" sz="1400" dirty="0"/>
           </a:p>
           <a:p>
             <a:pPr marL="0" indent="0">
@@ -19046,88 +20009,789 @@
             <a:pPr marL="0" indent="0">
               <a:buNone/>
             </a:pPr>
+            <a:endParaRPr lang="en-US" altLang="zh-CN" sz="1400" dirty="0"/>
+          </a:p>
+          <a:p>
+            <a:pPr marL="0" indent="0">
+              <a:buNone/>
+            </a:pPr>
+            <a:endParaRPr lang="en-US" altLang="zh-CN" sz="1400" dirty="0"/>
+          </a:p>
+          <a:p>
+            <a:pPr marL="0" indent="0">
+              <a:buNone/>
+            </a:pPr>
+            <a:endParaRPr lang="en-US" altLang="zh-CN" sz="1400" dirty="0"/>
+          </a:p>
+          <a:p>
+            <a:pPr marL="0" indent="0">
+              <a:buNone/>
+            </a:pPr>
+            <a:endParaRPr lang="en-US" altLang="zh-CN" sz="1400" dirty="0"/>
+          </a:p>
+          <a:p>
+            <a:pPr marL="0" indent="0">
+              <a:buNone/>
+            </a:pPr>
+            <a:endParaRPr lang="en-US" altLang="zh-CN" sz="1400" dirty="0"/>
+          </a:p>
+          <a:p>
+            <a:pPr marL="0" indent="0">
+              <a:buNone/>
+            </a:pPr>
             <a:endParaRPr lang="zh-CN" altLang="en-US" sz="1400" dirty="0"/>
           </a:p>
           <a:p>
-            <a:pPr>
+            <a:endParaRPr lang="en-US" dirty="0"/>
+          </a:p>
+          <a:p>
+            <a:endParaRPr lang="de-DE" dirty="0"/>
+          </a:p>
+        </p:txBody>
+      </p:sp>
+      <p:grpSp>
+        <p:nvGrpSpPr>
+          <p:cNvPr id="26" name="组合 25">
+            <a:extLst>
+              <a:ext uri="{FF2B5EF4-FFF2-40B4-BE49-F238E27FC236}">
+                <a16:creationId xmlns:a16="http://schemas.microsoft.com/office/drawing/2014/main" id="{2AA25ACF-5788-0104-5C73-C5312C566231}"/>
+              </a:ext>
+            </a:extLst>
+          </p:cNvPr>
+          <p:cNvGrpSpPr/>
+          <p:nvPr/>
+        </p:nvGrpSpPr>
+        <p:grpSpPr>
+          <a:xfrm>
+            <a:off x="176316" y="831954"/>
+            <a:ext cx="11630147" cy="3034303"/>
+            <a:chOff x="0" y="1847199"/>
+            <a:chExt cx="12190413" cy="3163602"/>
+          </a:xfrm>
+        </p:grpSpPr>
+        <p:grpSp>
+          <p:nvGrpSpPr>
+            <p:cNvPr id="27" name="组合 26">
+              <a:extLst>
+                <a:ext uri="{FF2B5EF4-FFF2-40B4-BE49-F238E27FC236}">
+                  <a16:creationId xmlns:a16="http://schemas.microsoft.com/office/drawing/2014/main" id="{782D23F1-43AB-C469-D501-5BDAF3DB05DC}"/>
+                </a:ext>
+              </a:extLst>
+            </p:cNvPr>
+            <p:cNvGrpSpPr/>
+            <p:nvPr/>
+          </p:nvGrpSpPr>
+          <p:grpSpPr>
+            <a:xfrm>
+              <a:off x="0" y="1847199"/>
+              <a:ext cx="12190413" cy="3163602"/>
+              <a:chOff x="0" y="1847199"/>
+              <a:chExt cx="12190413" cy="3163602"/>
+            </a:xfrm>
+          </p:grpSpPr>
+          <p:pic>
+            <p:nvPicPr>
+              <p:cNvPr id="31" name="图片 30">
+                <a:extLst>
+                  <a:ext uri="{FF2B5EF4-FFF2-40B4-BE49-F238E27FC236}">
+                    <a16:creationId xmlns:a16="http://schemas.microsoft.com/office/drawing/2014/main" id="{2405A9A7-3B35-2935-34EB-94AC2D1EDC13}"/>
+                  </a:ext>
+                </a:extLst>
+              </p:cNvPr>
+              <p:cNvPicPr>
+                <a:picLocks noChangeAspect="1"/>
+              </p:cNvPicPr>
+              <p:nvPr/>
+            </p:nvPicPr>
+            <p:blipFill>
+              <a:blip r:embed="rId3">
+                <a:extLst>
+                  <a:ext uri="{28A0092B-C50C-407E-A947-70E740481C1C}">
+                    <a14:useLocalDpi xmlns:a14="http://schemas.microsoft.com/office/drawing/2010/main" val="0"/>
+                  </a:ext>
+                </a:extLst>
+              </a:blip>
+              <a:stretch>
+                <a:fillRect/>
+              </a:stretch>
+            </p:blipFill>
+            <p:spPr>
+              <a:xfrm>
+                <a:off x="0" y="1847199"/>
+                <a:ext cx="12190413" cy="3163602"/>
+              </a:xfrm>
+              <a:prstGeom prst="rect">
+                <a:avLst/>
+              </a:prstGeom>
+            </p:spPr>
+          </p:pic>
+          <p:grpSp>
+            <p:nvGrpSpPr>
+              <p:cNvPr id="32" name="组合 31">
+                <a:extLst>
+                  <a:ext uri="{FF2B5EF4-FFF2-40B4-BE49-F238E27FC236}">
+                    <a16:creationId xmlns:a16="http://schemas.microsoft.com/office/drawing/2014/main" id="{09E0D515-9B11-1C41-5B2A-E759D526634F}"/>
+                  </a:ext>
+                </a:extLst>
+              </p:cNvPr>
+              <p:cNvGrpSpPr/>
+              <p:nvPr/>
+            </p:nvGrpSpPr>
+            <p:grpSpPr>
+              <a:xfrm>
+                <a:off x="2046157" y="2878111"/>
+                <a:ext cx="7316918" cy="793750"/>
+                <a:chOff x="2046157" y="2878111"/>
+                <a:chExt cx="7316918" cy="793750"/>
+              </a:xfrm>
+            </p:grpSpPr>
+            <p:grpSp>
+              <p:nvGrpSpPr>
+                <p:cNvPr id="35" name="组合 34">
+                  <a:extLst>
+                    <a:ext uri="{FF2B5EF4-FFF2-40B4-BE49-F238E27FC236}">
+                      <a16:creationId xmlns:a16="http://schemas.microsoft.com/office/drawing/2014/main" id="{AFCC35EB-1904-5BFA-8E49-3B858AABDF0D}"/>
+                    </a:ext>
+                  </a:extLst>
+                </p:cNvPr>
+                <p:cNvGrpSpPr/>
+                <p:nvPr/>
+              </p:nvGrpSpPr>
+              <p:grpSpPr>
+                <a:xfrm>
+                  <a:off x="2046157" y="2878111"/>
+                  <a:ext cx="1502286" cy="793750"/>
+                  <a:chOff x="2046157" y="2878111"/>
+                  <a:chExt cx="1502286" cy="793750"/>
+                </a:xfrm>
+              </p:grpSpPr>
+              <p:cxnSp>
+                <p:nvCxnSpPr>
+                  <p:cNvPr id="39" name="直接连接符 38">
+                    <a:extLst>
+                      <a:ext uri="{FF2B5EF4-FFF2-40B4-BE49-F238E27FC236}">
+                        <a16:creationId xmlns:a16="http://schemas.microsoft.com/office/drawing/2014/main" id="{2F208DFE-4398-3154-96C4-3A19B5CB9F99}"/>
+                      </a:ext>
+                    </a:extLst>
+                  </p:cNvPr>
+                  <p:cNvCxnSpPr/>
+                  <p:nvPr/>
+                </p:nvCxnSpPr>
+                <p:spPr>
+                  <a:xfrm>
+                    <a:off x="2046157" y="2878111"/>
+                    <a:ext cx="1484027" cy="0"/>
+                  </a:xfrm>
+                  <a:prstGeom prst="line">
+                    <a:avLst/>
+                  </a:prstGeom>
+                  <a:ln>
+                    <a:solidFill>
+                      <a:schemeClr val="tx2"/>
+                    </a:solidFill>
+                    <a:tailEnd type="none"/>
+                  </a:ln>
+                </p:spPr>
+                <p:style>
+                  <a:lnRef idx="1">
+                    <a:schemeClr val="accent1"/>
+                  </a:lnRef>
+                  <a:fillRef idx="0">
+                    <a:schemeClr val="accent1"/>
+                  </a:fillRef>
+                  <a:effectRef idx="0">
+                    <a:schemeClr val="accent1"/>
+                  </a:effectRef>
+                  <a:fontRef idx="minor">
+                    <a:schemeClr val="tx1"/>
+                  </a:fontRef>
+                </p:style>
+              </p:cxnSp>
+              <p:cxnSp>
+                <p:nvCxnSpPr>
+                  <p:cNvPr id="40" name="直接连接符 39">
+                    <a:extLst>
+                      <a:ext uri="{FF2B5EF4-FFF2-40B4-BE49-F238E27FC236}">
+                        <a16:creationId xmlns:a16="http://schemas.microsoft.com/office/drawing/2014/main" id="{63117C6D-7440-DC03-C25B-B1344D0B3747}"/>
+                      </a:ext>
+                    </a:extLst>
+                  </p:cNvPr>
+                  <p:cNvCxnSpPr/>
+                  <p:nvPr/>
+                </p:nvCxnSpPr>
+                <p:spPr>
+                  <a:xfrm>
+                    <a:off x="2064416" y="3671861"/>
+                    <a:ext cx="1484027" cy="0"/>
+                  </a:xfrm>
+                  <a:prstGeom prst="line">
+                    <a:avLst/>
+                  </a:prstGeom>
+                  <a:ln>
+                    <a:solidFill>
+                      <a:schemeClr val="tx2"/>
+                    </a:solidFill>
+                    <a:tailEnd type="none"/>
+                  </a:ln>
+                </p:spPr>
+                <p:style>
+                  <a:lnRef idx="1">
+                    <a:schemeClr val="accent1"/>
+                  </a:lnRef>
+                  <a:fillRef idx="0">
+                    <a:schemeClr val="accent1"/>
+                  </a:fillRef>
+                  <a:effectRef idx="0">
+                    <a:schemeClr val="accent1"/>
+                  </a:effectRef>
+                  <a:fontRef idx="minor">
+                    <a:schemeClr val="tx1"/>
+                  </a:fontRef>
+                </p:style>
+              </p:cxnSp>
+              <p:cxnSp>
+                <p:nvCxnSpPr>
+                  <p:cNvPr id="41" name="直接箭头连接符 40">
+                    <a:extLst>
+                      <a:ext uri="{FF2B5EF4-FFF2-40B4-BE49-F238E27FC236}">
+                        <a16:creationId xmlns:a16="http://schemas.microsoft.com/office/drawing/2014/main" id="{95754B14-0D81-87A5-DBC2-88A8D559B7FA}"/>
+                      </a:ext>
+                    </a:extLst>
+                  </p:cNvPr>
+                  <p:cNvCxnSpPr/>
+                  <p:nvPr/>
+                </p:nvCxnSpPr>
+                <p:spPr>
+                  <a:xfrm flipV="1">
+                    <a:off x="3477718" y="2878111"/>
+                    <a:ext cx="0" cy="793750"/>
+                  </a:xfrm>
+                  <a:prstGeom prst="straightConnector1">
+                    <a:avLst/>
+                  </a:prstGeom>
+                  <a:ln>
+                    <a:solidFill>
+                      <a:schemeClr val="tx2"/>
+                    </a:solidFill>
+                    <a:headEnd type="triangle"/>
+                    <a:tailEnd type="triangle"/>
+                  </a:ln>
+                </p:spPr>
+                <p:style>
+                  <a:lnRef idx="1">
+                    <a:schemeClr val="accent1"/>
+                  </a:lnRef>
+                  <a:fillRef idx="0">
+                    <a:schemeClr val="accent1"/>
+                  </a:fillRef>
+                  <a:effectRef idx="0">
+                    <a:schemeClr val="accent1"/>
+                  </a:effectRef>
+                  <a:fontRef idx="minor">
+                    <a:schemeClr val="tx1"/>
+                  </a:fontRef>
+                </p:style>
+              </p:cxnSp>
+            </p:grpSp>
+            <p:cxnSp>
+              <p:nvCxnSpPr>
+                <p:cNvPr id="36" name="直接连接符 35">
+                  <a:extLst>
+                    <a:ext uri="{FF2B5EF4-FFF2-40B4-BE49-F238E27FC236}">
+                      <a16:creationId xmlns:a16="http://schemas.microsoft.com/office/drawing/2014/main" id="{4816728E-1A00-8C04-F3E3-2E08C542A601}"/>
+                    </a:ext>
+                  </a:extLst>
+                </p:cNvPr>
+                <p:cNvCxnSpPr>
+                  <a:cxnSpLocks/>
+                </p:cNvCxnSpPr>
+                <p:nvPr/>
+              </p:nvCxnSpPr>
+              <p:spPr>
+                <a:xfrm>
+                  <a:off x="2046157" y="3671861"/>
+                  <a:ext cx="7316918" cy="0"/>
+                </a:xfrm>
+                <a:prstGeom prst="line">
+                  <a:avLst/>
+                </a:prstGeom>
+                <a:ln>
+                  <a:solidFill>
+                    <a:schemeClr val="tx2"/>
+                  </a:solidFill>
+                  <a:tailEnd type="none"/>
+                </a:ln>
+              </p:spPr>
+              <p:style>
+                <a:lnRef idx="1">
+                  <a:schemeClr val="accent1"/>
+                </a:lnRef>
+                <a:fillRef idx="0">
+                  <a:schemeClr val="accent1"/>
+                </a:fillRef>
+                <a:effectRef idx="0">
+                  <a:schemeClr val="accent1"/>
+                </a:effectRef>
+                <a:fontRef idx="minor">
+                  <a:schemeClr val="tx1"/>
+                </a:fontRef>
+              </p:style>
+            </p:cxnSp>
+          </p:grpSp>
+          <p:sp>
+            <p:nvSpPr>
+              <p:cNvPr id="33" name="文本框 32">
+                <a:extLst>
+                  <a:ext uri="{FF2B5EF4-FFF2-40B4-BE49-F238E27FC236}">
+                    <a16:creationId xmlns:a16="http://schemas.microsoft.com/office/drawing/2014/main" id="{8972036B-AA88-A226-ED9D-E0DBA0189608}"/>
+                  </a:ext>
+                </a:extLst>
+              </p:cNvPr>
+              <p:cNvSpPr txBox="1"/>
+              <p:nvPr/>
+            </p:nvSpPr>
+            <p:spPr>
+              <a:xfrm>
+                <a:off x="3529702" y="3109790"/>
+                <a:ext cx="407484" cy="338554"/>
+              </a:xfrm>
+              <a:prstGeom prst="rect">
+                <a:avLst/>
+              </a:prstGeom>
+              <a:noFill/>
+            </p:spPr>
+            <p:txBody>
+              <a:bodyPr wrap="none" rtlCol="0">
+                <a:spAutoFit/>
+              </a:bodyPr>
+              <a:lstStyle/>
+              <a:p>
+                <a:r>
+                  <a:rPr lang="en-US" altLang="zh-CN" sz="1600" dirty="0"/>
+                  <a:t>R</a:t>
+                </a:r>
+                <a:r>
+                  <a:rPr lang="en-US" altLang="zh-CN" sz="1600" baseline="-25000" dirty="0"/>
+                  <a:t>0</a:t>
+                </a:r>
+                <a:endParaRPr lang="zh-CN" altLang="en-US" sz="1600" baseline="-25000" dirty="0"/>
+              </a:p>
+            </p:txBody>
+          </p:sp>
+        </p:grpSp>
+        <p:sp>
+          <p:nvSpPr>
+            <p:cNvPr id="28" name="文本框 27">
+              <a:extLst>
+                <a:ext uri="{FF2B5EF4-FFF2-40B4-BE49-F238E27FC236}">
+                  <a16:creationId xmlns:a16="http://schemas.microsoft.com/office/drawing/2014/main" id="{38484A47-1346-8896-3654-3D7324233573}"/>
+                </a:ext>
+              </a:extLst>
+            </p:cNvPr>
+            <p:cNvSpPr txBox="1"/>
+            <p:nvPr/>
+          </p:nvSpPr>
+          <p:spPr>
+            <a:xfrm>
+              <a:off x="749692" y="2539557"/>
+              <a:ext cx="749692" cy="338554"/>
+            </a:xfrm>
+            <a:prstGeom prst="rect">
+              <a:avLst/>
+            </a:prstGeom>
+            <a:noFill/>
+          </p:spPr>
+          <p:txBody>
+            <a:bodyPr wrap="none" rtlCol="0">
+              <a:spAutoFit/>
+            </a:bodyPr>
+            <a:lstStyle/>
+            <a:p>
+              <a:r>
+                <a:rPr lang="en-US" altLang="zh-CN" sz="1600" dirty="0"/>
+                <a:t>PAUO</a:t>
+              </a:r>
+              <a:endParaRPr lang="zh-CN" altLang="en-US" sz="1600" dirty="0"/>
+            </a:p>
+          </p:txBody>
+        </p:sp>
+        <p:sp>
+          <p:nvSpPr>
+            <p:cNvPr id="29" name="文本框 28">
+              <a:extLst>
+                <a:ext uri="{FF2B5EF4-FFF2-40B4-BE49-F238E27FC236}">
+                  <a16:creationId xmlns:a16="http://schemas.microsoft.com/office/drawing/2014/main" id="{A4710343-C94F-F3C2-F6DD-A3662A20E04A}"/>
+                </a:ext>
+              </a:extLst>
+            </p:cNvPr>
+            <p:cNvSpPr txBox="1"/>
+            <p:nvPr/>
+          </p:nvSpPr>
+          <p:spPr>
+            <a:xfrm>
+              <a:off x="10144256" y="2878111"/>
+              <a:ext cx="749692" cy="338554"/>
+            </a:xfrm>
+            <a:prstGeom prst="rect">
+              <a:avLst/>
+            </a:prstGeom>
+            <a:noFill/>
+          </p:spPr>
+          <p:txBody>
+            <a:bodyPr wrap="none" rtlCol="0">
+              <a:spAutoFit/>
+            </a:bodyPr>
+            <a:lstStyle/>
+            <a:p>
+              <a:r>
+                <a:rPr lang="en-US" altLang="zh-CN" sz="1600" dirty="0"/>
+                <a:t>PAUO</a:t>
+              </a:r>
+              <a:endParaRPr lang="zh-CN" altLang="en-US" sz="1600" dirty="0"/>
+            </a:p>
+          </p:txBody>
+        </p:sp>
+      </p:grpSp>
+      <p:sp>
+        <p:nvSpPr>
+          <p:cNvPr id="42" name="文本框 41">
+            <a:extLst>
+              <a:ext uri="{FF2B5EF4-FFF2-40B4-BE49-F238E27FC236}">
+                <a16:creationId xmlns:a16="http://schemas.microsoft.com/office/drawing/2014/main" id="{857564FE-B215-AF4A-2C47-59F8876C280D}"/>
+              </a:ext>
+            </a:extLst>
+          </p:cNvPr>
+          <p:cNvSpPr txBox="1"/>
+          <p:nvPr/>
+        </p:nvSpPr>
+        <p:spPr>
+          <a:xfrm>
+            <a:off x="556268" y="3520336"/>
+            <a:ext cx="8291247" cy="2534027"/>
+          </a:xfrm>
+          <a:prstGeom prst="rect">
+            <a:avLst/>
+          </a:prstGeom>
+          <a:noFill/>
+        </p:spPr>
+        <p:txBody>
+          <a:bodyPr wrap="square" rtlCol="0">
+            <a:spAutoFit/>
+          </a:bodyPr>
+          <a:lstStyle/>
+          <a:p>
+            <a:pPr marL="0" indent="0">
               <a:lnSpc>
-                <a:spcPct val="200000"/>
+                <a:spcPct val="150000"/>
               </a:lnSpc>
+              <a:buNone/>
             </a:pPr>
             <a:r>
-              <a:rPr lang="zh-CN" altLang="en-US" sz="1600" dirty="0"/>
-              <a:t>Degradation behavior varies across SOC levels</a:t>
-            </a:r>
-          </a:p>
-          <a:p>
-            <a:pPr>
+              <a:rPr lang="en-US" altLang="zh-CN" dirty="0"/>
+              <a:t>Motivation:</a:t>
+            </a:r>
+          </a:p>
+          <a:p>
+            <a:pPr marL="285750" indent="-285750">
               <a:lnSpc>
-                <a:spcPct val="200000"/>
+                <a:spcPct val="150000"/>
               </a:lnSpc>
+              <a:buClr>
+                <a:srgbClr val="00549F"/>
+              </a:buClr>
+              <a:buFont typeface="Wingdings" panose="05000000000000000000" pitchFamily="2" charset="2"/>
+              <a:buChar char="n"/>
             </a:pPr>
             <a:r>
-              <a:rPr lang="zh-CN" altLang="en-US" sz="1600" dirty="0"/>
-              <a:t>R</a:t>
-            </a:r>
-            <a:r>
-              <a:rPr lang="zh-CN" altLang="en-US" sz="1600" baseline="-25000" dirty="0"/>
-              <a:t>0</a:t>
-            </a:r>
-            <a:r>
-              <a:rPr lang="zh-CN" altLang="en-US" sz="1600" dirty="0"/>
-              <a:t>, R</a:t>
-            </a:r>
-            <a:r>
-              <a:rPr lang="zh-CN" altLang="en-US" sz="1600" baseline="-25000" dirty="0"/>
-              <a:t>1</a:t>
-            </a:r>
-            <a:r>
-              <a:rPr lang="zh-CN" altLang="en-US" sz="1600" dirty="0"/>
-              <a:t> and R</a:t>
-            </a:r>
-            <a:r>
-              <a:rPr lang="zh-CN" altLang="en-US" sz="1600" baseline="-25000" dirty="0"/>
-              <a:t>2</a:t>
-            </a:r>
-            <a:r>
-              <a:rPr lang="zh-CN" altLang="en-US" sz="1600" dirty="0"/>
-              <a:t> reflect different parts of the voltage response</a:t>
-            </a:r>
-          </a:p>
-          <a:p>
-            <a:pPr>
+              <a:rPr lang="en-US" altLang="zh-CN" dirty="0"/>
+              <a:t>Aging changes both capacity and resistance.</a:t>
+            </a:r>
+          </a:p>
+          <a:p>
+            <a:pPr marL="285750" indent="-285750">
               <a:lnSpc>
-                <a:spcPct val="200000"/>
+                <a:spcPct val="150000"/>
               </a:lnSpc>
+              <a:buClr>
+                <a:srgbClr val="00549F"/>
+              </a:buClr>
+              <a:buFont typeface="Wingdings" panose="05000000000000000000" pitchFamily="2" charset="2"/>
+              <a:buChar char="n"/>
             </a:pPr>
             <a:r>
-              <a:rPr lang="zh-CN" altLang="en-US" sz="1600" dirty="0"/>
-              <a:t>SOC-resolved resistance parameters can improve battery health characterization</a:t>
-            </a:r>
-          </a:p>
-          <a:p>
-            <a:pPr>
+              <a:rPr lang="en-US" altLang="zh-CN" dirty="0"/>
+              <a:t>Pulse-pause response makes these changes observable.</a:t>
+            </a:r>
+          </a:p>
+          <a:p>
+            <a:pPr marL="285750" indent="-285750">
               <a:lnSpc>
-                <a:spcPct val="200000"/>
+                <a:spcPct val="150000"/>
               </a:lnSpc>
+              <a:buClr>
+                <a:srgbClr val="00549F"/>
+              </a:buClr>
+              <a:buFont typeface="Wingdings" panose="05000000000000000000" pitchFamily="2" charset="2"/>
+              <a:buChar char="n"/>
             </a:pPr>
             <a:r>
-              <a:rPr lang="zh-CN" altLang="en-US" sz="1600" dirty="0"/>
-              <a:t>Extracted parameters will be used for multi-task learning based health prediction</a:t>
-            </a:r>
-          </a:p>
-          <a:p>
-            <a:pPr lvl="1"/>
+              <a:rPr lang="en-US" altLang="zh-CN" dirty="0"/>
+              <a:t>R₀ captures ohmic response.</a:t>
+            </a:r>
+          </a:p>
+          <a:p>
+            <a:pPr marL="285750" indent="-285750">
+              <a:lnSpc>
+                <a:spcPct val="150000"/>
+              </a:lnSpc>
+              <a:buClr>
+                <a:srgbClr val="00549F"/>
+              </a:buClr>
+              <a:buFont typeface="Wingdings" panose="05000000000000000000" pitchFamily="2" charset="2"/>
+              <a:buChar char="n"/>
+            </a:pPr>
+            <a:r>
+              <a:rPr lang="en-US" altLang="zh-CN" dirty="0"/>
+              <a:t>R₁ and R₂ describe fast and slow polarization.</a:t>
+            </a:r>
+          </a:p>
+          <a:p>
+            <a:pPr marL="285750" indent="-285750">
+              <a:lnSpc>
+                <a:spcPct val="150000"/>
+              </a:lnSpc>
+              <a:buClr>
+                <a:srgbClr val="00549F"/>
+              </a:buClr>
+              <a:buFont typeface="Wingdings" panose="05000000000000000000" pitchFamily="2" charset="2"/>
+              <a:buChar char="n"/>
+            </a:pPr>
+            <a:r>
+              <a:rPr lang="en-US" altLang="zh-CN" dirty="0"/>
+              <a:t>These parameters will support battery health prediction.</a:t>
+            </a:r>
             <a:endParaRPr lang="de-DE" altLang="zh-CN" dirty="0"/>
           </a:p>
-          <a:p>
-            <a:endParaRPr lang="en-US" dirty="0"/>
-          </a:p>
-          <a:p>
-            <a:endParaRPr lang="de-DE" dirty="0"/>
-          </a:p>
         </p:txBody>
       </p:sp>
+      <p:grpSp>
+        <p:nvGrpSpPr>
+          <p:cNvPr id="8" name="组合 7">
+            <a:extLst>
+              <a:ext uri="{FF2B5EF4-FFF2-40B4-BE49-F238E27FC236}">
+                <a16:creationId xmlns:a16="http://schemas.microsoft.com/office/drawing/2014/main" id="{A0CF38A4-B5E5-004F-1B11-9CF15B50FA7D}"/>
+              </a:ext>
+            </a:extLst>
+          </p:cNvPr>
+          <p:cNvGrpSpPr/>
+          <p:nvPr/>
+        </p:nvGrpSpPr>
+        <p:grpSpPr>
+          <a:xfrm>
+            <a:off x="88157" y="907564"/>
+            <a:ext cx="11806463" cy="2883082"/>
+            <a:chOff x="0" y="1847199"/>
+            <a:chExt cx="12190413" cy="3163602"/>
+          </a:xfrm>
+        </p:grpSpPr>
+        <p:pic>
+          <p:nvPicPr>
+            <p:cNvPr id="9" name="图片 8">
+              <a:extLst>
+                <a:ext uri="{FF2B5EF4-FFF2-40B4-BE49-F238E27FC236}">
+                  <a16:creationId xmlns:a16="http://schemas.microsoft.com/office/drawing/2014/main" id="{25D5E17F-AF1A-3545-4AED-57C1EB73962E}"/>
+                </a:ext>
+              </a:extLst>
+            </p:cNvPr>
+            <p:cNvPicPr>
+              <a:picLocks noChangeAspect="1"/>
+            </p:cNvPicPr>
+            <p:nvPr/>
+          </p:nvPicPr>
+          <p:blipFill>
+            <a:blip r:embed="rId4"/>
+            <a:stretch>
+              <a:fillRect/>
+            </a:stretch>
+          </p:blipFill>
+          <p:spPr>
+            <a:xfrm>
+              <a:off x="0" y="1847199"/>
+              <a:ext cx="12190413" cy="3163602"/>
+            </a:xfrm>
+            <a:prstGeom prst="rect">
+              <a:avLst/>
+            </a:prstGeom>
+          </p:spPr>
+        </p:pic>
+        <p:cxnSp>
+          <p:nvCxnSpPr>
+            <p:cNvPr id="10" name="直接连接符 9">
+              <a:extLst>
+                <a:ext uri="{FF2B5EF4-FFF2-40B4-BE49-F238E27FC236}">
+                  <a16:creationId xmlns:a16="http://schemas.microsoft.com/office/drawing/2014/main" id="{8712EE8F-894F-F5C5-FD3E-643DDD4F4CFB}"/>
+                </a:ext>
+              </a:extLst>
+            </p:cNvPr>
+            <p:cNvCxnSpPr>
+              <a:cxnSpLocks/>
+            </p:cNvCxnSpPr>
+            <p:nvPr/>
+          </p:nvCxnSpPr>
+          <p:spPr>
+            <a:xfrm flipV="1">
+              <a:off x="1473200" y="3429000"/>
+              <a:ext cx="0" cy="444500"/>
+            </a:xfrm>
+            <a:prstGeom prst="line">
+              <a:avLst/>
+            </a:prstGeom>
+            <a:ln>
+              <a:solidFill>
+                <a:schemeClr val="tx2"/>
+              </a:solidFill>
+              <a:tailEnd type="none"/>
+            </a:ln>
+          </p:spPr>
+          <p:style>
+            <a:lnRef idx="1">
+              <a:schemeClr val="accent1"/>
+            </a:lnRef>
+            <a:fillRef idx="0">
+              <a:schemeClr val="accent1"/>
+            </a:fillRef>
+            <a:effectRef idx="0">
+              <a:schemeClr val="accent1"/>
+            </a:effectRef>
+            <a:fontRef idx="minor">
+              <a:schemeClr val="tx1"/>
+            </a:fontRef>
+          </p:style>
+        </p:cxnSp>
+        <p:cxnSp>
+          <p:nvCxnSpPr>
+            <p:cNvPr id="11" name="直接连接符 10">
+              <a:extLst>
+                <a:ext uri="{FF2B5EF4-FFF2-40B4-BE49-F238E27FC236}">
+                  <a16:creationId xmlns:a16="http://schemas.microsoft.com/office/drawing/2014/main" id="{ADC43A9D-BB4C-DA23-98AB-05C3EC258B0B}"/>
+                </a:ext>
+              </a:extLst>
+            </p:cNvPr>
+            <p:cNvCxnSpPr>
+              <a:cxnSpLocks/>
+            </p:cNvCxnSpPr>
+            <p:nvPr/>
+          </p:nvCxnSpPr>
+          <p:spPr>
+            <a:xfrm flipV="1">
+              <a:off x="11214099" y="3144041"/>
+              <a:ext cx="0" cy="444500"/>
+            </a:xfrm>
+            <a:prstGeom prst="line">
+              <a:avLst/>
+            </a:prstGeom>
+            <a:ln>
+              <a:solidFill>
+                <a:schemeClr val="tx2"/>
+              </a:solidFill>
+              <a:tailEnd type="none"/>
+            </a:ln>
+          </p:spPr>
+          <p:style>
+            <a:lnRef idx="1">
+              <a:schemeClr val="accent1"/>
+            </a:lnRef>
+            <a:fillRef idx="0">
+              <a:schemeClr val="accent1"/>
+            </a:fillRef>
+            <a:effectRef idx="0">
+              <a:schemeClr val="accent1"/>
+            </a:effectRef>
+            <a:fontRef idx="minor">
+              <a:schemeClr val="tx1"/>
+            </a:fontRef>
+          </p:style>
+        </p:cxnSp>
+        <p:cxnSp>
+          <p:nvCxnSpPr>
+            <p:cNvPr id="12" name="直接箭头连接符 11">
+              <a:extLst>
+                <a:ext uri="{FF2B5EF4-FFF2-40B4-BE49-F238E27FC236}">
+                  <a16:creationId xmlns:a16="http://schemas.microsoft.com/office/drawing/2014/main" id="{2F348365-29BB-C9CA-3E74-2198F078C52A}"/>
+                </a:ext>
+              </a:extLst>
+            </p:cNvPr>
+            <p:cNvCxnSpPr/>
+            <p:nvPr/>
+          </p:nvCxnSpPr>
+          <p:spPr>
+            <a:xfrm>
+              <a:off x="1473200" y="3522689"/>
+              <a:ext cx="9740899" cy="0"/>
+            </a:xfrm>
+            <a:prstGeom prst="straightConnector1">
+              <a:avLst/>
+            </a:prstGeom>
+            <a:ln>
+              <a:solidFill>
+                <a:schemeClr val="tx2"/>
+              </a:solidFill>
+              <a:headEnd type="triangle"/>
+              <a:tailEnd type="triangle"/>
+            </a:ln>
+          </p:spPr>
+          <p:style>
+            <a:lnRef idx="1">
+              <a:schemeClr val="accent1"/>
+            </a:lnRef>
+            <a:fillRef idx="0">
+              <a:schemeClr val="accent1"/>
+            </a:fillRef>
+            <a:effectRef idx="0">
+              <a:schemeClr val="accent1"/>
+            </a:effectRef>
+            <a:fontRef idx="minor">
+              <a:schemeClr val="tx1"/>
+            </a:fontRef>
+          </p:style>
+        </p:cxnSp>
+        <p:sp>
+          <p:nvSpPr>
+            <p:cNvPr id="14" name="文本框 13">
+              <a:extLst>
+                <a:ext uri="{FF2B5EF4-FFF2-40B4-BE49-F238E27FC236}">
+                  <a16:creationId xmlns:a16="http://schemas.microsoft.com/office/drawing/2014/main" id="{7BC994C9-81E8-940B-4334-EC263CAE8F5E}"/>
+                </a:ext>
+              </a:extLst>
+            </p:cNvPr>
+            <p:cNvSpPr txBox="1"/>
+            <p:nvPr/>
+          </p:nvSpPr>
+          <p:spPr>
+            <a:xfrm>
+              <a:off x="4268401" y="3528818"/>
+              <a:ext cx="4150495" cy="338554"/>
+            </a:xfrm>
+            <a:prstGeom prst="rect">
+              <a:avLst/>
+            </a:prstGeom>
+            <a:noFill/>
+          </p:spPr>
+          <p:txBody>
+            <a:bodyPr wrap="none" rtlCol="0">
+              <a:spAutoFit/>
+            </a:bodyPr>
+            <a:lstStyle/>
+            <a:p>
+              <a:r>
+                <a:rPr lang="en-US" altLang="zh-CN" sz="1600" dirty="0"/>
+                <a:t>Post-pulse relaxation window for 2RC fitting</a:t>
+              </a:r>
+              <a:endParaRPr lang="zh-CN" altLang="en-US" sz="1600" dirty="0"/>
+            </a:p>
+          </p:txBody>
+        </p:sp>
+      </p:grpSp>
     </p:spTree>
     <p:extLst>
       <p:ext uri="{BB962C8B-B14F-4D97-AF65-F5344CB8AC3E}">
@@ -19138,6 +20802,89 @@
   <p:clrMapOvr>
     <a:masterClrMapping/>
   </p:clrMapOvr>
+  <p:timing>
+    <p:tnLst>
+      <p:par>
+        <p:cTn id="1" dur="indefinite" restart="never" nodeType="tmRoot">
+          <p:childTnLst>
+            <p:seq concurrent="1" nextAc="seek">
+              <p:cTn id="2" dur="indefinite" nodeType="mainSeq">
+                <p:childTnLst>
+                  <p:par>
+                    <p:cTn id="3" fill="hold">
+                      <p:stCondLst>
+                        <p:cond delay="indefinite"/>
+                      </p:stCondLst>
+                      <p:childTnLst>
+                        <p:par>
+                          <p:cTn id="4" fill="hold">
+                            <p:stCondLst>
+                              <p:cond delay="0"/>
+                            </p:stCondLst>
+                            <p:childTnLst>
+                              <p:par>
+                                <p:cTn id="5" presetID="10" presetClass="entr" presetSubtype="0" fill="hold" nodeType="clickEffect">
+                                  <p:stCondLst>
+                                    <p:cond delay="0"/>
+                                  </p:stCondLst>
+                                  <p:childTnLst>
+                                    <p:set>
+                                      <p:cBhvr>
+                                        <p:cTn id="6" dur="1" fill="hold">
+                                          <p:stCondLst>
+                                            <p:cond delay="0"/>
+                                          </p:stCondLst>
+                                        </p:cTn>
+                                        <p:tgtEl>
+                                          <p:spTgt spid="8"/>
+                                        </p:tgtEl>
+                                        <p:attrNameLst>
+                                          <p:attrName>style.visibility</p:attrName>
+                                        </p:attrNameLst>
+                                      </p:cBhvr>
+                                      <p:to>
+                                        <p:strVal val="visible"/>
+                                      </p:to>
+                                    </p:set>
+                                    <p:animEffect transition="in" filter="fade">
+                                      <p:cBhvr>
+                                        <p:cTn id="7" dur="500"/>
+                                        <p:tgtEl>
+                                          <p:spTgt spid="8"/>
+                                        </p:tgtEl>
+                                      </p:cBhvr>
+                                    </p:animEffect>
+                                  </p:childTnLst>
+                                </p:cTn>
+                              </p:par>
+                            </p:childTnLst>
+                          </p:cTn>
+                        </p:par>
+                      </p:childTnLst>
+                    </p:cTn>
+                  </p:par>
+                </p:childTnLst>
+              </p:cTn>
+              <p:prevCondLst>
+                <p:cond evt="onPrev" delay="0">
+                  <p:tgtEl>
+                    <p:sldTgt/>
+                  </p:tgtEl>
+                </p:cond>
+              </p:prevCondLst>
+              <p:nextCondLst>
+                <p:cond evt="onNext" delay="0">
+                  <p:tgtEl>
+                    <p:sldTgt/>
+                  </p:tgtEl>
+                </p:cond>
+              </p:nextCondLst>
+            </p:seq>
+          </p:childTnLst>
+        </p:cTn>
+      </p:par>
+    </p:tnLst>
+  </p:timing>
 </p:sld>
 </file>
 
@@ -19210,7 +20957,7 @@
           <a:p>
             <a:r>
               <a:rPr lang="de-DE" altLang="zh-CN" dirty="0"/>
-              <a:t>09.07.2026</a:t>
+              <a:t>08.07.2026</a:t>
             </a:r>
           </a:p>
           <a:p>
@@ -20174,37 +21921,6 @@
           </a:p>
         </p:txBody>
       </p:sp>
-      <p:pic>
-        <p:nvPicPr>
-          <p:cNvPr id="7" name="图片 6">
-            <a:extLst>
-              <a:ext uri="{FF2B5EF4-FFF2-40B4-BE49-F238E27FC236}">
-                <a16:creationId xmlns:a16="http://schemas.microsoft.com/office/drawing/2014/main" id="{7F8F84EE-7926-A921-CCEE-76A1EDA7B9F6}"/>
-              </a:ext>
-            </a:extLst>
-          </p:cNvPr>
-          <p:cNvPicPr>
-            <a:picLocks noChangeAspect="1"/>
-          </p:cNvPicPr>
-          <p:nvPr/>
-        </p:nvPicPr>
-        <p:blipFill>
-          <a:blip r:embed="rId3"/>
-          <a:stretch>
-            <a:fillRect/>
-          </a:stretch>
-        </p:blipFill>
-        <p:spPr>
-          <a:xfrm>
-            <a:off x="383950" y="1037230"/>
-            <a:ext cx="11321625" cy="5009818"/>
-          </a:xfrm>
-          <a:prstGeom prst="rect">
-            <a:avLst/>
-          </a:prstGeom>
-          <a:noFill/>
-        </p:spPr>
-      </p:pic>
       <p:sp>
         <p:nvSpPr>
           <p:cNvPr id="4" name="日期占位符 3">
@@ -20240,9 +21956,8 @@
             </a:pPr>
             <a:r>
               <a:rPr lang="de-DE" dirty="0"/>
-              <a:t>09.07.2026</a:t>
-            </a:r>
-            <a:endParaRPr lang="de-DE"/>
+              <a:t>08.07.2026</a:t>
+            </a:r>
           </a:p>
         </p:txBody>
       </p:sp>
@@ -20337,6 +22052,194 @@
           </a:p>
         </p:txBody>
       </p:sp>
+      <p:grpSp>
+        <p:nvGrpSpPr>
+          <p:cNvPr id="20" name="组合 19">
+            <a:extLst>
+              <a:ext uri="{FF2B5EF4-FFF2-40B4-BE49-F238E27FC236}">
+                <a16:creationId xmlns:a16="http://schemas.microsoft.com/office/drawing/2014/main" id="{3F632CA2-B547-7E01-42CB-05F6CF8875D3}"/>
+              </a:ext>
+            </a:extLst>
+          </p:cNvPr>
+          <p:cNvGrpSpPr/>
+          <p:nvPr/>
+        </p:nvGrpSpPr>
+        <p:grpSpPr>
+          <a:xfrm>
+            <a:off x="383950" y="1029735"/>
+            <a:ext cx="11422513" cy="5132929"/>
+            <a:chOff x="383950" y="1029735"/>
+            <a:chExt cx="11422513" cy="5132929"/>
+          </a:xfrm>
+        </p:grpSpPr>
+        <p:pic>
+          <p:nvPicPr>
+            <p:cNvPr id="7" name="图片 6">
+              <a:extLst>
+                <a:ext uri="{FF2B5EF4-FFF2-40B4-BE49-F238E27FC236}">
+                  <a16:creationId xmlns:a16="http://schemas.microsoft.com/office/drawing/2014/main" id="{7F8F84EE-7926-A921-CCEE-76A1EDA7B9F6}"/>
+                </a:ext>
+              </a:extLst>
+            </p:cNvPr>
+            <p:cNvPicPr>
+              <a:picLocks noChangeAspect="1"/>
+            </p:cNvPicPr>
+            <p:nvPr/>
+          </p:nvPicPr>
+          <p:blipFill>
+            <a:blip r:embed="rId3"/>
+            <a:stretch>
+              <a:fillRect/>
+            </a:stretch>
+          </p:blipFill>
+          <p:spPr>
+            <a:xfrm>
+              <a:off x="383950" y="1029735"/>
+              <a:ext cx="11321625" cy="5009818"/>
+            </a:xfrm>
+            <a:prstGeom prst="rect">
+              <a:avLst/>
+            </a:prstGeom>
+            <a:noFill/>
+          </p:spPr>
+        </p:pic>
+        <p:sp>
+          <p:nvSpPr>
+            <p:cNvPr id="12" name="文本框 11">
+              <a:extLst>
+                <a:ext uri="{FF2B5EF4-FFF2-40B4-BE49-F238E27FC236}">
+                  <a16:creationId xmlns:a16="http://schemas.microsoft.com/office/drawing/2014/main" id="{FC2437F4-3831-5941-9C14-63679CE7BE10}"/>
+                </a:ext>
+              </a:extLst>
+            </p:cNvPr>
+            <p:cNvSpPr txBox="1"/>
+            <p:nvPr/>
+          </p:nvSpPr>
+          <p:spPr>
+            <a:xfrm>
+              <a:off x="5712963" y="5854887"/>
+              <a:ext cx="6093500" cy="307777"/>
+            </a:xfrm>
+            <a:prstGeom prst="rect">
+              <a:avLst/>
+            </a:prstGeom>
+            <a:noFill/>
+          </p:spPr>
+          <p:txBody>
+            <a:bodyPr wrap="square">
+              <a:spAutoFit/>
+            </a:bodyPr>
+            <a:lstStyle/>
+            <a:p>
+              <a:r>
+                <a:rPr lang="zh-CN" altLang="en-US" sz="1400" dirty="0"/>
+                <a:t>Current Progress</a:t>
+              </a:r>
+            </a:p>
+          </p:txBody>
+        </p:sp>
+      </p:grpSp>
+      <p:grpSp>
+        <p:nvGrpSpPr>
+          <p:cNvPr id="18" name="组合 17">
+            <a:extLst>
+              <a:ext uri="{FF2B5EF4-FFF2-40B4-BE49-F238E27FC236}">
+                <a16:creationId xmlns:a16="http://schemas.microsoft.com/office/drawing/2014/main" id="{514AB006-1E96-61D7-3F75-D125DF7D0259}"/>
+              </a:ext>
+            </a:extLst>
+          </p:cNvPr>
+          <p:cNvGrpSpPr/>
+          <p:nvPr/>
+        </p:nvGrpSpPr>
+        <p:grpSpPr>
+          <a:xfrm>
+            <a:off x="5388964" y="1648918"/>
+            <a:ext cx="323999" cy="4359858"/>
+            <a:chOff x="5388964" y="1648918"/>
+            <a:chExt cx="323999" cy="4359858"/>
+          </a:xfrm>
+        </p:grpSpPr>
+        <p:cxnSp>
+          <p:nvCxnSpPr>
+            <p:cNvPr id="10" name="直接连接符 9">
+              <a:extLst>
+                <a:ext uri="{FF2B5EF4-FFF2-40B4-BE49-F238E27FC236}">
+                  <a16:creationId xmlns:a16="http://schemas.microsoft.com/office/drawing/2014/main" id="{BDE1AC6A-5B5C-BDA0-EB18-F7E7A77FFE32}"/>
+                </a:ext>
+              </a:extLst>
+            </p:cNvPr>
+            <p:cNvCxnSpPr/>
+            <p:nvPr/>
+          </p:nvCxnSpPr>
+          <p:spPr>
+            <a:xfrm>
+              <a:off x="5388964" y="1648918"/>
+              <a:ext cx="0" cy="4320000"/>
+            </a:xfrm>
+            <a:prstGeom prst="line">
+              <a:avLst/>
+            </a:prstGeom>
+            <a:ln w="19050">
+              <a:tailEnd type="none"/>
+            </a:ln>
+          </p:spPr>
+          <p:style>
+            <a:lnRef idx="1">
+              <a:schemeClr val="accent4"/>
+            </a:lnRef>
+            <a:fillRef idx="0">
+              <a:schemeClr val="accent4"/>
+            </a:fillRef>
+            <a:effectRef idx="0">
+              <a:schemeClr val="accent4"/>
+            </a:effectRef>
+            <a:fontRef idx="minor">
+              <a:schemeClr val="tx1"/>
+            </a:fontRef>
+          </p:style>
+        </p:cxnSp>
+        <p:cxnSp>
+          <p:nvCxnSpPr>
+            <p:cNvPr id="14" name="直接箭头连接符 13">
+              <a:extLst>
+                <a:ext uri="{FF2B5EF4-FFF2-40B4-BE49-F238E27FC236}">
+                  <a16:creationId xmlns:a16="http://schemas.microsoft.com/office/drawing/2014/main" id="{EB8C2E3A-4562-5DF2-F53D-153EA22F8D2C}"/>
+                </a:ext>
+              </a:extLst>
+            </p:cNvPr>
+            <p:cNvCxnSpPr>
+              <a:endCxn id="12" idx="1"/>
+            </p:cNvCxnSpPr>
+            <p:nvPr/>
+          </p:nvCxnSpPr>
+          <p:spPr>
+            <a:xfrm>
+              <a:off x="5388964" y="5968918"/>
+              <a:ext cx="323999" cy="39858"/>
+            </a:xfrm>
+            <a:prstGeom prst="straightConnector1">
+              <a:avLst/>
+            </a:prstGeom>
+            <a:ln>
+              <a:tailEnd type="triangle"/>
+            </a:ln>
+          </p:spPr>
+          <p:style>
+            <a:lnRef idx="1">
+              <a:schemeClr val="accent4"/>
+            </a:lnRef>
+            <a:fillRef idx="0">
+              <a:schemeClr val="accent4"/>
+            </a:fillRef>
+            <a:effectRef idx="0">
+              <a:schemeClr val="accent4"/>
+            </a:effectRef>
+            <a:fontRef idx="minor">
+              <a:schemeClr val="tx1"/>
+            </a:fontRef>
+          </p:style>
+        </p:cxnSp>
+      </p:grpSp>
     </p:spTree>
     <p:extLst>
       <p:ext uri="{BB962C8B-B14F-4D97-AF65-F5344CB8AC3E}">
@@ -20515,7 +22418,7 @@
           <a:p>
             <a:r>
               <a:rPr lang="de-DE" altLang="zh-CN" dirty="0"/>
-              <a:t>09.07.2026</a:t>
+              <a:t>08.07.2026</a:t>
             </a:r>
           </a:p>
           <a:p>
@@ -20678,7 +22581,7 @@
             <a:pPr algn="l"/>
             <a:r>
               <a:rPr lang="de-DE" dirty="0"/>
-              <a:t>09.07.2026</a:t>
+              <a:t>08.07.2026</a:t>
             </a:r>
           </a:p>
         </p:txBody>
@@ -20809,186 +22712,228 @@
           </a:p>
         </p:txBody>
       </p:sp>
-      <p:pic>
-        <p:nvPicPr>
-          <p:cNvPr id="11" name="图片 10">
+      <p:grpSp>
+        <p:nvGrpSpPr>
+          <p:cNvPr id="3" name="组合 2">
             <a:extLst>
               <a:ext uri="{FF2B5EF4-FFF2-40B4-BE49-F238E27FC236}">
-                <a16:creationId xmlns:a16="http://schemas.microsoft.com/office/drawing/2014/main" id="{0B73C242-4490-FECB-FEFB-A8DFD74A505C}"/>
+                <a16:creationId xmlns:a16="http://schemas.microsoft.com/office/drawing/2014/main" id="{8E5628C7-4D5C-4B8B-02EF-2329DC1093A9}"/>
               </a:ext>
             </a:extLst>
           </p:cNvPr>
-          <p:cNvPicPr>
-            <a:picLocks noChangeAspect="1"/>
-          </p:cNvPicPr>
+          <p:cNvGrpSpPr/>
           <p:nvPr/>
-        </p:nvPicPr>
-        <p:blipFill>
-          <a:blip r:embed="rId3"/>
-          <a:stretch>
-            <a:fillRect/>
-          </a:stretch>
-        </p:blipFill>
-        <p:spPr>
+        </p:nvGrpSpPr>
+        <p:grpSpPr>
           <a:xfrm>
-            <a:off x="485677" y="945350"/>
-            <a:ext cx="3419260" cy="4235022"/>
+            <a:off x="383950" y="945350"/>
+            <a:ext cx="7079740" cy="4786924"/>
+            <a:chOff x="383950" y="945350"/>
+            <a:chExt cx="7079740" cy="4786924"/>
           </a:xfrm>
-          <a:prstGeom prst="rect">
-            <a:avLst/>
-          </a:prstGeom>
-        </p:spPr>
-      </p:pic>
-      <p:sp>
-        <p:nvSpPr>
-          <p:cNvPr id="15" name="文本框 14">
+        </p:grpSpPr>
+        <p:pic>
+          <p:nvPicPr>
+            <p:cNvPr id="11" name="图片 10">
+              <a:extLst>
+                <a:ext uri="{FF2B5EF4-FFF2-40B4-BE49-F238E27FC236}">
+                  <a16:creationId xmlns:a16="http://schemas.microsoft.com/office/drawing/2014/main" id="{0B73C242-4490-FECB-FEFB-A8DFD74A505C}"/>
+                </a:ext>
+              </a:extLst>
+            </p:cNvPr>
+            <p:cNvPicPr>
+              <a:picLocks noChangeAspect="1"/>
+            </p:cNvPicPr>
+            <p:nvPr/>
+          </p:nvPicPr>
+          <p:blipFill>
+            <a:blip r:embed="rId3"/>
+            <a:stretch>
+              <a:fillRect/>
+            </a:stretch>
+          </p:blipFill>
+          <p:spPr>
+            <a:xfrm>
+              <a:off x="485677" y="945350"/>
+              <a:ext cx="3419260" cy="4235022"/>
+            </a:xfrm>
+            <a:prstGeom prst="rect">
+              <a:avLst/>
+            </a:prstGeom>
+          </p:spPr>
+        </p:pic>
+        <p:sp>
+          <p:nvSpPr>
+            <p:cNvPr id="15" name="文本框 14">
+              <a:extLst>
+                <a:ext uri="{FF2B5EF4-FFF2-40B4-BE49-F238E27FC236}">
+                  <a16:creationId xmlns:a16="http://schemas.microsoft.com/office/drawing/2014/main" id="{A72C88C9-08E3-0025-D623-CE998AA53990}"/>
+                </a:ext>
+              </a:extLst>
+            </p:cNvPr>
+            <p:cNvSpPr txBox="1"/>
+            <p:nvPr/>
+          </p:nvSpPr>
+          <p:spPr>
+            <a:xfrm>
+              <a:off x="383950" y="5362942"/>
+              <a:ext cx="7079740" cy="369332"/>
+            </a:xfrm>
+            <a:prstGeom prst="rect">
+              <a:avLst/>
+            </a:prstGeom>
+            <a:noFill/>
+          </p:spPr>
+          <p:txBody>
+            <a:bodyPr wrap="square">
+              <a:spAutoFit/>
+            </a:bodyPr>
+            <a:lstStyle/>
+            <a:p>
+              <a:pPr marL="285750" indent="-285750">
+                <a:buClr>
+                  <a:srgbClr val="00549F"/>
+                </a:buClr>
+                <a:buFont typeface="Wingdings" panose="05000000000000000000" pitchFamily="2" charset="2"/>
+                <a:buChar char="n"/>
+              </a:pPr>
+              <a:r>
+                <a:rPr lang="zh-CN" altLang="zh-CN" dirty="0"/>
+                <a:t>Multiple coupled degradation mechanisms cause battery aging.</a:t>
+              </a:r>
+              <a:endParaRPr lang="zh-CN" altLang="en-US" dirty="0"/>
+            </a:p>
+          </p:txBody>
+        </p:sp>
+      </p:grpSp>
+      <p:grpSp>
+        <p:nvGrpSpPr>
+          <p:cNvPr id="7" name="组合 6">
             <a:extLst>
               <a:ext uri="{FF2B5EF4-FFF2-40B4-BE49-F238E27FC236}">
-                <a16:creationId xmlns:a16="http://schemas.microsoft.com/office/drawing/2014/main" id="{A72C88C9-08E3-0025-D623-CE998AA53990}"/>
+                <a16:creationId xmlns:a16="http://schemas.microsoft.com/office/drawing/2014/main" id="{3137914F-9168-232C-CE38-AF46421C6D46}"/>
               </a:ext>
             </a:extLst>
           </p:cNvPr>
-          <p:cNvSpPr txBox="1"/>
+          <p:cNvGrpSpPr/>
           <p:nvPr/>
-        </p:nvSpPr>
-        <p:spPr>
-          <a:xfrm>
-            <a:off x="383950" y="5362942"/>
-            <a:ext cx="7079740" cy="369332"/>
-          </a:xfrm>
-          <a:prstGeom prst="rect">
-            <a:avLst/>
-          </a:prstGeom>
-          <a:noFill/>
-        </p:spPr>
-        <p:txBody>
-          <a:bodyPr wrap="square">
-            <a:spAutoFit/>
-          </a:bodyPr>
-          <a:lstStyle/>
-          <a:p>
-            <a:pPr marL="285750" indent="-285750">
-              <a:buClr>
-                <a:srgbClr val="00549F"/>
-              </a:buClr>
-              <a:buFont typeface="Wingdings" panose="05000000000000000000" pitchFamily="2" charset="2"/>
-              <a:buChar char="n"/>
-            </a:pPr>
-            <a:r>
-              <a:rPr lang="zh-CN" altLang="zh-CN" dirty="0"/>
-              <a:t>Multiple coupled degradation mechanisms cause battery aging.</a:t>
-            </a:r>
-            <a:endParaRPr lang="zh-CN" altLang="en-US" dirty="0"/>
-          </a:p>
-        </p:txBody>
-      </p:sp>
-      <p:pic>
-        <p:nvPicPr>
-          <p:cNvPr id="17" name="图片 16">
-            <a:extLst>
-              <a:ext uri="{FF2B5EF4-FFF2-40B4-BE49-F238E27FC236}">
-                <a16:creationId xmlns:a16="http://schemas.microsoft.com/office/drawing/2014/main" id="{B3D56BE2-FFEA-B653-9B45-8A43E2B7CB73}"/>
-              </a:ext>
-            </a:extLst>
-          </p:cNvPr>
-          <p:cNvPicPr>
-            <a:picLocks noChangeAspect="1"/>
-          </p:cNvPicPr>
-          <p:nvPr/>
-        </p:nvPicPr>
-        <p:blipFill>
-          <a:blip r:embed="rId4"/>
-          <a:stretch>
-            <a:fillRect/>
-          </a:stretch>
-        </p:blipFill>
-        <p:spPr>
+        </p:nvGrpSpPr>
+        <p:grpSpPr>
           <a:xfrm>
             <a:off x="4958928" y="838524"/>
-            <a:ext cx="5009524" cy="2590476"/>
+            <a:ext cx="7104791" cy="3859893"/>
+            <a:chOff x="4958928" y="838524"/>
+            <a:chExt cx="7104791" cy="3859893"/>
           </a:xfrm>
-          <a:prstGeom prst="rect">
-            <a:avLst/>
-          </a:prstGeom>
-        </p:spPr>
-      </p:pic>
-      <p:sp>
-        <p:nvSpPr>
-          <p:cNvPr id="20" name="文本框 19">
-            <a:extLst>
-              <a:ext uri="{FF2B5EF4-FFF2-40B4-BE49-F238E27FC236}">
-                <a16:creationId xmlns:a16="http://schemas.microsoft.com/office/drawing/2014/main" id="{7C79D628-A694-1515-4926-0687D74F37EC}"/>
-              </a:ext>
-            </a:extLst>
-          </p:cNvPr>
-          <p:cNvSpPr txBox="1"/>
-          <p:nvPr/>
-        </p:nvSpPr>
-        <p:spPr>
-          <a:xfrm>
-            <a:off x="4983979" y="3410885"/>
-            <a:ext cx="7079740" cy="1287532"/>
-          </a:xfrm>
-          <a:prstGeom prst="rect">
-            <a:avLst/>
-          </a:prstGeom>
-          <a:noFill/>
-        </p:spPr>
-        <p:txBody>
-          <a:bodyPr wrap="square">
-            <a:spAutoFit/>
-          </a:bodyPr>
-          <a:lstStyle/>
-          <a:p>
-            <a:pPr marL="285750" indent="-285750">
-              <a:lnSpc>
-                <a:spcPct val="150000"/>
-              </a:lnSpc>
-              <a:buClr>
-                <a:srgbClr val="00549F"/>
-              </a:buClr>
-              <a:buFont typeface="Wingdings" panose="05000000000000000000" pitchFamily="2" charset="2"/>
-              <a:buChar char="n"/>
-            </a:pPr>
-            <a:r>
-              <a:rPr lang="zh-CN" altLang="en-US" dirty="0"/>
-              <a:t>2RC Thevenin model captures fast and slow voltage relaxation.</a:t>
-            </a:r>
-          </a:p>
-          <a:p>
-            <a:pPr marL="285750" indent="-285750">
-              <a:lnSpc>
-                <a:spcPct val="150000"/>
-              </a:lnSpc>
-              <a:buClr>
-                <a:srgbClr val="00549F"/>
-              </a:buClr>
-              <a:buFont typeface="Wingdings" panose="05000000000000000000" pitchFamily="2" charset="2"/>
-              <a:buChar char="n"/>
-            </a:pPr>
-            <a:r>
-              <a:rPr lang="zh-CN" altLang="en-US" dirty="0"/>
-              <a:t>R₀ represents the instantaneous ohmic resistance.</a:t>
-            </a:r>
-          </a:p>
-          <a:p>
-            <a:pPr marL="285750" indent="-285750">
-              <a:lnSpc>
-                <a:spcPct val="150000"/>
-              </a:lnSpc>
-              <a:buClr>
-                <a:srgbClr val="00549F"/>
-              </a:buClr>
-              <a:buFont typeface="Wingdings" panose="05000000000000000000" pitchFamily="2" charset="2"/>
-              <a:buChar char="n"/>
-            </a:pPr>
-            <a:r>
-              <a:rPr lang="zh-CN" altLang="en-US" dirty="0"/>
-              <a:t>R₁/τ₁ and R₂/τ₂ describe fast and slow polarization dynamics.</a:t>
-            </a:r>
-          </a:p>
-        </p:txBody>
-      </p:sp>
+        </p:grpSpPr>
+        <p:pic>
+          <p:nvPicPr>
+            <p:cNvPr id="17" name="图片 16">
+              <a:extLst>
+                <a:ext uri="{FF2B5EF4-FFF2-40B4-BE49-F238E27FC236}">
+                  <a16:creationId xmlns:a16="http://schemas.microsoft.com/office/drawing/2014/main" id="{B3D56BE2-FFEA-B653-9B45-8A43E2B7CB73}"/>
+                </a:ext>
+              </a:extLst>
+            </p:cNvPr>
+            <p:cNvPicPr>
+              <a:picLocks noChangeAspect="1"/>
+            </p:cNvPicPr>
+            <p:nvPr/>
+          </p:nvPicPr>
+          <p:blipFill>
+            <a:blip r:embed="rId4"/>
+            <a:stretch>
+              <a:fillRect/>
+            </a:stretch>
+          </p:blipFill>
+          <p:spPr>
+            <a:xfrm>
+              <a:off x="4958928" y="838524"/>
+              <a:ext cx="5009524" cy="2590476"/>
+            </a:xfrm>
+            <a:prstGeom prst="rect">
+              <a:avLst/>
+            </a:prstGeom>
+          </p:spPr>
+        </p:pic>
+        <p:sp>
+          <p:nvSpPr>
+            <p:cNvPr id="20" name="文本框 19">
+              <a:extLst>
+                <a:ext uri="{FF2B5EF4-FFF2-40B4-BE49-F238E27FC236}">
+                  <a16:creationId xmlns:a16="http://schemas.microsoft.com/office/drawing/2014/main" id="{7C79D628-A694-1515-4926-0687D74F37EC}"/>
+                </a:ext>
+              </a:extLst>
+            </p:cNvPr>
+            <p:cNvSpPr txBox="1"/>
+            <p:nvPr/>
+          </p:nvSpPr>
+          <p:spPr>
+            <a:xfrm>
+              <a:off x="4983979" y="3410885"/>
+              <a:ext cx="7079740" cy="1287532"/>
+            </a:xfrm>
+            <a:prstGeom prst="rect">
+              <a:avLst/>
+            </a:prstGeom>
+            <a:noFill/>
+          </p:spPr>
+          <p:txBody>
+            <a:bodyPr wrap="square">
+              <a:spAutoFit/>
+            </a:bodyPr>
+            <a:lstStyle/>
+            <a:p>
+              <a:pPr marL="285750" indent="-285750">
+                <a:lnSpc>
+                  <a:spcPct val="150000"/>
+                </a:lnSpc>
+                <a:buClr>
+                  <a:srgbClr val="00549F"/>
+                </a:buClr>
+                <a:buFont typeface="Wingdings" panose="05000000000000000000" pitchFamily="2" charset="2"/>
+                <a:buChar char="n"/>
+              </a:pPr>
+              <a:r>
+                <a:rPr lang="zh-CN" altLang="en-US" dirty="0"/>
+                <a:t>2RC Thevenin model captures fast and slow voltage relaxation.</a:t>
+              </a:r>
+            </a:p>
+            <a:p>
+              <a:pPr marL="285750" indent="-285750">
+                <a:lnSpc>
+                  <a:spcPct val="150000"/>
+                </a:lnSpc>
+                <a:buClr>
+                  <a:srgbClr val="00549F"/>
+                </a:buClr>
+                <a:buFont typeface="Wingdings" panose="05000000000000000000" pitchFamily="2" charset="2"/>
+                <a:buChar char="n"/>
+              </a:pPr>
+              <a:r>
+                <a:rPr lang="zh-CN" altLang="en-US" dirty="0"/>
+                <a:t>R₀ represents the instantaneous ohmic resistance.</a:t>
+              </a:r>
+            </a:p>
+            <a:p>
+              <a:pPr marL="285750" indent="-285750">
+                <a:lnSpc>
+                  <a:spcPct val="150000"/>
+                </a:lnSpc>
+                <a:buClr>
+                  <a:srgbClr val="00549F"/>
+                </a:buClr>
+                <a:buFont typeface="Wingdings" panose="05000000000000000000" pitchFamily="2" charset="2"/>
+                <a:buChar char="n"/>
+              </a:pPr>
+              <a:r>
+                <a:rPr lang="zh-CN" altLang="en-US" dirty="0"/>
+                <a:t>R₁/τ₁ and R₂/τ₂ describe fast and slow polarization dynamics.</a:t>
+              </a:r>
+            </a:p>
+          </p:txBody>
+        </p:sp>
+      </p:grpSp>
     </p:spTree>
     <p:extLst>
       <p:ext uri="{BB962C8B-B14F-4D97-AF65-F5344CB8AC3E}">
@@ -20999,6 +22944,142 @@
   <p:clrMapOvr>
     <a:masterClrMapping/>
   </p:clrMapOvr>
+  <p:timing>
+    <p:tnLst>
+      <p:par>
+        <p:cTn id="1" dur="indefinite" restart="never" nodeType="tmRoot">
+          <p:childTnLst>
+            <p:seq concurrent="1" nextAc="seek">
+              <p:cTn id="2" dur="indefinite" nodeType="mainSeq">
+                <p:childTnLst>
+                  <p:par>
+                    <p:cTn id="3" fill="hold">
+                      <p:stCondLst>
+                        <p:cond delay="indefinite"/>
+                      </p:stCondLst>
+                      <p:childTnLst>
+                        <p:par>
+                          <p:cTn id="4" fill="hold">
+                            <p:stCondLst>
+                              <p:cond delay="0"/>
+                            </p:stCondLst>
+                            <p:childTnLst>
+                              <p:par>
+                                <p:cTn id="5" presetID="10" presetClass="entr" presetSubtype="0" fill="hold" nodeType="clickEffect">
+                                  <p:stCondLst>
+                                    <p:cond delay="0"/>
+                                  </p:stCondLst>
+                                  <p:childTnLst>
+                                    <p:set>
+                                      <p:cBhvr>
+                                        <p:cTn id="6" dur="1" fill="hold">
+                                          <p:stCondLst>
+                                            <p:cond delay="0"/>
+                                          </p:stCondLst>
+                                        </p:cTn>
+                                        <p:tgtEl>
+                                          <p:spTgt spid="3"/>
+                                        </p:tgtEl>
+                                        <p:attrNameLst>
+                                          <p:attrName>style.visibility</p:attrName>
+                                        </p:attrNameLst>
+                                      </p:cBhvr>
+                                      <p:to>
+                                        <p:strVal val="visible"/>
+                                      </p:to>
+                                    </p:set>
+                                    <p:animEffect transition="in" filter="fade">
+                                      <p:cBhvr>
+                                        <p:cTn id="7" dur="500"/>
+                                        <p:tgtEl>
+                                          <p:spTgt spid="3"/>
+                                        </p:tgtEl>
+                                      </p:cBhvr>
+                                    </p:animEffect>
+                                  </p:childTnLst>
+                                </p:cTn>
+                              </p:par>
+                            </p:childTnLst>
+                          </p:cTn>
+                        </p:par>
+                      </p:childTnLst>
+                    </p:cTn>
+                  </p:par>
+                  <p:par>
+                    <p:cTn id="8" fill="hold">
+                      <p:stCondLst>
+                        <p:cond delay="indefinite"/>
+                      </p:stCondLst>
+                      <p:childTnLst>
+                        <p:par>
+                          <p:cTn id="9" fill="hold">
+                            <p:stCondLst>
+                              <p:cond delay="0"/>
+                            </p:stCondLst>
+                            <p:childTnLst>
+                              <p:par>
+                                <p:cTn id="10" presetID="10" presetClass="entr" presetSubtype="0" fill="hold" nodeType="clickEffect">
+                                  <p:stCondLst>
+                                    <p:cond delay="0"/>
+                                  </p:stCondLst>
+                                  <p:childTnLst>
+                                    <p:set>
+                                      <p:cBhvr>
+                                        <p:cTn id="11" dur="1" fill="hold">
+                                          <p:stCondLst>
+                                            <p:cond delay="0"/>
+                                          </p:stCondLst>
+                                        </p:cTn>
+                                        <p:tgtEl>
+                                          <p:spTgt spid="7"/>
+                                        </p:tgtEl>
+                                        <p:attrNameLst>
+                                          <p:attrName>style.visibility</p:attrName>
+                                        </p:attrNameLst>
+                                      </p:cBhvr>
+                                      <p:to>
+                                        <p:strVal val="visible"/>
+                                      </p:to>
+                                    </p:set>
+                                    <p:animEffect transition="in" filter="fade">
+                                      <p:cBhvr>
+                                        <p:cTn id="12" dur="500"/>
+                                        <p:tgtEl>
+                                          <p:spTgt spid="7"/>
+                                        </p:tgtEl>
+                                      </p:cBhvr>
+                                    </p:animEffect>
+                                  </p:childTnLst>
+                                </p:cTn>
+                              </p:par>
+                            </p:childTnLst>
+                          </p:cTn>
+                        </p:par>
+                      </p:childTnLst>
+                    </p:cTn>
+                  </p:par>
+                </p:childTnLst>
+              </p:cTn>
+              <p:prevCondLst>
+                <p:cond evt="onPrev" delay="0">
+                  <p:tgtEl>
+                    <p:sldTgt/>
+                  </p:tgtEl>
+                </p:cond>
+              </p:prevCondLst>
+              <p:nextCondLst>
+                <p:cond evt="onNext" delay="0">
+                  <p:tgtEl>
+                    <p:sldTgt/>
+                  </p:tgtEl>
+                </p:cond>
+              </p:nextCondLst>
+            </p:seq>
+          </p:childTnLst>
+        </p:cTn>
+      </p:par>
+    </p:tnLst>
+  </p:timing>
 </p:sld>
 </file>
 
@@ -21167,7 +23248,7 @@
           <a:p>
             <a:r>
               <a:rPr lang="de-DE" altLang="zh-CN" dirty="0"/>
-              <a:t>09.07.2026</a:t>
+              <a:t>08.07.2026</a:t>
             </a:r>
           </a:p>
           <a:p>
@@ -21527,9 +23608,8 @@
             </a:pPr>
             <a:r>
               <a:rPr lang="de-DE" altLang="zh-CN" dirty="0"/>
-              <a:t>09.07.2026</a:t>
-            </a:r>
-            <a:endParaRPr lang="de-DE" altLang="zh-CN"/>
+              <a:t>08.07.2026</a:t>
+            </a:r>
           </a:p>
           <a:p>
             <a:pPr>
@@ -21537,7 +23617,7 @@
                 <a:spcPts val="600"/>
               </a:spcAft>
             </a:pPr>
-            <a:endParaRPr lang="de-DE"/>
+            <a:endParaRPr lang="de-DE" dirty="0"/>
           </a:p>
         </p:txBody>
       </p:sp>
